--- a/templates/provisional.pptx
+++ b/templates/provisional.pptx
@@ -10,6 +10,16 @@
     <p:sldId id="258" r:id="rId10"/>
     <p:sldId id="259" r:id="rId11"/>
     <p:sldId id="260" r:id="rId12"/>
+    <p:sldId id="261" r:id="rId13"/>
+    <p:sldId id="262" r:id="rId14"/>
+    <p:sldId id="263" r:id="rId15"/>
+    <p:sldId id="264" r:id="rId16"/>
+    <p:sldId id="265" r:id="rId17"/>
+    <p:sldId id="266" r:id="rId18"/>
+    <p:sldId id="267" r:id="rId19"/>
+    <p:sldId id="268" r:id="rId20"/>
+    <p:sldId id="269" r:id="rId21"/>
+    <p:sldId id="270" r:id="rId22"/>
   </p:sldIdLst>
   <p:sldSz cx="12192000" cy="6858000" type="screen4x3"/>
   <p:notesSz cx="6858000" cy="9144000"/>
@@ -541,6 +551,511 @@
 </p:notes>
 </file>
 
+<file path=ppt/notesSlides/notesSlide10.xml><?xml version="1.0" encoding="utf-8"?>
+<p:notes xmlns:a="http://schemas.openxmlformats.org/drawingml/2006/main" xmlns:p="http://schemas.openxmlformats.org/presentationml/2006/main" xmlns:r="http://schemas.openxmlformats.org/officeDocument/2006/relationships">
+  <p:cSld>
+    <p:spTree>
+      <p:nvGrpSpPr>
+        <p:cNvPr id="1" name=""/>
+        <p:cNvGrpSpPr/>
+        <p:nvPr/>
+      </p:nvGrpSpPr>
+      <p:grpSpPr>
+        <a:xfrm>
+          <a:off x="0" y="0"/>
+          <a:ext cx="0" cy="0"/>
+          <a:chOff x="0" y="0"/>
+          <a:chExt cx="0" cy="0"/>
+        </a:xfrm>
+      </p:grpSpPr>
+      <p:sp>
+        <p:nvSpPr>
+          <p:cNvPr id="2" name="Slide Image Placeholder 1"/>
+          <p:cNvSpPr>
+            <a:spLocks noGrp="1"/>
+          </p:cNvSpPr>
+          <p:nvPr>
+            <p:ph type="sldImg" idx="2"/>
+          </p:nvPr>
+        </p:nvSpPr>
+        <p:spPr/>
+      </p:sp>
+      <p:sp>
+        <p:nvSpPr>
+          <p:cNvPr id="3" name="Notes Placeholder 2"/>
+          <p:cNvSpPr>
+            <a:spLocks noGrp="1"/>
+          </p:cNvSpPr>
+          <p:nvPr>
+            <p:ph type="body" idx="3" sz="quarter"/>
+          </p:nvPr>
+        </p:nvSpPr>
+        <p:spPr/>
+        <p:txBody>
+          <a:bodyPr/>
+          <a:lstStyle/>
+          <a:p>
+            <a:r>
+              <a:t>type: collage</a:t>
+            </a:r>
+          </a:p>
+          <a:p>
+            <a:r>
+              <a:t>role: [closing]</a:t>
+            </a:r>
+          </a:p>
+          <a:p>
+            <a:r>
+              <a:t>label: 写真コラージュ（結び・表紙の別案）</a:t>
+            </a:r>
+          </a:p>
+        </p:txBody>
+      </p:sp>
+      <p:sp>
+        <p:nvSpPr>
+          <p:cNvPr id="4" name="Slide Number Placeholder 3"/>
+          <p:cNvSpPr>
+            <a:spLocks noGrp="1"/>
+          </p:cNvSpPr>
+          <p:nvPr>
+            <p:ph type="sldNum" idx="5" sz="quarter"/>
+          </p:nvPr>
+        </p:nvSpPr>
+        <p:spPr/>
+      </p:sp>
+    </p:spTree>
+  </p:cSld>
+  <p:clrMapOvr>
+    <a:masterClrMapping/>
+  </p:clrMapOvr>
+</p:notes>
+</file>
+
+<file path=ppt/notesSlides/notesSlide11.xml><?xml version="1.0" encoding="utf-8"?>
+<p:notes xmlns:a="http://schemas.openxmlformats.org/drawingml/2006/main" xmlns:p="http://schemas.openxmlformats.org/presentationml/2006/main" xmlns:r="http://schemas.openxmlformats.org/officeDocument/2006/relationships">
+  <p:cSld>
+    <p:spTree>
+      <p:nvGrpSpPr>
+        <p:cNvPr id="1" name=""/>
+        <p:cNvGrpSpPr/>
+        <p:nvPr/>
+      </p:nvGrpSpPr>
+      <p:grpSpPr>
+        <a:xfrm>
+          <a:off x="0" y="0"/>
+          <a:ext cx="0" cy="0"/>
+          <a:chOff x="0" y="0"/>
+          <a:chExt cx="0" cy="0"/>
+        </a:xfrm>
+      </p:grpSpPr>
+      <p:sp>
+        <p:nvSpPr>
+          <p:cNvPr id="2" name="Slide Image Placeholder 1"/>
+          <p:cNvSpPr>
+            <a:spLocks noGrp="1"/>
+          </p:cNvSpPr>
+          <p:nvPr>
+            <p:ph type="sldImg" idx="2"/>
+          </p:nvPr>
+        </p:nvSpPr>
+        <p:spPr/>
+      </p:sp>
+      <p:sp>
+        <p:nvSpPr>
+          <p:cNvPr id="3" name="Notes Placeholder 2"/>
+          <p:cNvSpPr>
+            <a:spLocks noGrp="1"/>
+          </p:cNvSpPr>
+          <p:nvPr>
+            <p:ph type="body" idx="3" sz="quarter"/>
+          </p:nvPr>
+        </p:nvSpPr>
+        <p:spPr/>
+        <p:txBody>
+          <a:bodyPr/>
+          <a:lstStyle/>
+          <a:p>
+            <a:r>
+              <a:t>type: toc</a:t>
+            </a:r>
+          </a:p>
+          <a:p>
+            <a:r>
+              <a:t>variant: "3"</a:t>
+            </a:r>
+          </a:p>
+          <a:p>
+            <a:r>
+              <a:t>role: [toc]</a:t>
+            </a:r>
+          </a:p>
+          <a:p>
+            <a:r>
+              <a:t>label: 目次（3項目）</a:t>
+            </a:r>
+          </a:p>
+        </p:txBody>
+      </p:sp>
+      <p:sp>
+        <p:nvSpPr>
+          <p:cNvPr id="4" name="Slide Number Placeholder 3"/>
+          <p:cNvSpPr>
+            <a:spLocks noGrp="1"/>
+          </p:cNvSpPr>
+          <p:nvPr>
+            <p:ph type="sldNum" idx="5" sz="quarter"/>
+          </p:nvPr>
+        </p:nvSpPr>
+        <p:spPr/>
+      </p:sp>
+    </p:spTree>
+  </p:cSld>
+  <p:clrMapOvr>
+    <a:masterClrMapping/>
+  </p:clrMapOvr>
+</p:notes>
+</file>
+
+<file path=ppt/notesSlides/notesSlide12.xml><?xml version="1.0" encoding="utf-8"?>
+<p:notes xmlns:a="http://schemas.openxmlformats.org/drawingml/2006/main" xmlns:p="http://schemas.openxmlformats.org/presentationml/2006/main" xmlns:r="http://schemas.openxmlformats.org/officeDocument/2006/relationships">
+  <p:cSld>
+    <p:spTree>
+      <p:nvGrpSpPr>
+        <p:cNvPr id="1" name=""/>
+        <p:cNvGrpSpPr/>
+        <p:nvPr/>
+      </p:nvGrpSpPr>
+      <p:grpSpPr>
+        <a:xfrm>
+          <a:off x="0" y="0"/>
+          <a:ext cx="0" cy="0"/>
+          <a:chOff x="0" y="0"/>
+          <a:chExt cx="0" cy="0"/>
+        </a:xfrm>
+      </p:grpSpPr>
+      <p:sp>
+        <p:nvSpPr>
+          <p:cNvPr id="2" name="Slide Image Placeholder 1"/>
+          <p:cNvSpPr>
+            <a:spLocks noGrp="1"/>
+          </p:cNvSpPr>
+          <p:nvPr>
+            <p:ph type="sldImg" idx="2"/>
+          </p:nvPr>
+        </p:nvSpPr>
+        <p:spPr/>
+      </p:sp>
+      <p:sp>
+        <p:nvSpPr>
+          <p:cNvPr id="3" name="Notes Placeholder 2"/>
+          <p:cNvSpPr>
+            <a:spLocks noGrp="1"/>
+          </p:cNvSpPr>
+          <p:nvPr>
+            <p:ph type="body" idx="3" sz="quarter"/>
+          </p:nvPr>
+        </p:nvSpPr>
+        <p:spPr/>
+        <p:txBody>
+          <a:bodyPr/>
+          <a:lstStyle/>
+          <a:p>
+            <a:r>
+              <a:t>type: toc</a:t>
+            </a:r>
+          </a:p>
+          <a:p>
+            <a:r>
+              <a:t>variant: "4"</a:t>
+            </a:r>
+          </a:p>
+          <a:p>
+            <a:r>
+              <a:t>role: [toc]</a:t>
+            </a:r>
+          </a:p>
+          <a:p>
+            <a:r>
+              <a:t>label: 目次（4項目）</a:t>
+            </a:r>
+          </a:p>
+        </p:txBody>
+      </p:sp>
+      <p:sp>
+        <p:nvSpPr>
+          <p:cNvPr id="4" name="Slide Number Placeholder 3"/>
+          <p:cNvSpPr>
+            <a:spLocks noGrp="1"/>
+          </p:cNvSpPr>
+          <p:nvPr>
+            <p:ph type="sldNum" idx="5" sz="quarter"/>
+          </p:nvPr>
+        </p:nvSpPr>
+        <p:spPr/>
+      </p:sp>
+    </p:spTree>
+  </p:cSld>
+  <p:clrMapOvr>
+    <a:masterClrMapping/>
+  </p:clrMapOvr>
+</p:notes>
+</file>
+
+<file path=ppt/notesSlides/notesSlide13.xml><?xml version="1.0" encoding="utf-8"?>
+<p:notes xmlns:a="http://schemas.openxmlformats.org/drawingml/2006/main" xmlns:p="http://schemas.openxmlformats.org/presentationml/2006/main" xmlns:r="http://schemas.openxmlformats.org/officeDocument/2006/relationships">
+  <p:cSld>
+    <p:spTree>
+      <p:nvGrpSpPr>
+        <p:cNvPr id="1" name=""/>
+        <p:cNvGrpSpPr/>
+        <p:nvPr/>
+      </p:nvGrpSpPr>
+      <p:grpSpPr>
+        <a:xfrm>
+          <a:off x="0" y="0"/>
+          <a:ext cx="0" cy="0"/>
+          <a:chOff x="0" y="0"/>
+          <a:chExt cx="0" cy="0"/>
+        </a:xfrm>
+      </p:grpSpPr>
+      <p:sp>
+        <p:nvSpPr>
+          <p:cNvPr id="2" name="Slide Image Placeholder 1"/>
+          <p:cNvSpPr>
+            <a:spLocks noGrp="1"/>
+          </p:cNvSpPr>
+          <p:nvPr>
+            <p:ph type="sldImg" idx="2"/>
+          </p:nvPr>
+        </p:nvSpPr>
+        <p:spPr/>
+      </p:sp>
+      <p:sp>
+        <p:nvSpPr>
+          <p:cNvPr id="3" name="Notes Placeholder 2"/>
+          <p:cNvSpPr>
+            <a:spLocks noGrp="1"/>
+          </p:cNvSpPr>
+          <p:nvPr>
+            <p:ph type="body" idx="3" sz="quarter"/>
+          </p:nvPr>
+        </p:nvSpPr>
+        <p:spPr/>
+        <p:txBody>
+          <a:bodyPr/>
+          <a:lstStyle/>
+          <a:p>
+            <a:r>
+              <a:t>type: toc</a:t>
+            </a:r>
+          </a:p>
+          <a:p>
+            <a:r>
+              <a:t>variant: "5"</a:t>
+            </a:r>
+          </a:p>
+          <a:p>
+            <a:r>
+              <a:t>role: [toc]</a:t>
+            </a:r>
+          </a:p>
+          <a:p>
+            <a:r>
+              <a:t>label: 目次（5項目）</a:t>
+            </a:r>
+          </a:p>
+        </p:txBody>
+      </p:sp>
+      <p:sp>
+        <p:nvSpPr>
+          <p:cNvPr id="4" name="Slide Number Placeholder 3"/>
+          <p:cNvSpPr>
+            <a:spLocks noGrp="1"/>
+          </p:cNvSpPr>
+          <p:nvPr>
+            <p:ph type="sldNum" idx="5" sz="quarter"/>
+          </p:nvPr>
+        </p:nvSpPr>
+        <p:spPr/>
+      </p:sp>
+    </p:spTree>
+  </p:cSld>
+  <p:clrMapOvr>
+    <a:masterClrMapping/>
+  </p:clrMapOvr>
+</p:notes>
+</file>
+
+<file path=ppt/notesSlides/notesSlide14.xml><?xml version="1.0" encoding="utf-8"?>
+<p:notes xmlns:a="http://schemas.openxmlformats.org/drawingml/2006/main" xmlns:p="http://schemas.openxmlformats.org/presentationml/2006/main" xmlns:r="http://schemas.openxmlformats.org/officeDocument/2006/relationships">
+  <p:cSld>
+    <p:spTree>
+      <p:nvGrpSpPr>
+        <p:cNvPr id="1" name=""/>
+        <p:cNvGrpSpPr/>
+        <p:nvPr/>
+      </p:nvGrpSpPr>
+      <p:grpSpPr>
+        <a:xfrm>
+          <a:off x="0" y="0"/>
+          <a:ext cx="0" cy="0"/>
+          <a:chOff x="0" y="0"/>
+          <a:chExt cx="0" cy="0"/>
+        </a:xfrm>
+      </p:grpSpPr>
+      <p:sp>
+        <p:nvSpPr>
+          <p:cNvPr id="2" name="Slide Image Placeholder 1"/>
+          <p:cNvSpPr>
+            <a:spLocks noGrp="1"/>
+          </p:cNvSpPr>
+          <p:nvPr>
+            <p:ph type="sldImg" idx="2"/>
+          </p:nvPr>
+        </p:nvSpPr>
+        <p:spPr/>
+      </p:sp>
+      <p:sp>
+        <p:nvSpPr>
+          <p:cNvPr id="3" name="Notes Placeholder 2"/>
+          <p:cNvSpPr>
+            <a:spLocks noGrp="1"/>
+          </p:cNvSpPr>
+          <p:nvPr>
+            <p:ph type="body" idx="3" sz="quarter"/>
+          </p:nvPr>
+        </p:nvSpPr>
+        <p:spPr/>
+        <p:txBody>
+          <a:bodyPr/>
+          <a:lstStyle/>
+          <a:p>
+            <a:r>
+              <a:t>type: photo-text</a:t>
+            </a:r>
+          </a:p>
+          <a:p>
+            <a:r>
+              <a:t>variant: "a"</a:t>
+            </a:r>
+          </a:p>
+          <a:p>
+            <a:r>
+              <a:t>role: [photo-text]</a:t>
+            </a:r>
+          </a:p>
+          <a:p>
+            <a:r>
+              <a:t>label: 写真＋本文A（見出しと説明文）</a:t>
+            </a:r>
+          </a:p>
+        </p:txBody>
+      </p:sp>
+      <p:sp>
+        <p:nvSpPr>
+          <p:cNvPr id="4" name="Slide Number Placeholder 3"/>
+          <p:cNvSpPr>
+            <a:spLocks noGrp="1"/>
+          </p:cNvSpPr>
+          <p:nvPr>
+            <p:ph type="sldNum" idx="5" sz="quarter"/>
+          </p:nvPr>
+        </p:nvSpPr>
+        <p:spPr/>
+      </p:sp>
+    </p:spTree>
+  </p:cSld>
+  <p:clrMapOvr>
+    <a:masterClrMapping/>
+  </p:clrMapOvr>
+</p:notes>
+</file>
+
+<file path=ppt/notesSlides/notesSlide15.xml><?xml version="1.0" encoding="utf-8"?>
+<p:notes xmlns:a="http://schemas.openxmlformats.org/drawingml/2006/main" xmlns:p="http://schemas.openxmlformats.org/presentationml/2006/main" xmlns:r="http://schemas.openxmlformats.org/officeDocument/2006/relationships">
+  <p:cSld>
+    <p:spTree>
+      <p:nvGrpSpPr>
+        <p:cNvPr id="1" name=""/>
+        <p:cNvGrpSpPr/>
+        <p:nvPr/>
+      </p:nvGrpSpPr>
+      <p:grpSpPr>
+        <a:xfrm>
+          <a:off x="0" y="0"/>
+          <a:ext cx="0" cy="0"/>
+          <a:chOff x="0" y="0"/>
+          <a:chExt cx="0" cy="0"/>
+        </a:xfrm>
+      </p:grpSpPr>
+      <p:sp>
+        <p:nvSpPr>
+          <p:cNvPr id="2" name="Slide Image Placeholder 1"/>
+          <p:cNvSpPr>
+            <a:spLocks noGrp="1"/>
+          </p:cNvSpPr>
+          <p:nvPr>
+            <p:ph type="sldImg" idx="2"/>
+          </p:nvPr>
+        </p:nvSpPr>
+        <p:spPr/>
+      </p:sp>
+      <p:sp>
+        <p:nvSpPr>
+          <p:cNvPr id="3" name="Notes Placeholder 2"/>
+          <p:cNvSpPr>
+            <a:spLocks noGrp="1"/>
+          </p:cNvSpPr>
+          <p:nvPr>
+            <p:ph type="body" idx="3" sz="quarter"/>
+          </p:nvPr>
+        </p:nvSpPr>
+        <p:spPr/>
+        <p:txBody>
+          <a:bodyPr/>
+          <a:lstStyle/>
+          <a:p>
+            <a:r>
+              <a:t>type: photo-text</a:t>
+            </a:r>
+          </a:p>
+          <a:p>
+            <a:r>
+              <a:t>variant: "b"</a:t>
+            </a:r>
+          </a:p>
+          <a:p>
+            <a:r>
+              <a:t>role: [photo-text]</a:t>
+            </a:r>
+          </a:p>
+          <a:p>
+            <a:r>
+              <a:t>label: 写真＋本文B（見出しと要点3つ）</a:t>
+            </a:r>
+          </a:p>
+        </p:txBody>
+      </p:sp>
+      <p:sp>
+        <p:nvSpPr>
+          <p:cNvPr id="4" name="Slide Number Placeholder 3"/>
+          <p:cNvSpPr>
+            <a:spLocks noGrp="1"/>
+          </p:cNvSpPr>
+          <p:nvPr>
+            <p:ph type="sldNum" idx="5" sz="quarter"/>
+          </p:nvPr>
+        </p:nvSpPr>
+        <p:spPr/>
+      </p:sp>
+    </p:spTree>
+  </p:cSld>
+  <p:clrMapOvr>
+    <a:masterClrMapping/>
+  </p:clrMapOvr>
+</p:notes>
+</file>
+
 <file path=ppt/notesSlides/notesSlide2.xml><?xml version="1.0" encoding="utf-8"?>
 <p:notes xmlns:a="http://schemas.openxmlformats.org/drawingml/2006/main" xmlns:p="http://schemas.openxmlformats.org/presentationml/2006/main" xmlns:r="http://schemas.openxmlformats.org/officeDocument/2006/relationships">
   <p:cSld>
@@ -857,6 +1372,336 @@
           <a:p>
             <a:r>
               <a:t>label: 数値訴求（3つの数字）</a:t>
+            </a:r>
+          </a:p>
+        </p:txBody>
+      </p:sp>
+      <p:sp>
+        <p:nvSpPr>
+          <p:cNvPr id="4" name="Slide Number Placeholder 3"/>
+          <p:cNvSpPr>
+            <a:spLocks noGrp="1"/>
+          </p:cNvSpPr>
+          <p:nvPr>
+            <p:ph type="sldNum" idx="5" sz="quarter"/>
+          </p:nvPr>
+        </p:nvSpPr>
+        <p:spPr/>
+      </p:sp>
+    </p:spTree>
+  </p:cSld>
+  <p:clrMapOvr>
+    <a:masterClrMapping/>
+  </p:clrMapOvr>
+</p:notes>
+</file>
+
+<file path=ppt/notesSlides/notesSlide6.xml><?xml version="1.0" encoding="utf-8"?>
+<p:notes xmlns:a="http://schemas.openxmlformats.org/drawingml/2006/main" xmlns:p="http://schemas.openxmlformats.org/presentationml/2006/main" xmlns:r="http://schemas.openxmlformats.org/officeDocument/2006/relationships">
+  <p:cSld>
+    <p:spTree>
+      <p:nvGrpSpPr>
+        <p:cNvPr id="1" name=""/>
+        <p:cNvGrpSpPr/>
+        <p:nvPr/>
+      </p:nvGrpSpPr>
+      <p:grpSpPr>
+        <a:xfrm>
+          <a:off x="0" y="0"/>
+          <a:ext cx="0" cy="0"/>
+          <a:chOff x="0" y="0"/>
+          <a:chExt cx="0" cy="0"/>
+        </a:xfrm>
+      </p:grpSpPr>
+      <p:sp>
+        <p:nvSpPr>
+          <p:cNvPr id="2" name="Slide Image Placeholder 1"/>
+          <p:cNvSpPr>
+            <a:spLocks noGrp="1"/>
+          </p:cNvSpPr>
+          <p:nvPr>
+            <p:ph type="sldImg" idx="2"/>
+          </p:nvPr>
+        </p:nvSpPr>
+        <p:spPr/>
+      </p:sp>
+      <p:sp>
+        <p:nvSpPr>
+          <p:cNvPr id="3" name="Notes Placeholder 2"/>
+          <p:cNvSpPr>
+            <a:spLocks noGrp="1"/>
+          </p:cNvSpPr>
+          <p:nvPr>
+            <p:ph type="body" idx="3" sz="quarter"/>
+          </p:nvPr>
+        </p:nvSpPr>
+        <p:spPr/>
+        <p:txBody>
+          <a:bodyPr/>
+          <a:lstStyle/>
+          <a:p>
+            <a:r>
+              <a:t>type: attention</a:t>
+            </a:r>
+          </a:p>
+          <a:p>
+            <a:r>
+              <a:t>role: [emphasis]</a:t>
+            </a:r>
+          </a:p>
+          <a:p>
+            <a:r>
+              <a:t>label: 注意・強調（重要なことを改めて言う）</a:t>
+            </a:r>
+          </a:p>
+        </p:txBody>
+      </p:sp>
+      <p:sp>
+        <p:nvSpPr>
+          <p:cNvPr id="4" name="Slide Number Placeholder 3"/>
+          <p:cNvSpPr>
+            <a:spLocks noGrp="1"/>
+          </p:cNvSpPr>
+          <p:nvPr>
+            <p:ph type="sldNum" idx="5" sz="quarter"/>
+          </p:nvPr>
+        </p:nvSpPr>
+        <p:spPr/>
+      </p:sp>
+    </p:spTree>
+  </p:cSld>
+  <p:clrMapOvr>
+    <a:masterClrMapping/>
+  </p:clrMapOvr>
+</p:notes>
+</file>
+
+<file path=ppt/notesSlides/notesSlide7.xml><?xml version="1.0" encoding="utf-8"?>
+<p:notes xmlns:a="http://schemas.openxmlformats.org/drawingml/2006/main" xmlns:p="http://schemas.openxmlformats.org/presentationml/2006/main" xmlns:r="http://schemas.openxmlformats.org/officeDocument/2006/relationships">
+  <p:cSld>
+    <p:spTree>
+      <p:nvGrpSpPr>
+        <p:cNvPr id="1" name=""/>
+        <p:cNvGrpSpPr/>
+        <p:nvPr/>
+      </p:nvGrpSpPr>
+      <p:grpSpPr>
+        <a:xfrm>
+          <a:off x="0" y="0"/>
+          <a:ext cx="0" cy="0"/>
+          <a:chOff x="0" y="0"/>
+          <a:chExt cx="0" cy="0"/>
+        </a:xfrm>
+      </p:grpSpPr>
+      <p:sp>
+        <p:nvSpPr>
+          <p:cNvPr id="2" name="Slide Image Placeholder 1"/>
+          <p:cNvSpPr>
+            <a:spLocks noGrp="1"/>
+          </p:cNvSpPr>
+          <p:nvPr>
+            <p:ph type="sldImg" idx="2"/>
+          </p:nvPr>
+        </p:nvSpPr>
+        <p:spPr/>
+      </p:sp>
+      <p:sp>
+        <p:nvSpPr>
+          <p:cNvPr id="3" name="Notes Placeholder 2"/>
+          <p:cNvSpPr>
+            <a:spLocks noGrp="1"/>
+          </p:cNvSpPr>
+          <p:nvPr>
+            <p:ph type="body" idx="3" sz="quarter"/>
+          </p:nvPr>
+        </p:nvSpPr>
+        <p:spPr/>
+        <p:txBody>
+          <a:bodyPr/>
+          <a:lstStyle/>
+          <a:p>
+            <a:r>
+              <a:t>type: section</a:t>
+            </a:r>
+          </a:p>
+          <a:p>
+            <a:r>
+              <a:t>role: [section]</a:t>
+            </a:r>
+          </a:p>
+          <a:p>
+            <a:r>
+              <a:t>label: 中扉（章の見出し）</a:t>
+            </a:r>
+          </a:p>
+        </p:txBody>
+      </p:sp>
+      <p:sp>
+        <p:nvSpPr>
+          <p:cNvPr id="4" name="Slide Number Placeholder 3"/>
+          <p:cNvSpPr>
+            <a:spLocks noGrp="1"/>
+          </p:cNvSpPr>
+          <p:nvPr>
+            <p:ph type="sldNum" idx="5" sz="quarter"/>
+          </p:nvPr>
+        </p:nvSpPr>
+        <p:spPr/>
+      </p:sp>
+    </p:spTree>
+  </p:cSld>
+  <p:clrMapOvr>
+    <a:masterClrMapping/>
+  </p:clrMapOvr>
+</p:notes>
+</file>
+
+<file path=ppt/notesSlides/notesSlide8.xml><?xml version="1.0" encoding="utf-8"?>
+<p:notes xmlns:a="http://schemas.openxmlformats.org/drawingml/2006/main" xmlns:p="http://schemas.openxmlformats.org/presentationml/2006/main" xmlns:r="http://schemas.openxmlformats.org/officeDocument/2006/relationships">
+  <p:cSld>
+    <p:spTree>
+      <p:nvGrpSpPr>
+        <p:cNvPr id="1" name=""/>
+        <p:cNvGrpSpPr/>
+        <p:nvPr/>
+      </p:nvGrpSpPr>
+      <p:grpSpPr>
+        <a:xfrm>
+          <a:off x="0" y="0"/>
+          <a:ext cx="0" cy="0"/>
+          <a:chOff x="0" y="0"/>
+          <a:chExt cx="0" cy="0"/>
+        </a:xfrm>
+      </p:grpSpPr>
+      <p:sp>
+        <p:nvSpPr>
+          <p:cNvPr id="2" name="Slide Image Placeholder 1"/>
+          <p:cNvSpPr>
+            <a:spLocks noGrp="1"/>
+          </p:cNvSpPr>
+          <p:nvPr>
+            <p:ph type="sldImg" idx="2"/>
+          </p:nvPr>
+        </p:nvSpPr>
+        <p:spPr/>
+      </p:sp>
+      <p:sp>
+        <p:nvSpPr>
+          <p:cNvPr id="3" name="Notes Placeholder 2"/>
+          <p:cNvSpPr>
+            <a:spLocks noGrp="1"/>
+          </p:cNvSpPr>
+          <p:nvPr>
+            <p:ph type="body" idx="3" sz="quarter"/>
+          </p:nvPr>
+        </p:nvSpPr>
+        <p:spPr/>
+        <p:txBody>
+          <a:bodyPr/>
+          <a:lstStyle/>
+          <a:p>
+            <a:r>
+              <a:t>type: steps</a:t>
+            </a:r>
+          </a:p>
+          <a:p>
+            <a:r>
+              <a:t>variant: "3"</a:t>
+            </a:r>
+          </a:p>
+          <a:p>
+            <a:r>
+              <a:t>role: [steps]</a:t>
+            </a:r>
+          </a:p>
+          <a:p>
+            <a:r>
+              <a:t>label: 画像が並ぶ（手順 3つ）</a:t>
+            </a:r>
+          </a:p>
+        </p:txBody>
+      </p:sp>
+      <p:sp>
+        <p:nvSpPr>
+          <p:cNvPr id="4" name="Slide Number Placeholder 3"/>
+          <p:cNvSpPr>
+            <a:spLocks noGrp="1"/>
+          </p:cNvSpPr>
+          <p:nvPr>
+            <p:ph type="sldNum" idx="5" sz="quarter"/>
+          </p:nvPr>
+        </p:nvSpPr>
+        <p:spPr/>
+      </p:sp>
+    </p:spTree>
+  </p:cSld>
+  <p:clrMapOvr>
+    <a:masterClrMapping/>
+  </p:clrMapOvr>
+</p:notes>
+</file>
+
+<file path=ppt/notesSlides/notesSlide9.xml><?xml version="1.0" encoding="utf-8"?>
+<p:notes xmlns:a="http://schemas.openxmlformats.org/drawingml/2006/main" xmlns:p="http://schemas.openxmlformats.org/presentationml/2006/main" xmlns:r="http://schemas.openxmlformats.org/officeDocument/2006/relationships">
+  <p:cSld>
+    <p:spTree>
+      <p:nvGrpSpPr>
+        <p:cNvPr id="1" name=""/>
+        <p:cNvGrpSpPr/>
+        <p:nvPr/>
+      </p:nvGrpSpPr>
+      <p:grpSpPr>
+        <a:xfrm>
+          <a:off x="0" y="0"/>
+          <a:ext cx="0" cy="0"/>
+          <a:chOff x="0" y="0"/>
+          <a:chExt cx="0" cy="0"/>
+        </a:xfrm>
+      </p:grpSpPr>
+      <p:sp>
+        <p:nvSpPr>
+          <p:cNvPr id="2" name="Slide Image Placeholder 1"/>
+          <p:cNvSpPr>
+            <a:spLocks noGrp="1"/>
+          </p:cNvSpPr>
+          <p:nvPr>
+            <p:ph type="sldImg" idx="2"/>
+          </p:nvPr>
+        </p:nvSpPr>
+        <p:spPr/>
+      </p:sp>
+      <p:sp>
+        <p:nvSpPr>
+          <p:cNvPr id="3" name="Notes Placeholder 2"/>
+          <p:cNvSpPr>
+            <a:spLocks noGrp="1"/>
+          </p:cNvSpPr>
+          <p:nvPr>
+            <p:ph type="body" idx="3" sz="quarter"/>
+          </p:nvPr>
+        </p:nvSpPr>
+        <p:spPr/>
+        <p:txBody>
+          <a:bodyPr/>
+          <a:lstStyle/>
+          <a:p>
+            <a:r>
+              <a:t>type: steps</a:t>
+            </a:r>
+          </a:p>
+          <a:p>
+            <a:r>
+              <a:t>variant: "4"</a:t>
+            </a:r>
+          </a:p>
+          <a:p>
+            <a:r>
+              <a:t>role: [steps]</a:t>
+            </a:r>
+          </a:p>
+          <a:p>
+            <a:r>
+              <a:t>label: 画像が並ぶ（手順 4つ）</a:t>
             </a:r>
           </a:p>
         </p:txBody>
@@ -4576,6 +5421,3369 @@
 </p:sld>
 </file>
 
+<file path=ppt/slides/slide10.xml><?xml version="1.0" encoding="utf-8"?>
+<p:sld xmlns:a="http://schemas.openxmlformats.org/drawingml/2006/main" xmlns:p="http://schemas.openxmlformats.org/presentationml/2006/main" xmlns:r="http://schemas.openxmlformats.org/officeDocument/2006/relationships">
+  <p:cSld>
+    <p:spTree>
+      <p:nvGrpSpPr>
+        <p:cNvPr id="1" name=""/>
+        <p:cNvGrpSpPr/>
+        <p:nvPr/>
+      </p:nvGrpSpPr>
+      <p:grpSpPr/>
+      <p:sp>
+        <p:nvSpPr>
+          <p:cNvPr id="2" name="deco.band"/>
+          <p:cNvSpPr/>
+          <p:nvPr/>
+        </p:nvSpPr>
+        <p:spPr>
+          <a:xfrm>
+            <a:off x="6941820" y="0"/>
+            <a:ext cx="5250180" cy="4279900"/>
+          </a:xfrm>
+          <a:custGeom>
+            <a:avLst/>
+            <a:gdLst/>
+            <a:ahLst/>
+            <a:cxnLst/>
+            <a:rect l="l" t="t" r="r" b="b"/>
+            <a:pathLst>
+              <a:path w="5250180" h="4279900">
+                <a:moveTo>
+                  <a:pt x="0" y="2753360"/>
+                </a:moveTo>
+                <a:lnTo>
+                  <a:pt x="2753360" y="0"/>
+                </a:lnTo>
+                <a:lnTo>
+                  <a:pt x="5250180" y="0"/>
+                </a:lnTo>
+                <a:lnTo>
+                  <a:pt x="5250180" y="556260"/>
+                </a:lnTo>
+                <a:lnTo>
+                  <a:pt x="1526540" y="4279900"/>
+                </a:lnTo>
+                <a:close/>
+              </a:path>
+            </a:pathLst>
+          </a:custGeom>
+          <a:solidFill>
+            <a:schemeClr val="bg2"/>
+          </a:solidFill>
+          <a:ln>
+            <a:noFill/>
+          </a:ln>
+        </p:spPr>
+      </p:sp>
+      <p:sp>
+        <p:nvSpPr>
+          <p:cNvPr id="3" name="deco.tri"/>
+          <p:cNvSpPr/>
+          <p:nvPr/>
+        </p:nvSpPr>
+        <p:spPr>
+          <a:xfrm>
+            <a:off x="9098280" y="3736340"/>
+            <a:ext cx="3216910" cy="3216910"/>
+          </a:xfrm>
+          <a:custGeom>
+            <a:avLst/>
+            <a:gdLst/>
+            <a:ahLst/>
+            <a:cxnLst/>
+            <a:rect l="l" t="t" r="r" b="b"/>
+            <a:pathLst>
+              <a:path w="3216910" h="3216910">
+                <a:moveTo>
+                  <a:pt x="0" y="3216910"/>
+                </a:moveTo>
+                <a:lnTo>
+                  <a:pt x="3216910" y="0"/>
+                </a:lnTo>
+                <a:lnTo>
+                  <a:pt x="3216910" y="3216910"/>
+                </a:lnTo>
+                <a:close/>
+              </a:path>
+            </a:pathLst>
+          </a:custGeom>
+          <a:solidFill>
+            <a:schemeClr val="accent2"/>
+          </a:solidFill>
+          <a:ln>
+            <a:noFill/>
+          </a:ln>
+        </p:spPr>
+      </p:sp>
+      <p:sp>
+        <p:nvSpPr>
+          <p:cNvPr id="4" name="deco.line-blue"/>
+          <p:cNvSpPr/>
+          <p:nvPr/>
+        </p:nvSpPr>
+        <p:spPr>
+          <a:xfrm>
+            <a:off x="8031480" y="5894070"/>
+            <a:ext cx="1189990" cy="963930"/>
+          </a:xfrm>
+          <a:custGeom>
+            <a:avLst/>
+            <a:gdLst/>
+            <a:ahLst/>
+            <a:cxnLst/>
+            <a:rect l="l" t="t" r="r" b="b"/>
+            <a:pathLst>
+              <a:path w="1189990" h="963930">
+                <a:moveTo>
+                  <a:pt x="0" y="963930"/>
+                </a:moveTo>
+                <a:lnTo>
+                  <a:pt x="963930" y="0"/>
+                </a:lnTo>
+                <a:lnTo>
+                  <a:pt x="1189990" y="0"/>
+                </a:lnTo>
+                <a:lnTo>
+                  <a:pt x="226060" y="963930"/>
+                </a:lnTo>
+                <a:close/>
+              </a:path>
+            </a:pathLst>
+          </a:custGeom>
+          <a:solidFill>
+            <a:schemeClr val="accent1"/>
+          </a:solidFill>
+          <a:ln>
+            <a:noFill/>
+          </a:ln>
+        </p:spPr>
+      </p:sp>
+      <p:sp>
+        <p:nvSpPr>
+          <p:cNvPr id="5" name="deco.line-yellow"/>
+          <p:cNvSpPr/>
+          <p:nvPr/>
+        </p:nvSpPr>
+        <p:spPr>
+          <a:xfrm>
+            <a:off x="7326630" y="381000"/>
+            <a:ext cx="1574800" cy="1348740"/>
+          </a:xfrm>
+          <a:custGeom>
+            <a:avLst/>
+            <a:gdLst/>
+            <a:ahLst/>
+            <a:cxnLst/>
+            <a:rect l="l" t="t" r="r" b="b"/>
+            <a:pathLst>
+              <a:path w="1574800" h="1348740">
+                <a:moveTo>
+                  <a:pt x="0" y="1348740"/>
+                </a:moveTo>
+                <a:lnTo>
+                  <a:pt x="1348740" y="0"/>
+                </a:lnTo>
+                <a:lnTo>
+                  <a:pt x="1574800" y="0"/>
+                </a:lnTo>
+                <a:lnTo>
+                  <a:pt x="226060" y="1348740"/>
+                </a:lnTo>
+                <a:close/>
+              </a:path>
+            </a:pathLst>
+          </a:custGeom>
+          <a:solidFill>
+            <a:schemeClr val="accent2"/>
+          </a:solidFill>
+          <a:ln>
+            <a:noFill/>
+          </a:ln>
+        </p:spPr>
+      </p:sp>
+      <p:pic>
+        <p:nvPicPr>
+          <p:cNvPr id="6" name="img.hero" descr="菱形のコラージュ"/>
+          <p:cNvPicPr>
+            <a:picLocks noChangeAspect="1"/>
+          </p:cNvPicPr>
+          <p:nvPr/>
+        </p:nvPicPr>
+        <p:blipFill>
+          <a:blip r:embed="rId2"/>
+          <a:srcRect l="4098" r="4098"/>
+          <a:stretch>
+            <a:fillRect/>
+          </a:stretch>
+        </p:blipFill>
+        <p:spPr>
+          <a:xfrm>
+            <a:off x="1069340" y="1102360"/>
+            <a:ext cx="7360920" cy="5345430"/>
+          </a:xfrm>
+          <a:custGeom>
+            <a:avLst/>
+            <a:gdLst/>
+            <a:ahLst/>
+            <a:cxnLst/>
+            <a:rect l="l" t="t" r="r" b="b"/>
+            <a:pathLst>
+              <a:path w="7360920" h="5345430">
+                <a:moveTo>
+                  <a:pt x="2146300" y="1047750"/>
+                </a:moveTo>
+                <a:lnTo>
+                  <a:pt x="3192780" y="0"/>
+                </a:lnTo>
+                <a:lnTo>
+                  <a:pt x="4240530" y="1047750"/>
+                </a:lnTo>
+                <a:lnTo>
+                  <a:pt x="3192780" y="2095500"/>
+                </a:lnTo>
+                <a:close/>
+              </a:path>
+              <a:path w="7360920" h="5345430">
+                <a:moveTo>
+                  <a:pt x="4307840" y="1049020"/>
+                </a:moveTo>
+                <a:lnTo>
+                  <a:pt x="5355590" y="2540"/>
+                </a:lnTo>
+                <a:lnTo>
+                  <a:pt x="6403340" y="1049020"/>
+                </a:lnTo>
+                <a:lnTo>
+                  <a:pt x="5355590" y="2096770"/>
+                </a:lnTo>
+                <a:close/>
+              </a:path>
+              <a:path w="7360920" h="5345430">
+                <a:moveTo>
+                  <a:pt x="3228340" y="2129790"/>
+                </a:moveTo>
+                <a:lnTo>
+                  <a:pt x="4274820" y="1082040"/>
+                </a:lnTo>
+                <a:lnTo>
+                  <a:pt x="5322570" y="2129790"/>
+                </a:lnTo>
+                <a:lnTo>
+                  <a:pt x="4274820" y="3177540"/>
+                </a:lnTo>
+                <a:close/>
+              </a:path>
+              <a:path w="7360920" h="5345430">
+                <a:moveTo>
+                  <a:pt x="0" y="3209290"/>
+                </a:moveTo>
+                <a:lnTo>
+                  <a:pt x="2113280" y="1096010"/>
+                </a:lnTo>
+                <a:lnTo>
+                  <a:pt x="4226560" y="3209290"/>
+                </a:lnTo>
+                <a:lnTo>
+                  <a:pt x="2113280" y="5323840"/>
+                </a:lnTo>
+                <a:close/>
+              </a:path>
+              <a:path w="7360920" h="5345430">
+                <a:moveTo>
+                  <a:pt x="4307840" y="3209290"/>
+                </a:moveTo>
+                <a:lnTo>
+                  <a:pt x="5834380" y="1682750"/>
+                </a:lnTo>
+                <a:lnTo>
+                  <a:pt x="7360920" y="3209290"/>
+                </a:lnTo>
+                <a:lnTo>
+                  <a:pt x="5834380" y="4737100"/>
+                </a:lnTo>
+                <a:close/>
+              </a:path>
+              <a:path w="7360920" h="5345430">
+                <a:moveTo>
+                  <a:pt x="3219450" y="4297680"/>
+                </a:moveTo>
+                <a:lnTo>
+                  <a:pt x="4267200" y="3249930"/>
+                </a:lnTo>
+                <a:lnTo>
+                  <a:pt x="5314950" y="4297680"/>
+                </a:lnTo>
+                <a:lnTo>
+                  <a:pt x="4267200" y="5345430"/>
+                </a:lnTo>
+                <a:close/>
+              </a:path>
+            </a:pathLst>
+          </a:custGeom>
+        </p:spPr>
+      </p:pic>
+      <p:sp>
+        <p:nvSpPr>
+          <p:cNvPr id="7" name="txt.headline"/>
+          <p:cNvSpPr txBox="1"/>
+          <p:nvPr/>
+        </p:nvSpPr>
+        <p:spPr>
+          <a:xfrm>
+            <a:off x="609600" y="279400"/>
+            <a:ext cx="6604000" cy="711200"/>
+          </a:xfrm>
+          <a:prstGeom prst="rect">
+            <a:avLst/>
+          </a:prstGeom>
+          <a:noFill/>
+        </p:spPr>
+        <p:txBody>
+          <a:bodyPr wrap="square" lIns="0" tIns="0" rIns="0" bIns="0" anchor="ctr" rtlCol="0">
+            <a:noAutofit/>
+          </a:bodyPr>
+          <a:lstStyle/>
+          <a:p>
+            <a:pPr algn="l" eaLnBrk="1" hangingPunct="1" latinLnBrk="0">
+              <a:lnSpc>
+                <a:spcPts val="4000"/>
+              </a:lnSpc>
+            </a:pPr>
+            <a:r>
+              <a:rPr lang="ja-JP" altLang="en-US" sz="3250" b="0" dirty="0">
+                <a:solidFill>
+                  <a:schemeClr val="tx1"/>
+                </a:solidFill>
+                <a:latin typeface="Noto Serif JP"/>
+                <a:ea typeface="Noto Serif JP"/>
+              </a:rPr>
+              <a:t>ダミー見出し</a:t>
+            </a:r>
+          </a:p>
+        </p:txBody>
+      </p:sp>
+      <p:sp>
+        <p:nvSpPr>
+          <p:cNvPr id="8" name="txt.subtitle"/>
+          <p:cNvSpPr txBox="1"/>
+          <p:nvPr/>
+        </p:nvSpPr>
+        <p:spPr>
+          <a:xfrm>
+            <a:off x="635000" y="1168400"/>
+            <a:ext cx="2489200" cy="584200"/>
+          </a:xfrm>
+          <a:prstGeom prst="rect">
+            <a:avLst/>
+          </a:prstGeom>
+          <a:noFill/>
+        </p:spPr>
+        <p:txBody>
+          <a:bodyPr wrap="square" lIns="0" tIns="0" rIns="0" bIns="0" anchor="t" rtlCol="0">
+            <a:noAutofit/>
+          </a:bodyPr>
+          <a:lstStyle/>
+          <a:p>
+            <a:pPr algn="l" eaLnBrk="1" hangingPunct="1" latinLnBrk="0">
+              <a:lnSpc>
+                <a:spcPts val="2100"/>
+              </a:lnSpc>
+            </a:pPr>
+            <a:r>
+              <a:rPr lang="ja-JP" altLang="en-US" sz="1500" b="1" dirty="0">
+                <a:solidFill>
+                  <a:schemeClr val="tx1"/>
+                </a:solidFill>
+                <a:latin typeface="Barlow"/>
+                <a:ea typeface="Noto Sans JP"/>
+              </a:rPr>
+              <a:t>ダミー副題</a:t>
+            </a:r>
+          </a:p>
+        </p:txBody>
+      </p:sp>
+    </p:spTree>
+  </p:cSld>
+  <p:clrMapOvr>
+    <a:masterClrMapping/>
+  </p:clrMapOvr>
+</p:sld>
+</file>
+
+<file path=ppt/slides/slide11.xml><?xml version="1.0" encoding="utf-8"?>
+<p:sld xmlns:a="http://schemas.openxmlformats.org/drawingml/2006/main" xmlns:p="http://schemas.openxmlformats.org/presentationml/2006/main" xmlns:r="http://schemas.openxmlformats.org/officeDocument/2006/relationships">
+  <p:cSld>
+    <p:spTree>
+      <p:nvGrpSpPr>
+        <p:cNvPr id="1" name=""/>
+        <p:cNvGrpSpPr/>
+        <p:nvPr/>
+      </p:nvGrpSpPr>
+      <p:grpSpPr/>
+      <p:sp>
+        <p:nvSpPr>
+          <p:cNvPr id="2" name="deco.corner"/>
+          <p:cNvSpPr/>
+          <p:nvPr/>
+        </p:nvSpPr>
+        <p:spPr>
+          <a:xfrm>
+            <a:off x="0" y="0"/>
+            <a:ext cx="4311650" cy="4311650"/>
+          </a:xfrm>
+          <a:custGeom>
+            <a:avLst/>
+            <a:gdLst/>
+            <a:ahLst/>
+            <a:cxnLst/>
+            <a:rect l="l" t="t" r="r" b="b"/>
+            <a:pathLst>
+              <a:path w="4311650" h="4311650">
+                <a:moveTo>
+                  <a:pt x="0" y="0"/>
+                </a:moveTo>
+                <a:lnTo>
+                  <a:pt x="4311650" y="0"/>
+                </a:lnTo>
+                <a:lnTo>
+                  <a:pt x="0" y="4311650"/>
+                </a:lnTo>
+                <a:close/>
+              </a:path>
+            </a:pathLst>
+          </a:custGeom>
+          <a:solidFill>
+            <a:schemeClr val="accent1"/>
+          </a:solidFill>
+          <a:ln>
+            <a:noFill/>
+          </a:ln>
+        </p:spPr>
+      </p:sp>
+      <p:sp>
+        <p:nvSpPr>
+          <p:cNvPr id="3" name="deco.tri"/>
+          <p:cNvSpPr/>
+          <p:nvPr/>
+        </p:nvSpPr>
+        <p:spPr>
+          <a:xfrm>
+            <a:off x="5247640" y="-27940"/>
+            <a:ext cx="6958330" cy="6958330"/>
+          </a:xfrm>
+          <a:custGeom>
+            <a:avLst/>
+            <a:gdLst/>
+            <a:ahLst/>
+            <a:cxnLst/>
+            <a:rect l="l" t="t" r="r" b="b"/>
+            <a:pathLst>
+              <a:path w="6958330" h="6958330">
+                <a:moveTo>
+                  <a:pt x="0" y="6958330"/>
+                </a:moveTo>
+                <a:lnTo>
+                  <a:pt x="6958330" y="0"/>
+                </a:lnTo>
+                <a:lnTo>
+                  <a:pt x="6958330" y="6958330"/>
+                </a:lnTo>
+                <a:close/>
+              </a:path>
+            </a:pathLst>
+          </a:custGeom>
+          <a:solidFill>
+            <a:schemeClr val="accent2"/>
+          </a:solidFill>
+          <a:ln>
+            <a:noFill/>
+          </a:ln>
+        </p:spPr>
+      </p:sp>
+      <p:sp>
+        <p:nvSpPr>
+          <p:cNvPr id="4" name="deco.line"/>
+          <p:cNvSpPr/>
+          <p:nvPr/>
+        </p:nvSpPr>
+        <p:spPr>
+          <a:xfrm>
+            <a:off x="9556750" y="4993640"/>
+            <a:ext cx="2118360" cy="1864360"/>
+          </a:xfrm>
+          <a:custGeom>
+            <a:avLst/>
+            <a:gdLst/>
+            <a:ahLst/>
+            <a:cxnLst/>
+            <a:rect l="l" t="t" r="r" b="b"/>
+            <a:pathLst>
+              <a:path w="2118360" h="1864360">
+                <a:moveTo>
+                  <a:pt x="0" y="1864360"/>
+                </a:moveTo>
+                <a:lnTo>
+                  <a:pt x="1864360" y="0"/>
+                </a:lnTo>
+                <a:lnTo>
+                  <a:pt x="2118360" y="0"/>
+                </a:lnTo>
+                <a:lnTo>
+                  <a:pt x="254000" y="1864360"/>
+                </a:lnTo>
+                <a:close/>
+              </a:path>
+            </a:pathLst>
+          </a:custGeom>
+          <a:solidFill>
+            <a:schemeClr val="accent1"/>
+          </a:solidFill>
+          <a:ln>
+            <a:noFill/>
+          </a:ln>
+        </p:spPr>
+      </p:sp>
+      <p:pic>
+        <p:nvPicPr>
+          <p:cNvPr id="5" name="img.side" descr="目次の写真"/>
+          <p:cNvPicPr>
+            <a:picLocks noChangeAspect="1"/>
+          </p:cNvPicPr>
+          <p:nvPr/>
+        </p:nvPicPr>
+        <p:blipFill>
+          <a:blip r:embed="rId2"/>
+          <a:srcRect t="11230" b="11230"/>
+          <a:stretch>
+            <a:fillRect/>
+          </a:stretch>
+        </p:blipFill>
+        <p:spPr>
+          <a:xfrm>
+            <a:off x="6303010" y="2644140"/>
+            <a:ext cx="5363210" cy="2772410"/>
+          </a:xfrm>
+          <a:custGeom>
+            <a:avLst/>
+            <a:gdLst/>
+            <a:ahLst/>
+            <a:cxnLst/>
+            <a:rect l="l" t="t" r="r" b="b"/>
+            <a:pathLst>
+              <a:path w="5363210" h="2772410">
+                <a:moveTo>
+                  <a:pt x="0" y="2772410"/>
+                </a:moveTo>
+                <a:lnTo>
+                  <a:pt x="2772410" y="0"/>
+                </a:lnTo>
+                <a:lnTo>
+                  <a:pt x="5363210" y="0"/>
+                </a:lnTo>
+                <a:lnTo>
+                  <a:pt x="2590800" y="2772410"/>
+                </a:lnTo>
+                <a:close/>
+              </a:path>
+            </a:pathLst>
+          </a:custGeom>
+        </p:spPr>
+      </p:pic>
+      <p:sp>
+        <p:nvSpPr>
+          <p:cNvPr id="6" name="txt.eyebrow"/>
+          <p:cNvSpPr txBox="1"/>
+          <p:nvPr/>
+        </p:nvSpPr>
+        <p:spPr>
+          <a:xfrm rot="-2700000">
+            <a:off x="-355600" y="1003300"/>
+            <a:ext cx="3048000" cy="330200"/>
+          </a:xfrm>
+          <a:prstGeom prst="rect">
+            <a:avLst/>
+          </a:prstGeom>
+          <a:noFill/>
+        </p:spPr>
+        <p:txBody>
+          <a:bodyPr wrap="none" lIns="0" tIns="0" rIns="0" bIns="0" anchor="ctr" rtlCol="0">
+            <a:noAutofit/>
+          </a:bodyPr>
+          <a:lstStyle/>
+          <a:p>
+            <a:pPr algn="ctr" eaLnBrk="1" hangingPunct="1" latinLnBrk="0">
+              <a:lnSpc>
+                <a:spcPts val="2600"/>
+              </a:lnSpc>
+            </a:pPr>
+            <a:r>
+              <a:rPr lang="ja-JP" altLang="en-US" sz="2050" b="0" dirty="0" spc="400">
+                <a:solidFill>
+                  <a:schemeClr val="bg1"/>
+                </a:solidFill>
+                <a:latin typeface="Barlow"/>
+                <a:ea typeface="Noto Sans JP"/>
+              </a:rPr>
+              <a:t>Dummy Label</a:t>
+            </a:r>
+          </a:p>
+        </p:txBody>
+      </p:sp>
+      <p:sp>
+        <p:nvSpPr>
+          <p:cNvPr id="7" name="deco.toc-no-1"/>
+          <p:cNvSpPr txBox="1"/>
+          <p:nvPr/>
+        </p:nvSpPr>
+        <p:spPr>
+          <a:xfrm>
+            <a:off x="2921000" y="2946400"/>
+            <a:ext cx="660400" cy="508000"/>
+          </a:xfrm>
+          <a:prstGeom prst="rect">
+            <a:avLst/>
+          </a:prstGeom>
+          <a:noFill/>
+        </p:spPr>
+        <p:txBody>
+          <a:bodyPr wrap="square" lIns="0" tIns="0" rIns="0" bIns="0" anchor="ctr" rtlCol="0">
+            <a:noAutofit/>
+          </a:bodyPr>
+          <a:lstStyle/>
+          <a:p>
+            <a:pPr algn="l" eaLnBrk="1" hangingPunct="1" latinLnBrk="0">
+              <a:lnSpc>
+                <a:spcPts val="3000"/>
+              </a:lnSpc>
+            </a:pPr>
+            <a:r>
+              <a:rPr lang="ja-JP" altLang="en-US" sz="2400" b="0" dirty="0">
+                <a:solidFill>
+                  <a:schemeClr val="accent1"/>
+                </a:solidFill>
+                <a:latin typeface="Barlow Medium"/>
+                <a:ea typeface="Noto Sans JP"/>
+              </a:rPr>
+              <a:t>01</a:t>
+            </a:r>
+          </a:p>
+        </p:txBody>
+      </p:sp>
+      <p:sp>
+        <p:nvSpPr>
+          <p:cNvPr id="8" name="deco.toc-rule-1"/>
+          <p:cNvSpPr/>
+          <p:nvPr/>
+        </p:nvSpPr>
+        <p:spPr>
+          <a:xfrm>
+            <a:off x="3683000" y="3429000"/>
+            <a:ext cx="3810000" cy="13970"/>
+          </a:xfrm>
+          <a:custGeom>
+            <a:avLst/>
+            <a:gdLst/>
+            <a:ahLst/>
+            <a:cxnLst/>
+            <a:rect l="l" t="t" r="r" b="b"/>
+            <a:pathLst>
+              <a:path w="3810000" h="13970">
+                <a:moveTo>
+                  <a:pt x="0" y="0"/>
+                </a:moveTo>
+                <a:lnTo>
+                  <a:pt x="3810000" y="0"/>
+                </a:lnTo>
+                <a:lnTo>
+                  <a:pt x="3810000" y="13970"/>
+                </a:lnTo>
+                <a:lnTo>
+                  <a:pt x="0" y="13970"/>
+                </a:lnTo>
+                <a:close/>
+              </a:path>
+            </a:pathLst>
+          </a:custGeom>
+          <a:solidFill>
+            <a:schemeClr val="accent2"/>
+          </a:solidFill>
+          <a:ln>
+            <a:noFill/>
+          </a:ln>
+        </p:spPr>
+      </p:sp>
+      <p:sp>
+        <p:nvSpPr>
+          <p:cNvPr id="9" name="txt.item.1"/>
+          <p:cNvSpPr txBox="1"/>
+          <p:nvPr/>
+        </p:nvSpPr>
+        <p:spPr>
+          <a:xfrm>
+            <a:off x="3683000" y="2946400"/>
+            <a:ext cx="3810000" cy="457200"/>
+          </a:xfrm>
+          <a:prstGeom prst="rect">
+            <a:avLst/>
+          </a:prstGeom>
+          <a:noFill/>
+        </p:spPr>
+        <p:txBody>
+          <a:bodyPr wrap="square" lIns="0" tIns="0" rIns="0" bIns="0" anchor="ctr" rtlCol="0">
+            <a:noAutofit/>
+          </a:bodyPr>
+          <a:lstStyle/>
+          <a:p>
+            <a:pPr algn="l" eaLnBrk="1" hangingPunct="1" latinLnBrk="0">
+              <a:lnSpc>
+                <a:spcPts val="2400"/>
+              </a:lnSpc>
+            </a:pPr>
+            <a:r>
+              <a:rPr lang="ja-JP" altLang="en-US" sz="1800" b="0" dirty="0">
+                <a:solidFill>
+                  <a:schemeClr val="tx1"/>
+                </a:solidFill>
+                <a:latin typeface="Barlow Medium"/>
+                <a:ea typeface="Noto Sans JP Medium"/>
+              </a:rPr>
+              <a:t>ダミー項目</a:t>
+            </a:r>
+          </a:p>
+        </p:txBody>
+      </p:sp>
+      <p:sp>
+        <p:nvSpPr>
+          <p:cNvPr id="10" name="deco.toc-no-2"/>
+          <p:cNvSpPr txBox="1"/>
+          <p:nvPr/>
+        </p:nvSpPr>
+        <p:spPr>
+          <a:xfrm>
+            <a:off x="2413000" y="3733800"/>
+            <a:ext cx="660400" cy="508000"/>
+          </a:xfrm>
+          <a:prstGeom prst="rect">
+            <a:avLst/>
+          </a:prstGeom>
+          <a:noFill/>
+        </p:spPr>
+        <p:txBody>
+          <a:bodyPr wrap="square" lIns="0" tIns="0" rIns="0" bIns="0" anchor="ctr" rtlCol="0">
+            <a:noAutofit/>
+          </a:bodyPr>
+          <a:lstStyle/>
+          <a:p>
+            <a:pPr algn="l" eaLnBrk="1" hangingPunct="1" latinLnBrk="0">
+              <a:lnSpc>
+                <a:spcPts val="3000"/>
+              </a:lnSpc>
+            </a:pPr>
+            <a:r>
+              <a:rPr lang="ja-JP" altLang="en-US" sz="2400" b="0" dirty="0">
+                <a:solidFill>
+                  <a:schemeClr val="accent1"/>
+                </a:solidFill>
+                <a:latin typeface="Barlow Medium"/>
+                <a:ea typeface="Noto Sans JP"/>
+              </a:rPr>
+              <a:t>02</a:t>
+            </a:r>
+          </a:p>
+        </p:txBody>
+      </p:sp>
+      <p:sp>
+        <p:nvSpPr>
+          <p:cNvPr id="11" name="deco.toc-rule-2"/>
+          <p:cNvSpPr/>
+          <p:nvPr/>
+        </p:nvSpPr>
+        <p:spPr>
+          <a:xfrm>
+            <a:off x="3175000" y="4216400"/>
+            <a:ext cx="3810000" cy="13970"/>
+          </a:xfrm>
+          <a:custGeom>
+            <a:avLst/>
+            <a:gdLst/>
+            <a:ahLst/>
+            <a:cxnLst/>
+            <a:rect l="l" t="t" r="r" b="b"/>
+            <a:pathLst>
+              <a:path w="3810000" h="13970">
+                <a:moveTo>
+                  <a:pt x="0" y="0"/>
+                </a:moveTo>
+                <a:lnTo>
+                  <a:pt x="3810000" y="0"/>
+                </a:lnTo>
+                <a:lnTo>
+                  <a:pt x="3810000" y="13970"/>
+                </a:lnTo>
+                <a:lnTo>
+                  <a:pt x="0" y="13970"/>
+                </a:lnTo>
+                <a:close/>
+              </a:path>
+            </a:pathLst>
+          </a:custGeom>
+          <a:solidFill>
+            <a:schemeClr val="accent2"/>
+          </a:solidFill>
+          <a:ln>
+            <a:noFill/>
+          </a:ln>
+        </p:spPr>
+      </p:sp>
+      <p:sp>
+        <p:nvSpPr>
+          <p:cNvPr id="12" name="txt.item.2"/>
+          <p:cNvSpPr txBox="1"/>
+          <p:nvPr/>
+        </p:nvSpPr>
+        <p:spPr>
+          <a:xfrm>
+            <a:off x="3175000" y="3733800"/>
+            <a:ext cx="3810000" cy="457200"/>
+          </a:xfrm>
+          <a:prstGeom prst="rect">
+            <a:avLst/>
+          </a:prstGeom>
+          <a:noFill/>
+        </p:spPr>
+        <p:txBody>
+          <a:bodyPr wrap="square" lIns="0" tIns="0" rIns="0" bIns="0" anchor="ctr" rtlCol="0">
+            <a:noAutofit/>
+          </a:bodyPr>
+          <a:lstStyle/>
+          <a:p>
+            <a:pPr algn="l" eaLnBrk="1" hangingPunct="1" latinLnBrk="0">
+              <a:lnSpc>
+                <a:spcPts val="2400"/>
+              </a:lnSpc>
+            </a:pPr>
+            <a:r>
+              <a:rPr lang="ja-JP" altLang="en-US" sz="1800" b="0" dirty="0">
+                <a:solidFill>
+                  <a:schemeClr val="tx1"/>
+                </a:solidFill>
+                <a:latin typeface="Barlow Medium"/>
+                <a:ea typeface="Noto Sans JP Medium"/>
+              </a:rPr>
+              <a:t>ダミー項目</a:t>
+            </a:r>
+          </a:p>
+        </p:txBody>
+      </p:sp>
+      <p:sp>
+        <p:nvSpPr>
+          <p:cNvPr id="13" name="deco.toc-no-3"/>
+          <p:cNvSpPr txBox="1"/>
+          <p:nvPr/>
+        </p:nvSpPr>
+        <p:spPr>
+          <a:xfrm>
+            <a:off x="1905000" y="4521200"/>
+            <a:ext cx="660400" cy="508000"/>
+          </a:xfrm>
+          <a:prstGeom prst="rect">
+            <a:avLst/>
+          </a:prstGeom>
+          <a:noFill/>
+        </p:spPr>
+        <p:txBody>
+          <a:bodyPr wrap="square" lIns="0" tIns="0" rIns="0" bIns="0" anchor="ctr" rtlCol="0">
+            <a:noAutofit/>
+          </a:bodyPr>
+          <a:lstStyle/>
+          <a:p>
+            <a:pPr algn="l" eaLnBrk="1" hangingPunct="1" latinLnBrk="0">
+              <a:lnSpc>
+                <a:spcPts val="3000"/>
+              </a:lnSpc>
+            </a:pPr>
+            <a:r>
+              <a:rPr lang="ja-JP" altLang="en-US" sz="2400" b="0" dirty="0">
+                <a:solidFill>
+                  <a:schemeClr val="accent1"/>
+                </a:solidFill>
+                <a:latin typeface="Barlow Medium"/>
+                <a:ea typeface="Noto Sans JP"/>
+              </a:rPr>
+              <a:t>03</a:t>
+            </a:r>
+          </a:p>
+        </p:txBody>
+      </p:sp>
+      <p:sp>
+        <p:nvSpPr>
+          <p:cNvPr id="14" name="deco.toc-rule-3"/>
+          <p:cNvSpPr/>
+          <p:nvPr/>
+        </p:nvSpPr>
+        <p:spPr>
+          <a:xfrm>
+            <a:off x="2667000" y="5003800"/>
+            <a:ext cx="3810000" cy="13970"/>
+          </a:xfrm>
+          <a:custGeom>
+            <a:avLst/>
+            <a:gdLst/>
+            <a:ahLst/>
+            <a:cxnLst/>
+            <a:rect l="l" t="t" r="r" b="b"/>
+            <a:pathLst>
+              <a:path w="3810000" h="13970">
+                <a:moveTo>
+                  <a:pt x="0" y="0"/>
+                </a:moveTo>
+                <a:lnTo>
+                  <a:pt x="3810000" y="0"/>
+                </a:lnTo>
+                <a:lnTo>
+                  <a:pt x="3810000" y="13970"/>
+                </a:lnTo>
+                <a:lnTo>
+                  <a:pt x="0" y="13970"/>
+                </a:lnTo>
+                <a:close/>
+              </a:path>
+            </a:pathLst>
+          </a:custGeom>
+          <a:solidFill>
+            <a:schemeClr val="accent2"/>
+          </a:solidFill>
+          <a:ln>
+            <a:noFill/>
+          </a:ln>
+        </p:spPr>
+      </p:sp>
+      <p:sp>
+        <p:nvSpPr>
+          <p:cNvPr id="15" name="txt.item.3"/>
+          <p:cNvSpPr txBox="1"/>
+          <p:nvPr/>
+        </p:nvSpPr>
+        <p:spPr>
+          <a:xfrm>
+            <a:off x="2667000" y="4521200"/>
+            <a:ext cx="3810000" cy="457200"/>
+          </a:xfrm>
+          <a:prstGeom prst="rect">
+            <a:avLst/>
+          </a:prstGeom>
+          <a:noFill/>
+        </p:spPr>
+        <p:txBody>
+          <a:bodyPr wrap="square" lIns="0" tIns="0" rIns="0" bIns="0" anchor="ctr" rtlCol="0">
+            <a:noAutofit/>
+          </a:bodyPr>
+          <a:lstStyle/>
+          <a:p>
+            <a:pPr algn="l" eaLnBrk="1" hangingPunct="1" latinLnBrk="0">
+              <a:lnSpc>
+                <a:spcPts val="2400"/>
+              </a:lnSpc>
+            </a:pPr>
+            <a:r>
+              <a:rPr lang="ja-JP" altLang="en-US" sz="1800" b="0" dirty="0">
+                <a:solidFill>
+                  <a:schemeClr val="tx1"/>
+                </a:solidFill>
+                <a:latin typeface="Barlow Medium"/>
+                <a:ea typeface="Noto Sans JP Medium"/>
+              </a:rPr>
+              <a:t>ダミー項目</a:t>
+            </a:r>
+          </a:p>
+        </p:txBody>
+      </p:sp>
+    </p:spTree>
+  </p:cSld>
+  <p:clrMapOvr>
+    <a:masterClrMapping/>
+  </p:clrMapOvr>
+</p:sld>
+</file>
+
+<file path=ppt/slides/slide12.xml><?xml version="1.0" encoding="utf-8"?>
+<p:sld xmlns:a="http://schemas.openxmlformats.org/drawingml/2006/main" xmlns:p="http://schemas.openxmlformats.org/presentationml/2006/main" xmlns:r="http://schemas.openxmlformats.org/officeDocument/2006/relationships">
+  <p:cSld>
+    <p:spTree>
+      <p:nvGrpSpPr>
+        <p:cNvPr id="1" name=""/>
+        <p:cNvGrpSpPr/>
+        <p:nvPr/>
+      </p:nvGrpSpPr>
+      <p:grpSpPr/>
+      <p:sp>
+        <p:nvSpPr>
+          <p:cNvPr id="2" name="deco.corner"/>
+          <p:cNvSpPr/>
+          <p:nvPr/>
+        </p:nvSpPr>
+        <p:spPr>
+          <a:xfrm>
+            <a:off x="0" y="0"/>
+            <a:ext cx="4311650" cy="4311650"/>
+          </a:xfrm>
+          <a:custGeom>
+            <a:avLst/>
+            <a:gdLst/>
+            <a:ahLst/>
+            <a:cxnLst/>
+            <a:rect l="l" t="t" r="r" b="b"/>
+            <a:pathLst>
+              <a:path w="4311650" h="4311650">
+                <a:moveTo>
+                  <a:pt x="0" y="0"/>
+                </a:moveTo>
+                <a:lnTo>
+                  <a:pt x="4311650" y="0"/>
+                </a:lnTo>
+                <a:lnTo>
+                  <a:pt x="0" y="4311650"/>
+                </a:lnTo>
+                <a:close/>
+              </a:path>
+            </a:pathLst>
+          </a:custGeom>
+          <a:solidFill>
+            <a:schemeClr val="accent1"/>
+          </a:solidFill>
+          <a:ln>
+            <a:noFill/>
+          </a:ln>
+        </p:spPr>
+      </p:sp>
+      <p:sp>
+        <p:nvSpPr>
+          <p:cNvPr id="3" name="deco.tri"/>
+          <p:cNvSpPr/>
+          <p:nvPr/>
+        </p:nvSpPr>
+        <p:spPr>
+          <a:xfrm>
+            <a:off x="5247640" y="-27940"/>
+            <a:ext cx="6958330" cy="6958330"/>
+          </a:xfrm>
+          <a:custGeom>
+            <a:avLst/>
+            <a:gdLst/>
+            <a:ahLst/>
+            <a:cxnLst/>
+            <a:rect l="l" t="t" r="r" b="b"/>
+            <a:pathLst>
+              <a:path w="6958330" h="6958330">
+                <a:moveTo>
+                  <a:pt x="0" y="6958330"/>
+                </a:moveTo>
+                <a:lnTo>
+                  <a:pt x="6958330" y="0"/>
+                </a:lnTo>
+                <a:lnTo>
+                  <a:pt x="6958330" y="6958330"/>
+                </a:lnTo>
+                <a:close/>
+              </a:path>
+            </a:pathLst>
+          </a:custGeom>
+          <a:solidFill>
+            <a:schemeClr val="accent2"/>
+          </a:solidFill>
+          <a:ln>
+            <a:noFill/>
+          </a:ln>
+        </p:spPr>
+      </p:sp>
+      <p:sp>
+        <p:nvSpPr>
+          <p:cNvPr id="4" name="deco.line"/>
+          <p:cNvSpPr/>
+          <p:nvPr/>
+        </p:nvSpPr>
+        <p:spPr>
+          <a:xfrm>
+            <a:off x="9556750" y="4993640"/>
+            <a:ext cx="2118360" cy="1864360"/>
+          </a:xfrm>
+          <a:custGeom>
+            <a:avLst/>
+            <a:gdLst/>
+            <a:ahLst/>
+            <a:cxnLst/>
+            <a:rect l="l" t="t" r="r" b="b"/>
+            <a:pathLst>
+              <a:path w="2118360" h="1864360">
+                <a:moveTo>
+                  <a:pt x="0" y="1864360"/>
+                </a:moveTo>
+                <a:lnTo>
+                  <a:pt x="1864360" y="0"/>
+                </a:lnTo>
+                <a:lnTo>
+                  <a:pt x="2118360" y="0"/>
+                </a:lnTo>
+                <a:lnTo>
+                  <a:pt x="254000" y="1864360"/>
+                </a:lnTo>
+                <a:close/>
+              </a:path>
+            </a:pathLst>
+          </a:custGeom>
+          <a:solidFill>
+            <a:schemeClr val="accent1"/>
+          </a:solidFill>
+          <a:ln>
+            <a:noFill/>
+          </a:ln>
+        </p:spPr>
+      </p:sp>
+      <p:pic>
+        <p:nvPicPr>
+          <p:cNvPr id="5" name="img.side" descr="目次の写真"/>
+          <p:cNvPicPr>
+            <a:picLocks noChangeAspect="1"/>
+          </p:cNvPicPr>
+          <p:nvPr/>
+        </p:nvPicPr>
+        <p:blipFill>
+          <a:blip r:embed="rId2"/>
+          <a:srcRect t="11230" b="11230"/>
+          <a:stretch>
+            <a:fillRect/>
+          </a:stretch>
+        </p:blipFill>
+        <p:spPr>
+          <a:xfrm>
+            <a:off x="6303010" y="2644140"/>
+            <a:ext cx="5363210" cy="2772410"/>
+          </a:xfrm>
+          <a:custGeom>
+            <a:avLst/>
+            <a:gdLst/>
+            <a:ahLst/>
+            <a:cxnLst/>
+            <a:rect l="l" t="t" r="r" b="b"/>
+            <a:pathLst>
+              <a:path w="5363210" h="2772410">
+                <a:moveTo>
+                  <a:pt x="0" y="2772410"/>
+                </a:moveTo>
+                <a:lnTo>
+                  <a:pt x="2772410" y="0"/>
+                </a:lnTo>
+                <a:lnTo>
+                  <a:pt x="5363210" y="0"/>
+                </a:lnTo>
+                <a:lnTo>
+                  <a:pt x="2590800" y="2772410"/>
+                </a:lnTo>
+                <a:close/>
+              </a:path>
+            </a:pathLst>
+          </a:custGeom>
+        </p:spPr>
+      </p:pic>
+      <p:sp>
+        <p:nvSpPr>
+          <p:cNvPr id="6" name="txt.eyebrow"/>
+          <p:cNvSpPr txBox="1"/>
+          <p:nvPr/>
+        </p:nvSpPr>
+        <p:spPr>
+          <a:xfrm rot="-2700000">
+            <a:off x="-355600" y="1003300"/>
+            <a:ext cx="3048000" cy="330200"/>
+          </a:xfrm>
+          <a:prstGeom prst="rect">
+            <a:avLst/>
+          </a:prstGeom>
+          <a:noFill/>
+        </p:spPr>
+        <p:txBody>
+          <a:bodyPr wrap="none" lIns="0" tIns="0" rIns="0" bIns="0" anchor="ctr" rtlCol="0">
+            <a:noAutofit/>
+          </a:bodyPr>
+          <a:lstStyle/>
+          <a:p>
+            <a:pPr algn="ctr" eaLnBrk="1" hangingPunct="1" latinLnBrk="0">
+              <a:lnSpc>
+                <a:spcPts val="2600"/>
+              </a:lnSpc>
+            </a:pPr>
+            <a:r>
+              <a:rPr lang="ja-JP" altLang="en-US" sz="2050" b="0" dirty="0" spc="400">
+                <a:solidFill>
+                  <a:schemeClr val="bg1"/>
+                </a:solidFill>
+                <a:latin typeface="Barlow"/>
+                <a:ea typeface="Noto Sans JP"/>
+              </a:rPr>
+              <a:t>Dummy Label</a:t>
+            </a:r>
+          </a:p>
+        </p:txBody>
+      </p:sp>
+      <p:sp>
+        <p:nvSpPr>
+          <p:cNvPr id="7" name="deco.toc-no-1"/>
+          <p:cNvSpPr txBox="1"/>
+          <p:nvPr/>
+        </p:nvSpPr>
+        <p:spPr>
+          <a:xfrm>
+            <a:off x="2921000" y="2552700"/>
+            <a:ext cx="660400" cy="508000"/>
+          </a:xfrm>
+          <a:prstGeom prst="rect">
+            <a:avLst/>
+          </a:prstGeom>
+          <a:noFill/>
+        </p:spPr>
+        <p:txBody>
+          <a:bodyPr wrap="square" lIns="0" tIns="0" rIns="0" bIns="0" anchor="ctr" rtlCol="0">
+            <a:noAutofit/>
+          </a:bodyPr>
+          <a:lstStyle/>
+          <a:p>
+            <a:pPr algn="l" eaLnBrk="1" hangingPunct="1" latinLnBrk="0">
+              <a:lnSpc>
+                <a:spcPts val="3000"/>
+              </a:lnSpc>
+            </a:pPr>
+            <a:r>
+              <a:rPr lang="ja-JP" altLang="en-US" sz="2400" b="0" dirty="0">
+                <a:solidFill>
+                  <a:schemeClr val="accent1"/>
+                </a:solidFill>
+                <a:latin typeface="Barlow Medium"/>
+                <a:ea typeface="Noto Sans JP"/>
+              </a:rPr>
+              <a:t>01</a:t>
+            </a:r>
+          </a:p>
+        </p:txBody>
+      </p:sp>
+      <p:sp>
+        <p:nvSpPr>
+          <p:cNvPr id="8" name="deco.toc-rule-1"/>
+          <p:cNvSpPr/>
+          <p:nvPr/>
+        </p:nvSpPr>
+        <p:spPr>
+          <a:xfrm>
+            <a:off x="3683000" y="3035300"/>
+            <a:ext cx="3810000" cy="13970"/>
+          </a:xfrm>
+          <a:custGeom>
+            <a:avLst/>
+            <a:gdLst/>
+            <a:ahLst/>
+            <a:cxnLst/>
+            <a:rect l="l" t="t" r="r" b="b"/>
+            <a:pathLst>
+              <a:path w="3810000" h="13970">
+                <a:moveTo>
+                  <a:pt x="0" y="0"/>
+                </a:moveTo>
+                <a:lnTo>
+                  <a:pt x="3810000" y="0"/>
+                </a:lnTo>
+                <a:lnTo>
+                  <a:pt x="3810000" y="13970"/>
+                </a:lnTo>
+                <a:lnTo>
+                  <a:pt x="0" y="13970"/>
+                </a:lnTo>
+                <a:close/>
+              </a:path>
+            </a:pathLst>
+          </a:custGeom>
+          <a:solidFill>
+            <a:schemeClr val="accent2"/>
+          </a:solidFill>
+          <a:ln>
+            <a:noFill/>
+          </a:ln>
+        </p:spPr>
+      </p:sp>
+      <p:sp>
+        <p:nvSpPr>
+          <p:cNvPr id="9" name="txt.item.1"/>
+          <p:cNvSpPr txBox="1"/>
+          <p:nvPr/>
+        </p:nvSpPr>
+        <p:spPr>
+          <a:xfrm>
+            <a:off x="3683000" y="2552700"/>
+            <a:ext cx="3810000" cy="457200"/>
+          </a:xfrm>
+          <a:prstGeom prst="rect">
+            <a:avLst/>
+          </a:prstGeom>
+          <a:noFill/>
+        </p:spPr>
+        <p:txBody>
+          <a:bodyPr wrap="square" lIns="0" tIns="0" rIns="0" bIns="0" anchor="ctr" rtlCol="0">
+            <a:noAutofit/>
+          </a:bodyPr>
+          <a:lstStyle/>
+          <a:p>
+            <a:pPr algn="l" eaLnBrk="1" hangingPunct="1" latinLnBrk="0">
+              <a:lnSpc>
+                <a:spcPts val="2400"/>
+              </a:lnSpc>
+            </a:pPr>
+            <a:r>
+              <a:rPr lang="ja-JP" altLang="en-US" sz="1800" b="0" dirty="0">
+                <a:solidFill>
+                  <a:schemeClr val="tx1"/>
+                </a:solidFill>
+                <a:latin typeface="Barlow Medium"/>
+                <a:ea typeface="Noto Sans JP Medium"/>
+              </a:rPr>
+              <a:t>ダミー項目</a:t>
+            </a:r>
+          </a:p>
+        </p:txBody>
+      </p:sp>
+      <p:sp>
+        <p:nvSpPr>
+          <p:cNvPr id="10" name="deco.toc-no-2"/>
+          <p:cNvSpPr txBox="1"/>
+          <p:nvPr/>
+        </p:nvSpPr>
+        <p:spPr>
+          <a:xfrm>
+            <a:off x="2413000" y="3340100"/>
+            <a:ext cx="660400" cy="508000"/>
+          </a:xfrm>
+          <a:prstGeom prst="rect">
+            <a:avLst/>
+          </a:prstGeom>
+          <a:noFill/>
+        </p:spPr>
+        <p:txBody>
+          <a:bodyPr wrap="square" lIns="0" tIns="0" rIns="0" bIns="0" anchor="ctr" rtlCol="0">
+            <a:noAutofit/>
+          </a:bodyPr>
+          <a:lstStyle/>
+          <a:p>
+            <a:pPr algn="l" eaLnBrk="1" hangingPunct="1" latinLnBrk="0">
+              <a:lnSpc>
+                <a:spcPts val="3000"/>
+              </a:lnSpc>
+            </a:pPr>
+            <a:r>
+              <a:rPr lang="ja-JP" altLang="en-US" sz="2400" b="0" dirty="0">
+                <a:solidFill>
+                  <a:schemeClr val="accent1"/>
+                </a:solidFill>
+                <a:latin typeface="Barlow Medium"/>
+                <a:ea typeface="Noto Sans JP"/>
+              </a:rPr>
+              <a:t>02</a:t>
+            </a:r>
+          </a:p>
+        </p:txBody>
+      </p:sp>
+      <p:sp>
+        <p:nvSpPr>
+          <p:cNvPr id="11" name="deco.toc-rule-2"/>
+          <p:cNvSpPr/>
+          <p:nvPr/>
+        </p:nvSpPr>
+        <p:spPr>
+          <a:xfrm>
+            <a:off x="3175000" y="3822700"/>
+            <a:ext cx="3810000" cy="13970"/>
+          </a:xfrm>
+          <a:custGeom>
+            <a:avLst/>
+            <a:gdLst/>
+            <a:ahLst/>
+            <a:cxnLst/>
+            <a:rect l="l" t="t" r="r" b="b"/>
+            <a:pathLst>
+              <a:path w="3810000" h="13970">
+                <a:moveTo>
+                  <a:pt x="0" y="0"/>
+                </a:moveTo>
+                <a:lnTo>
+                  <a:pt x="3810000" y="0"/>
+                </a:lnTo>
+                <a:lnTo>
+                  <a:pt x="3810000" y="13970"/>
+                </a:lnTo>
+                <a:lnTo>
+                  <a:pt x="0" y="13970"/>
+                </a:lnTo>
+                <a:close/>
+              </a:path>
+            </a:pathLst>
+          </a:custGeom>
+          <a:solidFill>
+            <a:schemeClr val="accent2"/>
+          </a:solidFill>
+          <a:ln>
+            <a:noFill/>
+          </a:ln>
+        </p:spPr>
+      </p:sp>
+      <p:sp>
+        <p:nvSpPr>
+          <p:cNvPr id="12" name="txt.item.2"/>
+          <p:cNvSpPr txBox="1"/>
+          <p:nvPr/>
+        </p:nvSpPr>
+        <p:spPr>
+          <a:xfrm>
+            <a:off x="3175000" y="3340100"/>
+            <a:ext cx="3810000" cy="457200"/>
+          </a:xfrm>
+          <a:prstGeom prst="rect">
+            <a:avLst/>
+          </a:prstGeom>
+          <a:noFill/>
+        </p:spPr>
+        <p:txBody>
+          <a:bodyPr wrap="square" lIns="0" tIns="0" rIns="0" bIns="0" anchor="ctr" rtlCol="0">
+            <a:noAutofit/>
+          </a:bodyPr>
+          <a:lstStyle/>
+          <a:p>
+            <a:pPr algn="l" eaLnBrk="1" hangingPunct="1" latinLnBrk="0">
+              <a:lnSpc>
+                <a:spcPts val="2400"/>
+              </a:lnSpc>
+            </a:pPr>
+            <a:r>
+              <a:rPr lang="ja-JP" altLang="en-US" sz="1800" b="0" dirty="0">
+                <a:solidFill>
+                  <a:schemeClr val="tx1"/>
+                </a:solidFill>
+                <a:latin typeface="Barlow Medium"/>
+                <a:ea typeface="Noto Sans JP Medium"/>
+              </a:rPr>
+              <a:t>ダミー項目</a:t>
+            </a:r>
+          </a:p>
+        </p:txBody>
+      </p:sp>
+      <p:sp>
+        <p:nvSpPr>
+          <p:cNvPr id="13" name="deco.toc-no-3"/>
+          <p:cNvSpPr txBox="1"/>
+          <p:nvPr/>
+        </p:nvSpPr>
+        <p:spPr>
+          <a:xfrm>
+            <a:off x="1905000" y="4127500"/>
+            <a:ext cx="660400" cy="508000"/>
+          </a:xfrm>
+          <a:prstGeom prst="rect">
+            <a:avLst/>
+          </a:prstGeom>
+          <a:noFill/>
+        </p:spPr>
+        <p:txBody>
+          <a:bodyPr wrap="square" lIns="0" tIns="0" rIns="0" bIns="0" anchor="ctr" rtlCol="0">
+            <a:noAutofit/>
+          </a:bodyPr>
+          <a:lstStyle/>
+          <a:p>
+            <a:pPr algn="l" eaLnBrk="1" hangingPunct="1" latinLnBrk="0">
+              <a:lnSpc>
+                <a:spcPts val="3000"/>
+              </a:lnSpc>
+            </a:pPr>
+            <a:r>
+              <a:rPr lang="ja-JP" altLang="en-US" sz="2400" b="0" dirty="0">
+                <a:solidFill>
+                  <a:schemeClr val="accent1"/>
+                </a:solidFill>
+                <a:latin typeface="Barlow Medium"/>
+                <a:ea typeface="Noto Sans JP"/>
+              </a:rPr>
+              <a:t>03</a:t>
+            </a:r>
+          </a:p>
+        </p:txBody>
+      </p:sp>
+      <p:sp>
+        <p:nvSpPr>
+          <p:cNvPr id="14" name="deco.toc-rule-3"/>
+          <p:cNvSpPr/>
+          <p:nvPr/>
+        </p:nvSpPr>
+        <p:spPr>
+          <a:xfrm>
+            <a:off x="2667000" y="4610100"/>
+            <a:ext cx="3810000" cy="13970"/>
+          </a:xfrm>
+          <a:custGeom>
+            <a:avLst/>
+            <a:gdLst/>
+            <a:ahLst/>
+            <a:cxnLst/>
+            <a:rect l="l" t="t" r="r" b="b"/>
+            <a:pathLst>
+              <a:path w="3810000" h="13970">
+                <a:moveTo>
+                  <a:pt x="0" y="0"/>
+                </a:moveTo>
+                <a:lnTo>
+                  <a:pt x="3810000" y="0"/>
+                </a:lnTo>
+                <a:lnTo>
+                  <a:pt x="3810000" y="13970"/>
+                </a:lnTo>
+                <a:lnTo>
+                  <a:pt x="0" y="13970"/>
+                </a:lnTo>
+                <a:close/>
+              </a:path>
+            </a:pathLst>
+          </a:custGeom>
+          <a:solidFill>
+            <a:schemeClr val="accent2"/>
+          </a:solidFill>
+          <a:ln>
+            <a:noFill/>
+          </a:ln>
+        </p:spPr>
+      </p:sp>
+      <p:sp>
+        <p:nvSpPr>
+          <p:cNvPr id="15" name="txt.item.3"/>
+          <p:cNvSpPr txBox="1"/>
+          <p:nvPr/>
+        </p:nvSpPr>
+        <p:spPr>
+          <a:xfrm>
+            <a:off x="2667000" y="4127500"/>
+            <a:ext cx="3810000" cy="457200"/>
+          </a:xfrm>
+          <a:prstGeom prst="rect">
+            <a:avLst/>
+          </a:prstGeom>
+          <a:noFill/>
+        </p:spPr>
+        <p:txBody>
+          <a:bodyPr wrap="square" lIns="0" tIns="0" rIns="0" bIns="0" anchor="ctr" rtlCol="0">
+            <a:noAutofit/>
+          </a:bodyPr>
+          <a:lstStyle/>
+          <a:p>
+            <a:pPr algn="l" eaLnBrk="1" hangingPunct="1" latinLnBrk="0">
+              <a:lnSpc>
+                <a:spcPts val="2400"/>
+              </a:lnSpc>
+            </a:pPr>
+            <a:r>
+              <a:rPr lang="ja-JP" altLang="en-US" sz="1800" b="0" dirty="0">
+                <a:solidFill>
+                  <a:schemeClr val="tx1"/>
+                </a:solidFill>
+                <a:latin typeface="Barlow Medium"/>
+                <a:ea typeface="Noto Sans JP Medium"/>
+              </a:rPr>
+              <a:t>ダミー項目</a:t>
+            </a:r>
+          </a:p>
+        </p:txBody>
+      </p:sp>
+      <p:sp>
+        <p:nvSpPr>
+          <p:cNvPr id="16" name="deco.toc-no-4"/>
+          <p:cNvSpPr txBox="1"/>
+          <p:nvPr/>
+        </p:nvSpPr>
+        <p:spPr>
+          <a:xfrm>
+            <a:off x="1397000" y="4914900"/>
+            <a:ext cx="660400" cy="508000"/>
+          </a:xfrm>
+          <a:prstGeom prst="rect">
+            <a:avLst/>
+          </a:prstGeom>
+          <a:noFill/>
+        </p:spPr>
+        <p:txBody>
+          <a:bodyPr wrap="square" lIns="0" tIns="0" rIns="0" bIns="0" anchor="ctr" rtlCol="0">
+            <a:noAutofit/>
+          </a:bodyPr>
+          <a:lstStyle/>
+          <a:p>
+            <a:pPr algn="l" eaLnBrk="1" hangingPunct="1" latinLnBrk="0">
+              <a:lnSpc>
+                <a:spcPts val="3000"/>
+              </a:lnSpc>
+            </a:pPr>
+            <a:r>
+              <a:rPr lang="ja-JP" altLang="en-US" sz="2400" b="0" dirty="0">
+                <a:solidFill>
+                  <a:schemeClr val="accent1"/>
+                </a:solidFill>
+                <a:latin typeface="Barlow Medium"/>
+                <a:ea typeface="Noto Sans JP"/>
+              </a:rPr>
+              <a:t>04</a:t>
+            </a:r>
+          </a:p>
+        </p:txBody>
+      </p:sp>
+      <p:sp>
+        <p:nvSpPr>
+          <p:cNvPr id="17" name="deco.toc-rule-4"/>
+          <p:cNvSpPr/>
+          <p:nvPr/>
+        </p:nvSpPr>
+        <p:spPr>
+          <a:xfrm>
+            <a:off x="2159000" y="5397500"/>
+            <a:ext cx="3810000" cy="13970"/>
+          </a:xfrm>
+          <a:custGeom>
+            <a:avLst/>
+            <a:gdLst/>
+            <a:ahLst/>
+            <a:cxnLst/>
+            <a:rect l="l" t="t" r="r" b="b"/>
+            <a:pathLst>
+              <a:path w="3810000" h="13970">
+                <a:moveTo>
+                  <a:pt x="0" y="0"/>
+                </a:moveTo>
+                <a:lnTo>
+                  <a:pt x="3810000" y="0"/>
+                </a:lnTo>
+                <a:lnTo>
+                  <a:pt x="3810000" y="13970"/>
+                </a:lnTo>
+                <a:lnTo>
+                  <a:pt x="0" y="13970"/>
+                </a:lnTo>
+                <a:close/>
+              </a:path>
+            </a:pathLst>
+          </a:custGeom>
+          <a:solidFill>
+            <a:schemeClr val="accent2"/>
+          </a:solidFill>
+          <a:ln>
+            <a:noFill/>
+          </a:ln>
+        </p:spPr>
+      </p:sp>
+      <p:sp>
+        <p:nvSpPr>
+          <p:cNvPr id="18" name="txt.item.4"/>
+          <p:cNvSpPr txBox="1"/>
+          <p:nvPr/>
+        </p:nvSpPr>
+        <p:spPr>
+          <a:xfrm>
+            <a:off x="2159000" y="4914900"/>
+            <a:ext cx="3810000" cy="457200"/>
+          </a:xfrm>
+          <a:prstGeom prst="rect">
+            <a:avLst/>
+          </a:prstGeom>
+          <a:noFill/>
+        </p:spPr>
+        <p:txBody>
+          <a:bodyPr wrap="square" lIns="0" tIns="0" rIns="0" bIns="0" anchor="ctr" rtlCol="0">
+            <a:noAutofit/>
+          </a:bodyPr>
+          <a:lstStyle/>
+          <a:p>
+            <a:pPr algn="l" eaLnBrk="1" hangingPunct="1" latinLnBrk="0">
+              <a:lnSpc>
+                <a:spcPts val="2400"/>
+              </a:lnSpc>
+            </a:pPr>
+            <a:r>
+              <a:rPr lang="ja-JP" altLang="en-US" sz="1800" b="0" dirty="0">
+                <a:solidFill>
+                  <a:schemeClr val="tx1"/>
+                </a:solidFill>
+                <a:latin typeface="Barlow Medium"/>
+                <a:ea typeface="Noto Sans JP Medium"/>
+              </a:rPr>
+              <a:t>ダミー項目</a:t>
+            </a:r>
+          </a:p>
+        </p:txBody>
+      </p:sp>
+    </p:spTree>
+  </p:cSld>
+  <p:clrMapOvr>
+    <a:masterClrMapping/>
+  </p:clrMapOvr>
+</p:sld>
+</file>
+
+<file path=ppt/slides/slide13.xml><?xml version="1.0" encoding="utf-8"?>
+<p:sld xmlns:a="http://schemas.openxmlformats.org/drawingml/2006/main" xmlns:p="http://schemas.openxmlformats.org/presentationml/2006/main" xmlns:r="http://schemas.openxmlformats.org/officeDocument/2006/relationships">
+  <p:cSld>
+    <p:spTree>
+      <p:nvGrpSpPr>
+        <p:cNvPr id="1" name=""/>
+        <p:cNvGrpSpPr/>
+        <p:nvPr/>
+      </p:nvGrpSpPr>
+      <p:grpSpPr/>
+      <p:sp>
+        <p:nvSpPr>
+          <p:cNvPr id="2" name="deco.corner"/>
+          <p:cNvSpPr/>
+          <p:nvPr/>
+        </p:nvSpPr>
+        <p:spPr>
+          <a:xfrm>
+            <a:off x="0" y="0"/>
+            <a:ext cx="4311650" cy="4311650"/>
+          </a:xfrm>
+          <a:custGeom>
+            <a:avLst/>
+            <a:gdLst/>
+            <a:ahLst/>
+            <a:cxnLst/>
+            <a:rect l="l" t="t" r="r" b="b"/>
+            <a:pathLst>
+              <a:path w="4311650" h="4311650">
+                <a:moveTo>
+                  <a:pt x="0" y="0"/>
+                </a:moveTo>
+                <a:lnTo>
+                  <a:pt x="4311650" y="0"/>
+                </a:lnTo>
+                <a:lnTo>
+                  <a:pt x="0" y="4311650"/>
+                </a:lnTo>
+                <a:close/>
+              </a:path>
+            </a:pathLst>
+          </a:custGeom>
+          <a:solidFill>
+            <a:schemeClr val="accent1"/>
+          </a:solidFill>
+          <a:ln>
+            <a:noFill/>
+          </a:ln>
+        </p:spPr>
+      </p:sp>
+      <p:sp>
+        <p:nvSpPr>
+          <p:cNvPr id="3" name="deco.tri"/>
+          <p:cNvSpPr/>
+          <p:nvPr/>
+        </p:nvSpPr>
+        <p:spPr>
+          <a:xfrm>
+            <a:off x="5247640" y="-27940"/>
+            <a:ext cx="6958330" cy="6958330"/>
+          </a:xfrm>
+          <a:custGeom>
+            <a:avLst/>
+            <a:gdLst/>
+            <a:ahLst/>
+            <a:cxnLst/>
+            <a:rect l="l" t="t" r="r" b="b"/>
+            <a:pathLst>
+              <a:path w="6958330" h="6958330">
+                <a:moveTo>
+                  <a:pt x="0" y="6958330"/>
+                </a:moveTo>
+                <a:lnTo>
+                  <a:pt x="6958330" y="0"/>
+                </a:lnTo>
+                <a:lnTo>
+                  <a:pt x="6958330" y="6958330"/>
+                </a:lnTo>
+                <a:close/>
+              </a:path>
+            </a:pathLst>
+          </a:custGeom>
+          <a:solidFill>
+            <a:schemeClr val="accent2"/>
+          </a:solidFill>
+          <a:ln>
+            <a:noFill/>
+          </a:ln>
+        </p:spPr>
+      </p:sp>
+      <p:sp>
+        <p:nvSpPr>
+          <p:cNvPr id="4" name="deco.line"/>
+          <p:cNvSpPr/>
+          <p:nvPr/>
+        </p:nvSpPr>
+        <p:spPr>
+          <a:xfrm>
+            <a:off x="9556750" y="4993640"/>
+            <a:ext cx="2118360" cy="1864360"/>
+          </a:xfrm>
+          <a:custGeom>
+            <a:avLst/>
+            <a:gdLst/>
+            <a:ahLst/>
+            <a:cxnLst/>
+            <a:rect l="l" t="t" r="r" b="b"/>
+            <a:pathLst>
+              <a:path w="2118360" h="1864360">
+                <a:moveTo>
+                  <a:pt x="0" y="1864360"/>
+                </a:moveTo>
+                <a:lnTo>
+                  <a:pt x="1864360" y="0"/>
+                </a:lnTo>
+                <a:lnTo>
+                  <a:pt x="2118360" y="0"/>
+                </a:lnTo>
+                <a:lnTo>
+                  <a:pt x="254000" y="1864360"/>
+                </a:lnTo>
+                <a:close/>
+              </a:path>
+            </a:pathLst>
+          </a:custGeom>
+          <a:solidFill>
+            <a:schemeClr val="accent1"/>
+          </a:solidFill>
+          <a:ln>
+            <a:noFill/>
+          </a:ln>
+        </p:spPr>
+      </p:sp>
+      <p:pic>
+        <p:nvPicPr>
+          <p:cNvPr id="5" name="img.side" descr="目次の写真"/>
+          <p:cNvPicPr>
+            <a:picLocks noChangeAspect="1"/>
+          </p:cNvPicPr>
+          <p:nvPr/>
+        </p:nvPicPr>
+        <p:blipFill>
+          <a:blip r:embed="rId2"/>
+          <a:srcRect t="11230" b="11230"/>
+          <a:stretch>
+            <a:fillRect/>
+          </a:stretch>
+        </p:blipFill>
+        <p:spPr>
+          <a:xfrm>
+            <a:off x="6303010" y="2644140"/>
+            <a:ext cx="5363210" cy="2772410"/>
+          </a:xfrm>
+          <a:custGeom>
+            <a:avLst/>
+            <a:gdLst/>
+            <a:ahLst/>
+            <a:cxnLst/>
+            <a:rect l="l" t="t" r="r" b="b"/>
+            <a:pathLst>
+              <a:path w="5363210" h="2772410">
+                <a:moveTo>
+                  <a:pt x="0" y="2772410"/>
+                </a:moveTo>
+                <a:lnTo>
+                  <a:pt x="2772410" y="0"/>
+                </a:lnTo>
+                <a:lnTo>
+                  <a:pt x="5363210" y="0"/>
+                </a:lnTo>
+                <a:lnTo>
+                  <a:pt x="2590800" y="2772410"/>
+                </a:lnTo>
+                <a:close/>
+              </a:path>
+            </a:pathLst>
+          </a:custGeom>
+        </p:spPr>
+      </p:pic>
+      <p:sp>
+        <p:nvSpPr>
+          <p:cNvPr id="6" name="txt.eyebrow"/>
+          <p:cNvSpPr txBox="1"/>
+          <p:nvPr/>
+        </p:nvSpPr>
+        <p:spPr>
+          <a:xfrm rot="-2700000">
+            <a:off x="-355600" y="1003300"/>
+            <a:ext cx="3048000" cy="330200"/>
+          </a:xfrm>
+          <a:prstGeom prst="rect">
+            <a:avLst/>
+          </a:prstGeom>
+          <a:noFill/>
+        </p:spPr>
+        <p:txBody>
+          <a:bodyPr wrap="none" lIns="0" tIns="0" rIns="0" bIns="0" anchor="ctr" rtlCol="0">
+            <a:noAutofit/>
+          </a:bodyPr>
+          <a:lstStyle/>
+          <a:p>
+            <a:pPr algn="ctr" eaLnBrk="1" hangingPunct="1" latinLnBrk="0">
+              <a:lnSpc>
+                <a:spcPts val="2600"/>
+              </a:lnSpc>
+            </a:pPr>
+            <a:r>
+              <a:rPr lang="ja-JP" altLang="en-US" sz="2050" b="0" dirty="0" spc="400">
+                <a:solidFill>
+                  <a:schemeClr val="bg1"/>
+                </a:solidFill>
+                <a:latin typeface="Barlow"/>
+                <a:ea typeface="Noto Sans JP"/>
+              </a:rPr>
+              <a:t>Dummy Label</a:t>
+            </a:r>
+          </a:p>
+        </p:txBody>
+      </p:sp>
+      <p:sp>
+        <p:nvSpPr>
+          <p:cNvPr id="7" name="deco.toc-no-1"/>
+          <p:cNvSpPr txBox="1"/>
+          <p:nvPr/>
+        </p:nvSpPr>
+        <p:spPr>
+          <a:xfrm>
+            <a:off x="2921000" y="2159000"/>
+            <a:ext cx="660400" cy="508000"/>
+          </a:xfrm>
+          <a:prstGeom prst="rect">
+            <a:avLst/>
+          </a:prstGeom>
+          <a:noFill/>
+        </p:spPr>
+        <p:txBody>
+          <a:bodyPr wrap="square" lIns="0" tIns="0" rIns="0" bIns="0" anchor="ctr" rtlCol="0">
+            <a:noAutofit/>
+          </a:bodyPr>
+          <a:lstStyle/>
+          <a:p>
+            <a:pPr algn="l" eaLnBrk="1" hangingPunct="1" latinLnBrk="0">
+              <a:lnSpc>
+                <a:spcPts val="3000"/>
+              </a:lnSpc>
+            </a:pPr>
+            <a:r>
+              <a:rPr lang="ja-JP" altLang="en-US" sz="2400" b="0" dirty="0">
+                <a:solidFill>
+                  <a:schemeClr val="accent1"/>
+                </a:solidFill>
+                <a:latin typeface="Barlow Medium"/>
+                <a:ea typeface="Noto Sans JP"/>
+              </a:rPr>
+              <a:t>01</a:t>
+            </a:r>
+          </a:p>
+        </p:txBody>
+      </p:sp>
+      <p:sp>
+        <p:nvSpPr>
+          <p:cNvPr id="8" name="deco.toc-rule-1"/>
+          <p:cNvSpPr/>
+          <p:nvPr/>
+        </p:nvSpPr>
+        <p:spPr>
+          <a:xfrm>
+            <a:off x="3683000" y="2641600"/>
+            <a:ext cx="3810000" cy="13970"/>
+          </a:xfrm>
+          <a:custGeom>
+            <a:avLst/>
+            <a:gdLst/>
+            <a:ahLst/>
+            <a:cxnLst/>
+            <a:rect l="l" t="t" r="r" b="b"/>
+            <a:pathLst>
+              <a:path w="3810000" h="13970">
+                <a:moveTo>
+                  <a:pt x="0" y="0"/>
+                </a:moveTo>
+                <a:lnTo>
+                  <a:pt x="3810000" y="0"/>
+                </a:lnTo>
+                <a:lnTo>
+                  <a:pt x="3810000" y="13970"/>
+                </a:lnTo>
+                <a:lnTo>
+                  <a:pt x="0" y="13970"/>
+                </a:lnTo>
+                <a:close/>
+              </a:path>
+            </a:pathLst>
+          </a:custGeom>
+          <a:solidFill>
+            <a:schemeClr val="accent2"/>
+          </a:solidFill>
+          <a:ln>
+            <a:noFill/>
+          </a:ln>
+        </p:spPr>
+      </p:sp>
+      <p:sp>
+        <p:nvSpPr>
+          <p:cNvPr id="9" name="txt.item.1"/>
+          <p:cNvSpPr txBox="1"/>
+          <p:nvPr/>
+        </p:nvSpPr>
+        <p:spPr>
+          <a:xfrm>
+            <a:off x="3683000" y="2159000"/>
+            <a:ext cx="3810000" cy="457200"/>
+          </a:xfrm>
+          <a:prstGeom prst="rect">
+            <a:avLst/>
+          </a:prstGeom>
+          <a:noFill/>
+        </p:spPr>
+        <p:txBody>
+          <a:bodyPr wrap="square" lIns="0" tIns="0" rIns="0" bIns="0" anchor="ctr" rtlCol="0">
+            <a:noAutofit/>
+          </a:bodyPr>
+          <a:lstStyle/>
+          <a:p>
+            <a:pPr algn="l" eaLnBrk="1" hangingPunct="1" latinLnBrk="0">
+              <a:lnSpc>
+                <a:spcPts val="2400"/>
+              </a:lnSpc>
+            </a:pPr>
+            <a:r>
+              <a:rPr lang="ja-JP" altLang="en-US" sz="1800" b="0" dirty="0">
+                <a:solidFill>
+                  <a:schemeClr val="tx1"/>
+                </a:solidFill>
+                <a:latin typeface="Barlow Medium"/>
+                <a:ea typeface="Noto Sans JP Medium"/>
+              </a:rPr>
+              <a:t>ダミー項目</a:t>
+            </a:r>
+          </a:p>
+        </p:txBody>
+      </p:sp>
+      <p:sp>
+        <p:nvSpPr>
+          <p:cNvPr id="10" name="deco.toc-no-2"/>
+          <p:cNvSpPr txBox="1"/>
+          <p:nvPr/>
+        </p:nvSpPr>
+        <p:spPr>
+          <a:xfrm>
+            <a:off x="2413000" y="2946400"/>
+            <a:ext cx="660400" cy="508000"/>
+          </a:xfrm>
+          <a:prstGeom prst="rect">
+            <a:avLst/>
+          </a:prstGeom>
+          <a:noFill/>
+        </p:spPr>
+        <p:txBody>
+          <a:bodyPr wrap="square" lIns="0" tIns="0" rIns="0" bIns="0" anchor="ctr" rtlCol="0">
+            <a:noAutofit/>
+          </a:bodyPr>
+          <a:lstStyle/>
+          <a:p>
+            <a:pPr algn="l" eaLnBrk="1" hangingPunct="1" latinLnBrk="0">
+              <a:lnSpc>
+                <a:spcPts val="3000"/>
+              </a:lnSpc>
+            </a:pPr>
+            <a:r>
+              <a:rPr lang="ja-JP" altLang="en-US" sz="2400" b="0" dirty="0">
+                <a:solidFill>
+                  <a:schemeClr val="accent1"/>
+                </a:solidFill>
+                <a:latin typeface="Barlow Medium"/>
+                <a:ea typeface="Noto Sans JP"/>
+              </a:rPr>
+              <a:t>02</a:t>
+            </a:r>
+          </a:p>
+        </p:txBody>
+      </p:sp>
+      <p:sp>
+        <p:nvSpPr>
+          <p:cNvPr id="11" name="deco.toc-rule-2"/>
+          <p:cNvSpPr/>
+          <p:nvPr/>
+        </p:nvSpPr>
+        <p:spPr>
+          <a:xfrm>
+            <a:off x="3175000" y="3429000"/>
+            <a:ext cx="3810000" cy="13970"/>
+          </a:xfrm>
+          <a:custGeom>
+            <a:avLst/>
+            <a:gdLst/>
+            <a:ahLst/>
+            <a:cxnLst/>
+            <a:rect l="l" t="t" r="r" b="b"/>
+            <a:pathLst>
+              <a:path w="3810000" h="13970">
+                <a:moveTo>
+                  <a:pt x="0" y="0"/>
+                </a:moveTo>
+                <a:lnTo>
+                  <a:pt x="3810000" y="0"/>
+                </a:lnTo>
+                <a:lnTo>
+                  <a:pt x="3810000" y="13970"/>
+                </a:lnTo>
+                <a:lnTo>
+                  <a:pt x="0" y="13970"/>
+                </a:lnTo>
+                <a:close/>
+              </a:path>
+            </a:pathLst>
+          </a:custGeom>
+          <a:solidFill>
+            <a:schemeClr val="accent2"/>
+          </a:solidFill>
+          <a:ln>
+            <a:noFill/>
+          </a:ln>
+        </p:spPr>
+      </p:sp>
+      <p:sp>
+        <p:nvSpPr>
+          <p:cNvPr id="12" name="txt.item.2"/>
+          <p:cNvSpPr txBox="1"/>
+          <p:nvPr/>
+        </p:nvSpPr>
+        <p:spPr>
+          <a:xfrm>
+            <a:off x="3175000" y="2946400"/>
+            <a:ext cx="3810000" cy="457200"/>
+          </a:xfrm>
+          <a:prstGeom prst="rect">
+            <a:avLst/>
+          </a:prstGeom>
+          <a:noFill/>
+        </p:spPr>
+        <p:txBody>
+          <a:bodyPr wrap="square" lIns="0" tIns="0" rIns="0" bIns="0" anchor="ctr" rtlCol="0">
+            <a:noAutofit/>
+          </a:bodyPr>
+          <a:lstStyle/>
+          <a:p>
+            <a:pPr algn="l" eaLnBrk="1" hangingPunct="1" latinLnBrk="0">
+              <a:lnSpc>
+                <a:spcPts val="2400"/>
+              </a:lnSpc>
+            </a:pPr>
+            <a:r>
+              <a:rPr lang="ja-JP" altLang="en-US" sz="1800" b="0" dirty="0">
+                <a:solidFill>
+                  <a:schemeClr val="tx1"/>
+                </a:solidFill>
+                <a:latin typeface="Barlow Medium"/>
+                <a:ea typeface="Noto Sans JP Medium"/>
+              </a:rPr>
+              <a:t>ダミー項目</a:t>
+            </a:r>
+          </a:p>
+        </p:txBody>
+      </p:sp>
+      <p:sp>
+        <p:nvSpPr>
+          <p:cNvPr id="13" name="deco.toc-no-3"/>
+          <p:cNvSpPr txBox="1"/>
+          <p:nvPr/>
+        </p:nvSpPr>
+        <p:spPr>
+          <a:xfrm>
+            <a:off x="1905000" y="3733800"/>
+            <a:ext cx="660400" cy="508000"/>
+          </a:xfrm>
+          <a:prstGeom prst="rect">
+            <a:avLst/>
+          </a:prstGeom>
+          <a:noFill/>
+        </p:spPr>
+        <p:txBody>
+          <a:bodyPr wrap="square" lIns="0" tIns="0" rIns="0" bIns="0" anchor="ctr" rtlCol="0">
+            <a:noAutofit/>
+          </a:bodyPr>
+          <a:lstStyle/>
+          <a:p>
+            <a:pPr algn="l" eaLnBrk="1" hangingPunct="1" latinLnBrk="0">
+              <a:lnSpc>
+                <a:spcPts val="3000"/>
+              </a:lnSpc>
+            </a:pPr>
+            <a:r>
+              <a:rPr lang="ja-JP" altLang="en-US" sz="2400" b="0" dirty="0">
+                <a:solidFill>
+                  <a:schemeClr val="accent1"/>
+                </a:solidFill>
+                <a:latin typeface="Barlow Medium"/>
+                <a:ea typeface="Noto Sans JP"/>
+              </a:rPr>
+              <a:t>03</a:t>
+            </a:r>
+          </a:p>
+        </p:txBody>
+      </p:sp>
+      <p:sp>
+        <p:nvSpPr>
+          <p:cNvPr id="14" name="deco.toc-rule-3"/>
+          <p:cNvSpPr/>
+          <p:nvPr/>
+        </p:nvSpPr>
+        <p:spPr>
+          <a:xfrm>
+            <a:off x="2667000" y="4216400"/>
+            <a:ext cx="3810000" cy="13970"/>
+          </a:xfrm>
+          <a:custGeom>
+            <a:avLst/>
+            <a:gdLst/>
+            <a:ahLst/>
+            <a:cxnLst/>
+            <a:rect l="l" t="t" r="r" b="b"/>
+            <a:pathLst>
+              <a:path w="3810000" h="13970">
+                <a:moveTo>
+                  <a:pt x="0" y="0"/>
+                </a:moveTo>
+                <a:lnTo>
+                  <a:pt x="3810000" y="0"/>
+                </a:lnTo>
+                <a:lnTo>
+                  <a:pt x="3810000" y="13970"/>
+                </a:lnTo>
+                <a:lnTo>
+                  <a:pt x="0" y="13970"/>
+                </a:lnTo>
+                <a:close/>
+              </a:path>
+            </a:pathLst>
+          </a:custGeom>
+          <a:solidFill>
+            <a:schemeClr val="accent2"/>
+          </a:solidFill>
+          <a:ln>
+            <a:noFill/>
+          </a:ln>
+        </p:spPr>
+      </p:sp>
+      <p:sp>
+        <p:nvSpPr>
+          <p:cNvPr id="15" name="txt.item.3"/>
+          <p:cNvSpPr txBox="1"/>
+          <p:nvPr/>
+        </p:nvSpPr>
+        <p:spPr>
+          <a:xfrm>
+            <a:off x="2667000" y="3733800"/>
+            <a:ext cx="3810000" cy="457200"/>
+          </a:xfrm>
+          <a:prstGeom prst="rect">
+            <a:avLst/>
+          </a:prstGeom>
+          <a:noFill/>
+        </p:spPr>
+        <p:txBody>
+          <a:bodyPr wrap="square" lIns="0" tIns="0" rIns="0" bIns="0" anchor="ctr" rtlCol="0">
+            <a:noAutofit/>
+          </a:bodyPr>
+          <a:lstStyle/>
+          <a:p>
+            <a:pPr algn="l" eaLnBrk="1" hangingPunct="1" latinLnBrk="0">
+              <a:lnSpc>
+                <a:spcPts val="2400"/>
+              </a:lnSpc>
+            </a:pPr>
+            <a:r>
+              <a:rPr lang="ja-JP" altLang="en-US" sz="1800" b="0" dirty="0">
+                <a:solidFill>
+                  <a:schemeClr val="tx1"/>
+                </a:solidFill>
+                <a:latin typeface="Barlow Medium"/>
+                <a:ea typeface="Noto Sans JP Medium"/>
+              </a:rPr>
+              <a:t>ダミー項目</a:t>
+            </a:r>
+          </a:p>
+        </p:txBody>
+      </p:sp>
+      <p:sp>
+        <p:nvSpPr>
+          <p:cNvPr id="16" name="deco.toc-no-4"/>
+          <p:cNvSpPr txBox="1"/>
+          <p:nvPr/>
+        </p:nvSpPr>
+        <p:spPr>
+          <a:xfrm>
+            <a:off x="1397000" y="4521200"/>
+            <a:ext cx="660400" cy="508000"/>
+          </a:xfrm>
+          <a:prstGeom prst="rect">
+            <a:avLst/>
+          </a:prstGeom>
+          <a:noFill/>
+        </p:spPr>
+        <p:txBody>
+          <a:bodyPr wrap="square" lIns="0" tIns="0" rIns="0" bIns="0" anchor="ctr" rtlCol="0">
+            <a:noAutofit/>
+          </a:bodyPr>
+          <a:lstStyle/>
+          <a:p>
+            <a:pPr algn="l" eaLnBrk="1" hangingPunct="1" latinLnBrk="0">
+              <a:lnSpc>
+                <a:spcPts val="3000"/>
+              </a:lnSpc>
+            </a:pPr>
+            <a:r>
+              <a:rPr lang="ja-JP" altLang="en-US" sz="2400" b="0" dirty="0">
+                <a:solidFill>
+                  <a:schemeClr val="accent1"/>
+                </a:solidFill>
+                <a:latin typeface="Barlow Medium"/>
+                <a:ea typeface="Noto Sans JP"/>
+              </a:rPr>
+              <a:t>04</a:t>
+            </a:r>
+          </a:p>
+        </p:txBody>
+      </p:sp>
+      <p:sp>
+        <p:nvSpPr>
+          <p:cNvPr id="17" name="deco.toc-rule-4"/>
+          <p:cNvSpPr/>
+          <p:nvPr/>
+        </p:nvSpPr>
+        <p:spPr>
+          <a:xfrm>
+            <a:off x="2159000" y="5003800"/>
+            <a:ext cx="3810000" cy="13970"/>
+          </a:xfrm>
+          <a:custGeom>
+            <a:avLst/>
+            <a:gdLst/>
+            <a:ahLst/>
+            <a:cxnLst/>
+            <a:rect l="l" t="t" r="r" b="b"/>
+            <a:pathLst>
+              <a:path w="3810000" h="13970">
+                <a:moveTo>
+                  <a:pt x="0" y="0"/>
+                </a:moveTo>
+                <a:lnTo>
+                  <a:pt x="3810000" y="0"/>
+                </a:lnTo>
+                <a:lnTo>
+                  <a:pt x="3810000" y="13970"/>
+                </a:lnTo>
+                <a:lnTo>
+                  <a:pt x="0" y="13970"/>
+                </a:lnTo>
+                <a:close/>
+              </a:path>
+            </a:pathLst>
+          </a:custGeom>
+          <a:solidFill>
+            <a:schemeClr val="accent2"/>
+          </a:solidFill>
+          <a:ln>
+            <a:noFill/>
+          </a:ln>
+        </p:spPr>
+      </p:sp>
+      <p:sp>
+        <p:nvSpPr>
+          <p:cNvPr id="18" name="txt.item.4"/>
+          <p:cNvSpPr txBox="1"/>
+          <p:nvPr/>
+        </p:nvSpPr>
+        <p:spPr>
+          <a:xfrm>
+            <a:off x="2159000" y="4521200"/>
+            <a:ext cx="3810000" cy="457200"/>
+          </a:xfrm>
+          <a:prstGeom prst="rect">
+            <a:avLst/>
+          </a:prstGeom>
+          <a:noFill/>
+        </p:spPr>
+        <p:txBody>
+          <a:bodyPr wrap="square" lIns="0" tIns="0" rIns="0" bIns="0" anchor="ctr" rtlCol="0">
+            <a:noAutofit/>
+          </a:bodyPr>
+          <a:lstStyle/>
+          <a:p>
+            <a:pPr algn="l" eaLnBrk="1" hangingPunct="1" latinLnBrk="0">
+              <a:lnSpc>
+                <a:spcPts val="2400"/>
+              </a:lnSpc>
+            </a:pPr>
+            <a:r>
+              <a:rPr lang="ja-JP" altLang="en-US" sz="1800" b="0" dirty="0">
+                <a:solidFill>
+                  <a:schemeClr val="tx1"/>
+                </a:solidFill>
+                <a:latin typeface="Barlow Medium"/>
+                <a:ea typeface="Noto Sans JP Medium"/>
+              </a:rPr>
+              <a:t>ダミー項目</a:t>
+            </a:r>
+          </a:p>
+        </p:txBody>
+      </p:sp>
+      <p:sp>
+        <p:nvSpPr>
+          <p:cNvPr id="19" name="deco.toc-no-5"/>
+          <p:cNvSpPr txBox="1"/>
+          <p:nvPr/>
+        </p:nvSpPr>
+        <p:spPr>
+          <a:xfrm>
+            <a:off x="889000" y="5308600"/>
+            <a:ext cx="660400" cy="508000"/>
+          </a:xfrm>
+          <a:prstGeom prst="rect">
+            <a:avLst/>
+          </a:prstGeom>
+          <a:noFill/>
+        </p:spPr>
+        <p:txBody>
+          <a:bodyPr wrap="square" lIns="0" tIns="0" rIns="0" bIns="0" anchor="ctr" rtlCol="0">
+            <a:noAutofit/>
+          </a:bodyPr>
+          <a:lstStyle/>
+          <a:p>
+            <a:pPr algn="l" eaLnBrk="1" hangingPunct="1" latinLnBrk="0">
+              <a:lnSpc>
+                <a:spcPts val="3000"/>
+              </a:lnSpc>
+            </a:pPr>
+            <a:r>
+              <a:rPr lang="ja-JP" altLang="en-US" sz="2400" b="0" dirty="0">
+                <a:solidFill>
+                  <a:schemeClr val="accent1"/>
+                </a:solidFill>
+                <a:latin typeface="Barlow Medium"/>
+                <a:ea typeface="Noto Sans JP"/>
+              </a:rPr>
+              <a:t>05</a:t>
+            </a:r>
+          </a:p>
+        </p:txBody>
+      </p:sp>
+      <p:sp>
+        <p:nvSpPr>
+          <p:cNvPr id="20" name="deco.toc-rule-5"/>
+          <p:cNvSpPr/>
+          <p:nvPr/>
+        </p:nvSpPr>
+        <p:spPr>
+          <a:xfrm>
+            <a:off x="1651000" y="5791200"/>
+            <a:ext cx="3810000" cy="13970"/>
+          </a:xfrm>
+          <a:custGeom>
+            <a:avLst/>
+            <a:gdLst/>
+            <a:ahLst/>
+            <a:cxnLst/>
+            <a:rect l="l" t="t" r="r" b="b"/>
+            <a:pathLst>
+              <a:path w="3810000" h="13970">
+                <a:moveTo>
+                  <a:pt x="0" y="0"/>
+                </a:moveTo>
+                <a:lnTo>
+                  <a:pt x="3810000" y="0"/>
+                </a:lnTo>
+                <a:lnTo>
+                  <a:pt x="3810000" y="13970"/>
+                </a:lnTo>
+                <a:lnTo>
+                  <a:pt x="0" y="13970"/>
+                </a:lnTo>
+                <a:close/>
+              </a:path>
+            </a:pathLst>
+          </a:custGeom>
+          <a:solidFill>
+            <a:schemeClr val="accent2"/>
+          </a:solidFill>
+          <a:ln>
+            <a:noFill/>
+          </a:ln>
+        </p:spPr>
+      </p:sp>
+      <p:sp>
+        <p:nvSpPr>
+          <p:cNvPr id="21" name="txt.item.5"/>
+          <p:cNvSpPr txBox="1"/>
+          <p:nvPr/>
+        </p:nvSpPr>
+        <p:spPr>
+          <a:xfrm>
+            <a:off x="1651000" y="5308600"/>
+            <a:ext cx="3810000" cy="457200"/>
+          </a:xfrm>
+          <a:prstGeom prst="rect">
+            <a:avLst/>
+          </a:prstGeom>
+          <a:noFill/>
+        </p:spPr>
+        <p:txBody>
+          <a:bodyPr wrap="square" lIns="0" tIns="0" rIns="0" bIns="0" anchor="ctr" rtlCol="0">
+            <a:noAutofit/>
+          </a:bodyPr>
+          <a:lstStyle/>
+          <a:p>
+            <a:pPr algn="l" eaLnBrk="1" hangingPunct="1" latinLnBrk="0">
+              <a:lnSpc>
+                <a:spcPts val="2400"/>
+              </a:lnSpc>
+            </a:pPr>
+            <a:r>
+              <a:rPr lang="ja-JP" altLang="en-US" sz="1800" b="0" dirty="0">
+                <a:solidFill>
+                  <a:schemeClr val="tx1"/>
+                </a:solidFill>
+                <a:latin typeface="Barlow Medium"/>
+                <a:ea typeface="Noto Sans JP Medium"/>
+              </a:rPr>
+              <a:t>ダミー項目</a:t>
+            </a:r>
+          </a:p>
+        </p:txBody>
+      </p:sp>
+    </p:spTree>
+  </p:cSld>
+  <p:clrMapOvr>
+    <a:masterClrMapping/>
+  </p:clrMapOvr>
+</p:sld>
+</file>
+
+<file path=ppt/slides/slide14.xml><?xml version="1.0" encoding="utf-8"?>
+<p:sld xmlns:a="http://schemas.openxmlformats.org/drawingml/2006/main" xmlns:p="http://schemas.openxmlformats.org/presentationml/2006/main" xmlns:r="http://schemas.openxmlformats.org/officeDocument/2006/relationships">
+  <p:cSld>
+    <p:spTree>
+      <p:nvGrpSpPr>
+        <p:cNvPr id="1" name=""/>
+        <p:cNvGrpSpPr/>
+        <p:nvPr/>
+      </p:nvGrpSpPr>
+      <p:grpSpPr/>
+      <p:pic>
+        <p:nvPicPr>
+          <p:cNvPr id="2" name="img.right" descr="右の写真"/>
+          <p:cNvPicPr>
+            <a:picLocks noChangeAspect="1"/>
+          </p:cNvPicPr>
+          <p:nvPr/>
+        </p:nvPicPr>
+        <p:blipFill>
+          <a:blip r:embed="rId2"/>
+          <a:srcRect l="33796" r="33796"/>
+          <a:stretch>
+            <a:fillRect/>
+          </a:stretch>
+        </p:blipFill>
+        <p:spPr>
+          <a:xfrm>
+            <a:off x="2647950" y="0"/>
+            <a:ext cx="3333750" cy="6858000"/>
+          </a:xfrm>
+          <a:prstGeom prst="rect">
+            <a:avLst/>
+          </a:prstGeom>
+        </p:spPr>
+      </p:pic>
+      <p:pic>
+        <p:nvPicPr>
+          <p:cNvPr id="3" name="img.left" descr="左の写真"/>
+          <p:cNvPicPr>
+            <a:picLocks noChangeAspect="1"/>
+          </p:cNvPicPr>
+          <p:nvPr/>
+        </p:nvPicPr>
+        <p:blipFill>
+          <a:blip r:embed="rId3"/>
+          <a:srcRect l="33564" r="33564"/>
+          <a:stretch>
+            <a:fillRect/>
+          </a:stretch>
+        </p:blipFill>
+        <p:spPr>
+          <a:xfrm>
+            <a:off x="393700" y="0"/>
+            <a:ext cx="2254250" cy="6858000"/>
+          </a:xfrm>
+          <a:prstGeom prst="rect">
+            <a:avLst/>
+          </a:prstGeom>
+        </p:spPr>
+      </p:pic>
+      <p:sp>
+        <p:nvSpPr>
+          <p:cNvPr id="4" name="deco.tri-top"/>
+          <p:cNvSpPr/>
+          <p:nvPr/>
+        </p:nvSpPr>
+        <p:spPr>
+          <a:xfrm>
+            <a:off x="2647950" y="0"/>
+            <a:ext cx="3326130" cy="3315970"/>
+          </a:xfrm>
+          <a:custGeom>
+            <a:avLst/>
+            <a:gdLst/>
+            <a:ahLst/>
+            <a:cxnLst/>
+            <a:rect l="l" t="t" r="r" b="b"/>
+            <a:pathLst>
+              <a:path w="3326130" h="3315970">
+                <a:moveTo>
+                  <a:pt x="0" y="0"/>
+                </a:moveTo>
+                <a:lnTo>
+                  <a:pt x="3326130" y="0"/>
+                </a:lnTo>
+                <a:lnTo>
+                  <a:pt x="0" y="3315970"/>
+                </a:lnTo>
+                <a:close/>
+              </a:path>
+            </a:pathLst>
+          </a:custGeom>
+          <a:solidFill>
+            <a:schemeClr val="accent1">
+              <a:alpha val="88000"/>
+            </a:schemeClr>
+          </a:solidFill>
+          <a:ln>
+            <a:noFill/>
+          </a:ln>
+        </p:spPr>
+      </p:sp>
+      <p:sp>
+        <p:nvSpPr>
+          <p:cNvPr id="5" name="deco.tri-bottom"/>
+          <p:cNvSpPr/>
+          <p:nvPr/>
+        </p:nvSpPr>
+        <p:spPr>
+          <a:xfrm>
+            <a:off x="958850" y="5090160"/>
+            <a:ext cx="1689100" cy="1687830"/>
+          </a:xfrm>
+          <a:custGeom>
+            <a:avLst/>
+            <a:gdLst/>
+            <a:ahLst/>
+            <a:cxnLst/>
+            <a:rect l="l" t="t" r="r" b="b"/>
+            <a:pathLst>
+              <a:path w="1689100" h="1687830">
+                <a:moveTo>
+                  <a:pt x="0" y="1687830"/>
+                </a:moveTo>
+                <a:lnTo>
+                  <a:pt x="1689100" y="0"/>
+                </a:lnTo>
+                <a:lnTo>
+                  <a:pt x="1689100" y="1687830"/>
+                </a:lnTo>
+                <a:close/>
+              </a:path>
+            </a:pathLst>
+          </a:custGeom>
+          <a:solidFill>
+            <a:schemeClr val="accent1">
+              <a:alpha val="88000"/>
+            </a:schemeClr>
+          </a:solidFill>
+          <a:ln>
+            <a:noFill/>
+          </a:ln>
+        </p:spPr>
+      </p:sp>
+      <p:sp>
+        <p:nvSpPr>
+          <p:cNvPr id="6" name="deco.end-triangle"/>
+          <p:cNvSpPr/>
+          <p:nvPr/>
+        </p:nvSpPr>
+        <p:spPr>
+          <a:xfrm>
+            <a:off x="10998200" y="5702300"/>
+            <a:ext cx="933450" cy="933450"/>
+          </a:xfrm>
+          <a:custGeom>
+            <a:avLst/>
+            <a:gdLst/>
+            <a:ahLst/>
+            <a:cxnLst/>
+            <a:rect l="l" t="t" r="r" b="b"/>
+            <a:pathLst>
+              <a:path w="933450" h="933450">
+                <a:moveTo>
+                  <a:pt x="933450" y="0"/>
+                </a:moveTo>
+                <a:lnTo>
+                  <a:pt x="933450" y="933450"/>
+                </a:lnTo>
+                <a:lnTo>
+                  <a:pt x="0" y="933450"/>
+                </a:lnTo>
+                <a:close/>
+              </a:path>
+            </a:pathLst>
+          </a:custGeom>
+          <a:solidFill>
+            <a:schemeClr val="accent2"/>
+          </a:solidFill>
+          <a:ln>
+            <a:noFill/>
+          </a:ln>
+        </p:spPr>
+      </p:sp>
+      <p:sp>
+        <p:nvSpPr>
+          <p:cNvPr id="7" name="txt.headline"/>
+          <p:cNvSpPr txBox="1"/>
+          <p:nvPr/>
+        </p:nvSpPr>
+        <p:spPr>
+          <a:xfrm>
+            <a:off x="6604000" y="889000"/>
+            <a:ext cx="5080000" cy="1016000"/>
+          </a:xfrm>
+          <a:prstGeom prst="rect">
+            <a:avLst/>
+          </a:prstGeom>
+          <a:noFill/>
+        </p:spPr>
+        <p:txBody>
+          <a:bodyPr wrap="square" lIns="0" tIns="0" rIns="0" bIns="0" anchor="b" rtlCol="0">
+            <a:noAutofit/>
+          </a:bodyPr>
+          <a:lstStyle/>
+          <a:p>
+            <a:pPr algn="l" eaLnBrk="1" hangingPunct="1" latinLnBrk="0">
+              <a:lnSpc>
+                <a:spcPts val="4000"/>
+              </a:lnSpc>
+            </a:pPr>
+            <a:r>
+              <a:rPr lang="ja-JP" altLang="en-US" sz="3250" b="0" dirty="0">
+                <a:solidFill>
+                  <a:schemeClr val="tx1"/>
+                </a:solidFill>
+                <a:latin typeface="Noto Serif JP"/>
+                <a:ea typeface="Noto Serif JP"/>
+              </a:rPr>
+              <a:t>ダミー見出し</a:t>
+            </a:r>
+          </a:p>
+        </p:txBody>
+      </p:sp>
+      <p:sp>
+        <p:nvSpPr>
+          <p:cNvPr id="8" name="deco.rule"/>
+          <p:cNvSpPr/>
+          <p:nvPr/>
+        </p:nvSpPr>
+        <p:spPr>
+          <a:xfrm>
+            <a:off x="6604000" y="2108200"/>
+            <a:ext cx="762000" cy="50800"/>
+          </a:xfrm>
+          <a:custGeom>
+            <a:avLst/>
+            <a:gdLst/>
+            <a:ahLst/>
+            <a:cxnLst/>
+            <a:rect l="l" t="t" r="r" b="b"/>
+            <a:pathLst>
+              <a:path w="762000" h="50800">
+                <a:moveTo>
+                  <a:pt x="0" y="0"/>
+                </a:moveTo>
+                <a:lnTo>
+                  <a:pt x="762000" y="0"/>
+                </a:lnTo>
+                <a:lnTo>
+                  <a:pt x="762000" y="50800"/>
+                </a:lnTo>
+                <a:lnTo>
+                  <a:pt x="0" y="50800"/>
+                </a:lnTo>
+                <a:close/>
+              </a:path>
+            </a:pathLst>
+          </a:custGeom>
+          <a:solidFill>
+            <a:schemeClr val="accent2"/>
+          </a:solidFill>
+          <a:ln>
+            <a:noFill/>
+          </a:ln>
+        </p:spPr>
+      </p:sp>
+      <p:sp>
+        <p:nvSpPr>
+          <p:cNvPr id="9" name="txt.body"/>
+          <p:cNvSpPr txBox="1"/>
+          <p:nvPr/>
+        </p:nvSpPr>
+        <p:spPr>
+          <a:xfrm>
+            <a:off x="6604000" y="2489200"/>
+            <a:ext cx="5080000" cy="2311400"/>
+          </a:xfrm>
+          <a:prstGeom prst="rect">
+            <a:avLst/>
+          </a:prstGeom>
+          <a:noFill/>
+        </p:spPr>
+        <p:txBody>
+          <a:bodyPr wrap="square" lIns="0" tIns="0" rIns="0" bIns="0" anchor="t" rtlCol="0">
+            <a:noAutofit/>
+          </a:bodyPr>
+          <a:lstStyle/>
+          <a:p>
+            <a:pPr algn="l" eaLnBrk="1" hangingPunct="1" latinLnBrk="0">
+              <a:lnSpc>
+                <a:spcPts val="2600"/>
+              </a:lnSpc>
+            </a:pPr>
+            <a:r>
+              <a:rPr lang="ja-JP" altLang="en-US" sz="1500" b="0" dirty="0">
+                <a:solidFill>
+                  <a:schemeClr val="tx1"/>
+                </a:solidFill>
+                <a:latin typeface="Barlow"/>
+                <a:ea typeface="Noto Sans JP"/>
+              </a:rPr>
+              <a:t>ダミー本文</a:t>
+            </a:r>
+          </a:p>
+        </p:txBody>
+      </p:sp>
+    </p:spTree>
+  </p:cSld>
+  <p:clrMapOvr>
+    <a:masterClrMapping/>
+  </p:clrMapOvr>
+</p:sld>
+</file>
+
+<file path=ppt/slides/slide15.xml><?xml version="1.0" encoding="utf-8"?>
+<p:sld xmlns:a="http://schemas.openxmlformats.org/drawingml/2006/main" xmlns:p="http://schemas.openxmlformats.org/presentationml/2006/main" xmlns:r="http://schemas.openxmlformats.org/officeDocument/2006/relationships">
+  <p:cSld>
+    <p:spTree>
+      <p:nvGrpSpPr>
+        <p:cNvPr id="1" name=""/>
+        <p:cNvGrpSpPr/>
+        <p:nvPr/>
+      </p:nvGrpSpPr>
+      <p:grpSpPr/>
+      <p:pic>
+        <p:nvPicPr>
+          <p:cNvPr id="2" name="img.hero" descr="左の写真"/>
+          <p:cNvPicPr>
+            <a:picLocks noChangeAspect="1"/>
+          </p:cNvPicPr>
+          <p:nvPr/>
+        </p:nvPicPr>
+        <p:blipFill>
+          <a:blip r:embed="rId2"/>
+          <a:srcRect l="18765" r="18765"/>
+          <a:stretch>
+            <a:fillRect/>
+          </a:stretch>
+        </p:blipFill>
+        <p:spPr>
+          <a:xfrm>
+            <a:off x="0" y="0"/>
+            <a:ext cx="6426200" cy="6858000"/>
+          </a:xfrm>
+          <a:prstGeom prst="rect">
+            <a:avLst/>
+          </a:prstGeom>
+        </p:spPr>
+      </p:pic>
+      <p:sp>
+        <p:nvSpPr>
+          <p:cNvPr id="3" name="deco.tri-1"/>
+          <p:cNvSpPr/>
+          <p:nvPr/>
+        </p:nvSpPr>
+        <p:spPr>
+          <a:xfrm>
+            <a:off x="-232410" y="78740"/>
+            <a:ext cx="3328670" cy="3328670"/>
+          </a:xfrm>
+          <a:custGeom>
+            <a:avLst/>
+            <a:gdLst/>
+            <a:ahLst/>
+            <a:cxnLst/>
+            <a:rect l="l" t="t" r="r" b="b"/>
+            <a:pathLst>
+              <a:path w="3328670" h="3328670">
+                <a:moveTo>
+                  <a:pt x="3328670" y="0"/>
+                </a:moveTo>
+                <a:lnTo>
+                  <a:pt x="3328670" y="3328670"/>
+                </a:lnTo>
+                <a:lnTo>
+                  <a:pt x="0" y="3328670"/>
+                </a:lnTo>
+                <a:close/>
+              </a:path>
+            </a:pathLst>
+          </a:custGeom>
+          <a:solidFill>
+            <a:schemeClr val="accent1">
+              <a:alpha val="88000"/>
+            </a:schemeClr>
+          </a:solidFill>
+          <a:ln>
+            <a:noFill/>
+          </a:ln>
+        </p:spPr>
+      </p:sp>
+      <p:sp>
+        <p:nvSpPr>
+          <p:cNvPr id="4" name="deco.tri-2"/>
+          <p:cNvSpPr/>
+          <p:nvPr/>
+        </p:nvSpPr>
+        <p:spPr>
+          <a:xfrm>
+            <a:off x="-232410" y="3392170"/>
+            <a:ext cx="3328670" cy="3328670"/>
+          </a:xfrm>
+          <a:custGeom>
+            <a:avLst/>
+            <a:gdLst/>
+            <a:ahLst/>
+            <a:cxnLst/>
+            <a:rect l="l" t="t" r="r" b="b"/>
+            <a:pathLst>
+              <a:path w="3328670" h="3328670">
+                <a:moveTo>
+                  <a:pt x="0" y="3328670"/>
+                </a:moveTo>
+                <a:lnTo>
+                  <a:pt x="0" y="0"/>
+                </a:lnTo>
+                <a:lnTo>
+                  <a:pt x="3328670" y="0"/>
+                </a:lnTo>
+                <a:close/>
+              </a:path>
+            </a:pathLst>
+          </a:custGeom>
+          <a:solidFill>
+            <a:schemeClr val="accent1">
+              <a:alpha val="88000"/>
+            </a:schemeClr>
+          </a:solidFill>
+          <a:ln>
+            <a:noFill/>
+          </a:ln>
+        </p:spPr>
+      </p:sp>
+      <p:sp>
+        <p:nvSpPr>
+          <p:cNvPr id="5" name="deco.tri-3"/>
+          <p:cNvSpPr/>
+          <p:nvPr/>
+        </p:nvSpPr>
+        <p:spPr>
+          <a:xfrm>
+            <a:off x="3102610" y="106680"/>
+            <a:ext cx="3328670" cy="3327400"/>
+          </a:xfrm>
+          <a:custGeom>
+            <a:avLst/>
+            <a:gdLst/>
+            <a:ahLst/>
+            <a:cxnLst/>
+            <a:rect l="l" t="t" r="r" b="b"/>
+            <a:pathLst>
+              <a:path w="3328670" h="3327400">
+                <a:moveTo>
+                  <a:pt x="3328670" y="0"/>
+                </a:moveTo>
+                <a:lnTo>
+                  <a:pt x="3328670" y="3327400"/>
+                </a:lnTo>
+                <a:lnTo>
+                  <a:pt x="0" y="3327400"/>
+                </a:lnTo>
+                <a:close/>
+              </a:path>
+            </a:pathLst>
+          </a:custGeom>
+          <a:solidFill>
+            <a:schemeClr val="accent1">
+              <a:alpha val="88000"/>
+            </a:schemeClr>
+          </a:solidFill>
+          <a:ln>
+            <a:noFill/>
+          </a:ln>
+        </p:spPr>
+      </p:sp>
+      <p:sp>
+        <p:nvSpPr>
+          <p:cNvPr id="6" name="deco.tri-4"/>
+          <p:cNvSpPr/>
+          <p:nvPr/>
+        </p:nvSpPr>
+        <p:spPr>
+          <a:xfrm>
+            <a:off x="3102610" y="3420110"/>
+            <a:ext cx="3328670" cy="3327400"/>
+          </a:xfrm>
+          <a:custGeom>
+            <a:avLst/>
+            <a:gdLst/>
+            <a:ahLst/>
+            <a:cxnLst/>
+            <a:rect l="l" t="t" r="r" b="b"/>
+            <a:pathLst>
+              <a:path w="3328670" h="3327400">
+                <a:moveTo>
+                  <a:pt x="0" y="3327400"/>
+                </a:moveTo>
+                <a:lnTo>
+                  <a:pt x="0" y="0"/>
+                </a:lnTo>
+                <a:lnTo>
+                  <a:pt x="3328670" y="0"/>
+                </a:lnTo>
+                <a:close/>
+              </a:path>
+            </a:pathLst>
+          </a:custGeom>
+          <a:solidFill>
+            <a:schemeClr val="accent1">
+              <a:alpha val="88000"/>
+            </a:schemeClr>
+          </a:solidFill>
+          <a:ln>
+            <a:noFill/>
+          </a:ln>
+        </p:spPr>
+      </p:sp>
+      <p:sp>
+        <p:nvSpPr>
+          <p:cNvPr id="7" name="txt.headline"/>
+          <p:cNvSpPr txBox="1"/>
+          <p:nvPr/>
+        </p:nvSpPr>
+        <p:spPr>
+          <a:xfrm>
+            <a:off x="7061200" y="889000"/>
+            <a:ext cx="4699000" cy="1016000"/>
+          </a:xfrm>
+          <a:prstGeom prst="rect">
+            <a:avLst/>
+          </a:prstGeom>
+          <a:noFill/>
+        </p:spPr>
+        <p:txBody>
+          <a:bodyPr wrap="square" lIns="0" tIns="0" rIns="0" bIns="0" anchor="b" rtlCol="0">
+            <a:noAutofit/>
+          </a:bodyPr>
+          <a:lstStyle/>
+          <a:p>
+            <a:pPr algn="l" eaLnBrk="1" hangingPunct="1" latinLnBrk="0">
+              <a:lnSpc>
+                <a:spcPts val="4000"/>
+              </a:lnSpc>
+            </a:pPr>
+            <a:r>
+              <a:rPr lang="ja-JP" altLang="en-US" sz="3250" b="0" dirty="0">
+                <a:solidFill>
+                  <a:schemeClr val="tx1"/>
+                </a:solidFill>
+                <a:latin typeface="Noto Serif JP"/>
+                <a:ea typeface="Noto Serif JP"/>
+              </a:rPr>
+              <a:t>ダミー見出し</a:t>
+            </a:r>
+          </a:p>
+        </p:txBody>
+      </p:sp>
+      <p:sp>
+        <p:nvSpPr>
+          <p:cNvPr id="8" name="deco.point-1"/>
+          <p:cNvSpPr/>
+          <p:nvPr/>
+        </p:nvSpPr>
+        <p:spPr>
+          <a:xfrm>
+            <a:off x="7061200" y="2603500"/>
+            <a:ext cx="152400" cy="152400"/>
+          </a:xfrm>
+          <a:custGeom>
+            <a:avLst/>
+            <a:gdLst/>
+            <a:ahLst/>
+            <a:cxnLst/>
+            <a:rect l="l" t="t" r="r" b="b"/>
+            <a:pathLst>
+              <a:path w="152400" h="152400">
+                <a:moveTo>
+                  <a:pt x="0" y="0"/>
+                </a:moveTo>
+                <a:lnTo>
+                  <a:pt x="152400" y="0"/>
+                </a:lnTo>
+                <a:lnTo>
+                  <a:pt x="152400" y="152400"/>
+                </a:lnTo>
+                <a:lnTo>
+                  <a:pt x="0" y="152400"/>
+                </a:lnTo>
+                <a:close/>
+              </a:path>
+            </a:pathLst>
+          </a:custGeom>
+          <a:solidFill>
+            <a:schemeClr val="accent2"/>
+          </a:solidFill>
+          <a:ln>
+            <a:noFill/>
+          </a:ln>
+        </p:spPr>
+      </p:sp>
+      <p:sp>
+        <p:nvSpPr>
+          <p:cNvPr id="9" name="txt.item.1"/>
+          <p:cNvSpPr txBox="1"/>
+          <p:nvPr/>
+        </p:nvSpPr>
+        <p:spPr>
+          <a:xfrm>
+            <a:off x="7366000" y="2540000"/>
+            <a:ext cx="4394200" cy="838200"/>
+          </a:xfrm>
+          <a:prstGeom prst="rect">
+            <a:avLst/>
+          </a:prstGeom>
+          <a:noFill/>
+        </p:spPr>
+        <p:txBody>
+          <a:bodyPr wrap="square" lIns="0" tIns="0" rIns="0" bIns="0" anchor="t" rtlCol="0">
+            <a:noAutofit/>
+          </a:bodyPr>
+          <a:lstStyle/>
+          <a:p>
+            <a:pPr algn="l" eaLnBrk="1" hangingPunct="1" latinLnBrk="0">
+              <a:lnSpc>
+                <a:spcPts val="2200"/>
+              </a:lnSpc>
+            </a:pPr>
+            <a:r>
+              <a:rPr lang="ja-JP" altLang="en-US" sz="1600" b="0" dirty="0">
+                <a:solidFill>
+                  <a:schemeClr val="tx1"/>
+                </a:solidFill>
+                <a:latin typeface="Barlow Medium"/>
+                <a:ea typeface="Noto Sans JP Medium"/>
+              </a:rPr>
+              <a:t>ダミー要点</a:t>
+            </a:r>
+          </a:p>
+        </p:txBody>
+      </p:sp>
+      <p:sp>
+        <p:nvSpPr>
+          <p:cNvPr id="10" name="deco.point-2"/>
+          <p:cNvSpPr/>
+          <p:nvPr/>
+        </p:nvSpPr>
+        <p:spPr>
+          <a:xfrm>
+            <a:off x="7061200" y="3771900"/>
+            <a:ext cx="152400" cy="152400"/>
+          </a:xfrm>
+          <a:custGeom>
+            <a:avLst/>
+            <a:gdLst/>
+            <a:ahLst/>
+            <a:cxnLst/>
+            <a:rect l="l" t="t" r="r" b="b"/>
+            <a:pathLst>
+              <a:path w="152400" h="152400">
+                <a:moveTo>
+                  <a:pt x="0" y="0"/>
+                </a:moveTo>
+                <a:lnTo>
+                  <a:pt x="152400" y="0"/>
+                </a:lnTo>
+                <a:lnTo>
+                  <a:pt x="152400" y="152400"/>
+                </a:lnTo>
+                <a:lnTo>
+                  <a:pt x="0" y="152400"/>
+                </a:lnTo>
+                <a:close/>
+              </a:path>
+            </a:pathLst>
+          </a:custGeom>
+          <a:solidFill>
+            <a:schemeClr val="accent2"/>
+          </a:solidFill>
+          <a:ln>
+            <a:noFill/>
+          </a:ln>
+        </p:spPr>
+      </p:sp>
+      <p:sp>
+        <p:nvSpPr>
+          <p:cNvPr id="11" name="txt.item.2"/>
+          <p:cNvSpPr txBox="1"/>
+          <p:nvPr/>
+        </p:nvSpPr>
+        <p:spPr>
+          <a:xfrm>
+            <a:off x="7366000" y="3708400"/>
+            <a:ext cx="4394200" cy="838200"/>
+          </a:xfrm>
+          <a:prstGeom prst="rect">
+            <a:avLst/>
+          </a:prstGeom>
+          <a:noFill/>
+        </p:spPr>
+        <p:txBody>
+          <a:bodyPr wrap="square" lIns="0" tIns="0" rIns="0" bIns="0" anchor="t" rtlCol="0">
+            <a:noAutofit/>
+          </a:bodyPr>
+          <a:lstStyle/>
+          <a:p>
+            <a:pPr algn="l" eaLnBrk="1" hangingPunct="1" latinLnBrk="0">
+              <a:lnSpc>
+                <a:spcPts val="2200"/>
+              </a:lnSpc>
+            </a:pPr>
+            <a:r>
+              <a:rPr lang="ja-JP" altLang="en-US" sz="1600" b="0" dirty="0">
+                <a:solidFill>
+                  <a:schemeClr val="tx1"/>
+                </a:solidFill>
+                <a:latin typeface="Barlow Medium"/>
+                <a:ea typeface="Noto Sans JP Medium"/>
+              </a:rPr>
+              <a:t>ダミー要点</a:t>
+            </a:r>
+          </a:p>
+        </p:txBody>
+      </p:sp>
+      <p:sp>
+        <p:nvSpPr>
+          <p:cNvPr id="12" name="deco.point-3"/>
+          <p:cNvSpPr/>
+          <p:nvPr/>
+        </p:nvSpPr>
+        <p:spPr>
+          <a:xfrm>
+            <a:off x="7061200" y="4940300"/>
+            <a:ext cx="152400" cy="152400"/>
+          </a:xfrm>
+          <a:custGeom>
+            <a:avLst/>
+            <a:gdLst/>
+            <a:ahLst/>
+            <a:cxnLst/>
+            <a:rect l="l" t="t" r="r" b="b"/>
+            <a:pathLst>
+              <a:path w="152400" h="152400">
+                <a:moveTo>
+                  <a:pt x="0" y="0"/>
+                </a:moveTo>
+                <a:lnTo>
+                  <a:pt x="152400" y="0"/>
+                </a:lnTo>
+                <a:lnTo>
+                  <a:pt x="152400" y="152400"/>
+                </a:lnTo>
+                <a:lnTo>
+                  <a:pt x="0" y="152400"/>
+                </a:lnTo>
+                <a:close/>
+              </a:path>
+            </a:pathLst>
+          </a:custGeom>
+          <a:solidFill>
+            <a:schemeClr val="accent2"/>
+          </a:solidFill>
+          <a:ln>
+            <a:noFill/>
+          </a:ln>
+        </p:spPr>
+      </p:sp>
+      <p:sp>
+        <p:nvSpPr>
+          <p:cNvPr id="13" name="txt.item.3"/>
+          <p:cNvSpPr txBox="1"/>
+          <p:nvPr/>
+        </p:nvSpPr>
+        <p:spPr>
+          <a:xfrm>
+            <a:off x="7366000" y="4876800"/>
+            <a:ext cx="4394200" cy="838200"/>
+          </a:xfrm>
+          <a:prstGeom prst="rect">
+            <a:avLst/>
+          </a:prstGeom>
+          <a:noFill/>
+        </p:spPr>
+        <p:txBody>
+          <a:bodyPr wrap="square" lIns="0" tIns="0" rIns="0" bIns="0" anchor="t" rtlCol="0">
+            <a:noAutofit/>
+          </a:bodyPr>
+          <a:lstStyle/>
+          <a:p>
+            <a:pPr algn="l" eaLnBrk="1" hangingPunct="1" latinLnBrk="0">
+              <a:lnSpc>
+                <a:spcPts val="2200"/>
+              </a:lnSpc>
+            </a:pPr>
+            <a:r>
+              <a:rPr lang="ja-JP" altLang="en-US" sz="1600" b="0" dirty="0">
+                <a:solidFill>
+                  <a:schemeClr val="tx1"/>
+                </a:solidFill>
+                <a:latin typeface="Barlow Medium"/>
+                <a:ea typeface="Noto Sans JP Medium"/>
+              </a:rPr>
+              <a:t>ダミー要点</a:t>
+            </a:r>
+          </a:p>
+        </p:txBody>
+      </p:sp>
+    </p:spTree>
+  </p:cSld>
+  <p:clrMapOvr>
+    <a:masterClrMapping/>
+  </p:clrMapOvr>
+</p:sld>
+</file>
+
 <file path=ppt/slides/slide2.xml><?xml version="1.0" encoding="utf-8"?>
 <p:sld xmlns:a="http://schemas.openxmlformats.org/drawingml/2006/main" xmlns:p="http://schemas.openxmlformats.org/presentationml/2006/main" xmlns:r="http://schemas.openxmlformats.org/officeDocument/2006/relationships">
   <p:cSld>
@@ -4787,7 +8995,7 @@
                 <a:latin typeface="Barlow"/>
                 <a:ea typeface="Noto Sans JP"/>
               </a:rPr>
-              <a:t>Company Issues</a:t>
+              <a:t>Dummy Label</a:t>
             </a:r>
           </a:p>
         </p:txBody>
@@ -5347,7 +9555,7 @@
                 <a:latin typeface="Barlow"/>
                 <a:ea typeface="Noto Sans JP"/>
               </a:rPr>
-              <a:t>Company Issues</a:t>
+              <a:t>Dummy Label</a:t>
             </a:r>
           </a:p>
         </p:txBody>
@@ -6055,7 +10263,7 @@
                 <a:latin typeface="Barlow"/>
                 <a:ea typeface="Noto Sans JP"/>
               </a:rPr>
-              <a:t>Company Issues</a:t>
+              <a:t>Dummy Label</a:t>
             </a:r>
           </a:p>
         </p:txBody>
@@ -7112,7 +11320,7 @@
                 <a:latin typeface="Barlow"/>
                 <a:ea typeface="Noto Sans JP"/>
               </a:rPr>
-              <a:t>The core</a:t>
+              <a:t>Dummy</a:t>
             </a:r>
           </a:p>
           <a:p>
@@ -7129,7 +11337,7 @@
                 <a:latin typeface="Barlow"/>
                 <a:ea typeface="Noto Sans JP"/>
               </a:rPr>
-              <a:t>of the system</a:t>
+              <a:t>Label</a:t>
             </a:r>
           </a:p>
         </p:txBody>
@@ -7819,6 +12027,1698 @@
                 <a:ea typeface="Noto Sans JP"/>
               </a:rPr>
               <a:t>ダミー注記</a:t>
+            </a:r>
+          </a:p>
+        </p:txBody>
+      </p:sp>
+    </p:spTree>
+  </p:cSld>
+  <p:clrMapOvr>
+    <a:masterClrMapping/>
+  </p:clrMapOvr>
+</p:sld>
+</file>
+
+<file path=ppt/slides/slide6.xml><?xml version="1.0" encoding="utf-8"?>
+<p:sld xmlns:a="http://schemas.openxmlformats.org/drawingml/2006/main" xmlns:p="http://schemas.openxmlformats.org/presentationml/2006/main" xmlns:r="http://schemas.openxmlformats.org/officeDocument/2006/relationships">
+  <p:cSld>
+    <p:spTree>
+      <p:nvGrpSpPr>
+        <p:cNvPr id="1" name=""/>
+        <p:cNvGrpSpPr/>
+        <p:nvPr/>
+      </p:nvGrpSpPr>
+      <p:grpSpPr/>
+      <p:pic>
+        <p:nvPicPr>
+          <p:cNvPr id="2" name="img.hero" descr="注意のページの写真"/>
+          <p:cNvPicPr>
+            <a:picLocks noChangeAspect="1"/>
+          </p:cNvPicPr>
+          <p:nvPr/>
+        </p:nvPicPr>
+        <p:blipFill>
+          <a:blip r:embed="rId2"/>
+          <a:srcRect l="9506" r="9506"/>
+          <a:stretch>
+            <a:fillRect/>
+          </a:stretch>
+        </p:blipFill>
+        <p:spPr>
+          <a:xfrm>
+            <a:off x="0" y="0"/>
+            <a:ext cx="8331200" cy="6858000"/>
+          </a:xfrm>
+          <a:custGeom>
+            <a:avLst/>
+            <a:gdLst/>
+            <a:ahLst/>
+            <a:cxnLst/>
+            <a:rect l="l" t="t" r="r" b="b"/>
+            <a:pathLst>
+              <a:path w="8331200" h="6858000">
+                <a:moveTo>
+                  <a:pt x="5308600" y="0"/>
+                </a:moveTo>
+                <a:lnTo>
+                  <a:pt x="8331200" y="0"/>
+                </a:lnTo>
+                <a:lnTo>
+                  <a:pt x="1473200" y="6858000"/>
+                </a:lnTo>
+                <a:lnTo>
+                  <a:pt x="0" y="6858000"/>
+                </a:lnTo>
+                <a:lnTo>
+                  <a:pt x="0" y="5302250"/>
+                </a:lnTo>
+                <a:close/>
+              </a:path>
+            </a:pathLst>
+          </a:custGeom>
+        </p:spPr>
+      </p:pic>
+      <p:sp>
+        <p:nvSpPr>
+          <p:cNvPr id="3" name="deco.line-yellow"/>
+          <p:cNvSpPr/>
+          <p:nvPr/>
+        </p:nvSpPr>
+        <p:spPr>
+          <a:xfrm>
+            <a:off x="1606550" y="2082800"/>
+            <a:ext cx="1418590" cy="1263650"/>
+          </a:xfrm>
+          <a:custGeom>
+            <a:avLst/>
+            <a:gdLst/>
+            <a:ahLst/>
+            <a:cxnLst/>
+            <a:rect l="l" t="t" r="r" b="b"/>
+            <a:pathLst>
+              <a:path w="1418590" h="1263650">
+                <a:moveTo>
+                  <a:pt x="0" y="1263650"/>
+                </a:moveTo>
+                <a:lnTo>
+                  <a:pt x="1263650" y="0"/>
+                </a:lnTo>
+                <a:lnTo>
+                  <a:pt x="1418590" y="0"/>
+                </a:lnTo>
+                <a:lnTo>
+                  <a:pt x="154940" y="1263650"/>
+                </a:lnTo>
+                <a:close/>
+              </a:path>
+            </a:pathLst>
+          </a:custGeom>
+          <a:solidFill>
+            <a:schemeClr val="accent2"/>
+          </a:solidFill>
+          <a:ln>
+            <a:noFill/>
+          </a:ln>
+        </p:spPr>
+      </p:sp>
+      <p:sp>
+        <p:nvSpPr>
+          <p:cNvPr id="4" name="deco.line-blue"/>
+          <p:cNvSpPr/>
+          <p:nvPr/>
+        </p:nvSpPr>
+        <p:spPr>
+          <a:xfrm>
+            <a:off x="2117090" y="4464050"/>
+            <a:ext cx="2327910" cy="2073910"/>
+          </a:xfrm>
+          <a:custGeom>
+            <a:avLst/>
+            <a:gdLst/>
+            <a:ahLst/>
+            <a:cxnLst/>
+            <a:rect l="l" t="t" r="r" b="b"/>
+            <a:pathLst>
+              <a:path w="2327910" h="2073910">
+                <a:moveTo>
+                  <a:pt x="0" y="2073910"/>
+                </a:moveTo>
+                <a:lnTo>
+                  <a:pt x="2073910" y="0"/>
+                </a:lnTo>
+                <a:lnTo>
+                  <a:pt x="2327910" y="0"/>
+                </a:lnTo>
+                <a:lnTo>
+                  <a:pt x="254000" y="2073910"/>
+                </a:lnTo>
+                <a:close/>
+              </a:path>
+            </a:pathLst>
+          </a:custGeom>
+          <a:solidFill>
+            <a:schemeClr val="accent1"/>
+          </a:solidFill>
+          <a:ln>
+            <a:noFill/>
+          </a:ln>
+        </p:spPr>
+      </p:sp>
+      <p:sp>
+        <p:nvSpPr>
+          <p:cNvPr id="5" name="deco.band"/>
+          <p:cNvSpPr/>
+          <p:nvPr/>
+        </p:nvSpPr>
+        <p:spPr>
+          <a:xfrm>
+            <a:off x="3686810" y="2209800"/>
+            <a:ext cx="8680450" cy="1070610"/>
+          </a:xfrm>
+          <a:custGeom>
+            <a:avLst/>
+            <a:gdLst/>
+            <a:ahLst/>
+            <a:cxnLst/>
+            <a:rect l="l" t="t" r="r" b="b"/>
+            <a:pathLst>
+              <a:path w="8680450" h="1070610">
+                <a:moveTo>
+                  <a:pt x="0" y="1070610"/>
+                </a:moveTo>
+                <a:lnTo>
+                  <a:pt x="1070610" y="0"/>
+                </a:lnTo>
+                <a:lnTo>
+                  <a:pt x="8680450" y="0"/>
+                </a:lnTo>
+                <a:lnTo>
+                  <a:pt x="8680450" y="1070610"/>
+                </a:lnTo>
+                <a:close/>
+              </a:path>
+            </a:pathLst>
+          </a:custGeom>
+          <a:solidFill>
+            <a:schemeClr val="accent2"/>
+          </a:solidFill>
+          <a:ln>
+            <a:noFill/>
+          </a:ln>
+        </p:spPr>
+      </p:sp>
+      <p:sp>
+        <p:nvSpPr>
+          <p:cNvPr id="6" name="deco.end-triangle"/>
+          <p:cNvSpPr/>
+          <p:nvPr/>
+        </p:nvSpPr>
+        <p:spPr>
+          <a:xfrm>
+            <a:off x="10998200" y="5702300"/>
+            <a:ext cx="933450" cy="933450"/>
+          </a:xfrm>
+          <a:custGeom>
+            <a:avLst/>
+            <a:gdLst/>
+            <a:ahLst/>
+            <a:cxnLst/>
+            <a:rect l="l" t="t" r="r" b="b"/>
+            <a:pathLst>
+              <a:path w="933450" h="933450">
+                <a:moveTo>
+                  <a:pt x="933450" y="0"/>
+                </a:moveTo>
+                <a:lnTo>
+                  <a:pt x="933450" y="933450"/>
+                </a:lnTo>
+                <a:lnTo>
+                  <a:pt x="0" y="933450"/>
+                </a:lnTo>
+                <a:close/>
+              </a:path>
+            </a:pathLst>
+          </a:custGeom>
+          <a:solidFill>
+            <a:schemeClr val="accent2"/>
+          </a:solidFill>
+          <a:ln>
+            <a:noFill/>
+          </a:ln>
+        </p:spPr>
+      </p:sp>
+      <p:sp>
+        <p:nvSpPr>
+          <p:cNvPr id="7" name="txt.eyebrow"/>
+          <p:cNvSpPr txBox="1"/>
+          <p:nvPr/>
+        </p:nvSpPr>
+        <p:spPr>
+          <a:xfrm rot="-2700000">
+            <a:off x="-355600" y="1003300"/>
+            <a:ext cx="3048000" cy="330200"/>
+          </a:xfrm>
+          <a:prstGeom prst="rect">
+            <a:avLst/>
+          </a:prstGeom>
+          <a:noFill/>
+        </p:spPr>
+        <p:txBody>
+          <a:bodyPr wrap="none" lIns="0" tIns="0" rIns="0" bIns="0" anchor="ctr" rtlCol="0">
+            <a:noAutofit/>
+          </a:bodyPr>
+          <a:lstStyle/>
+          <a:p>
+            <a:pPr algn="ctr" eaLnBrk="1" hangingPunct="1" latinLnBrk="0">
+              <a:lnSpc>
+                <a:spcPts val="2600"/>
+              </a:lnSpc>
+            </a:pPr>
+            <a:r>
+              <a:rPr lang="ja-JP" altLang="en-US" sz="2050" b="0" dirty="0" spc="400">
+                <a:solidFill>
+                  <a:schemeClr val="tx1"/>
+                </a:solidFill>
+                <a:latin typeface="Barlow"/>
+                <a:ea typeface="Noto Sans JP"/>
+              </a:rPr>
+              <a:t>Dummy Label</a:t>
+            </a:r>
+          </a:p>
+        </p:txBody>
+      </p:sp>
+      <p:sp>
+        <p:nvSpPr>
+          <p:cNvPr id="8" name="txt.headline"/>
+          <p:cNvSpPr txBox="1"/>
+          <p:nvPr/>
+        </p:nvSpPr>
+        <p:spPr>
+          <a:xfrm>
+            <a:off x="4978400" y="2362200"/>
+            <a:ext cx="7112000" cy="762000"/>
+          </a:xfrm>
+          <a:prstGeom prst="rect">
+            <a:avLst/>
+          </a:prstGeom>
+          <a:noFill/>
+        </p:spPr>
+        <p:txBody>
+          <a:bodyPr wrap="square" lIns="0" tIns="0" rIns="0" bIns="0" anchor="ctr" rtlCol="0">
+            <a:noAutofit/>
+          </a:bodyPr>
+          <a:lstStyle/>
+          <a:p>
+            <a:pPr algn="l" eaLnBrk="1" hangingPunct="1" latinLnBrk="0">
+              <a:lnSpc>
+                <a:spcPts val="4000"/>
+              </a:lnSpc>
+            </a:pPr>
+            <a:r>
+              <a:rPr lang="ja-JP" altLang="en-US" sz="3250" b="0" dirty="0">
+                <a:solidFill>
+                  <a:schemeClr val="tx1"/>
+                </a:solidFill>
+                <a:latin typeface="Noto Serif JP"/>
+                <a:ea typeface="Noto Serif JP"/>
+              </a:rPr>
+              <a:t>ダミー見出し</a:t>
+            </a:r>
+          </a:p>
+        </p:txBody>
+      </p:sp>
+      <p:sp>
+        <p:nvSpPr>
+          <p:cNvPr id="9" name="txt.body"/>
+          <p:cNvSpPr txBox="1"/>
+          <p:nvPr/>
+        </p:nvSpPr>
+        <p:spPr>
+          <a:xfrm>
+            <a:off x="5232400" y="3810000"/>
+            <a:ext cx="6350000" cy="1320800"/>
+          </a:xfrm>
+          <a:prstGeom prst="rect">
+            <a:avLst/>
+          </a:prstGeom>
+          <a:noFill/>
+        </p:spPr>
+        <p:txBody>
+          <a:bodyPr wrap="square" lIns="0" tIns="0" rIns="0" bIns="0" anchor="t" rtlCol="0">
+            <a:noAutofit/>
+          </a:bodyPr>
+          <a:lstStyle/>
+          <a:p>
+            <a:pPr algn="l" eaLnBrk="1" hangingPunct="1" latinLnBrk="0">
+              <a:lnSpc>
+                <a:spcPts val="2600"/>
+              </a:lnSpc>
+            </a:pPr>
+            <a:r>
+              <a:rPr lang="ja-JP" altLang="en-US" sz="1600" b="0" dirty="0">
+                <a:solidFill>
+                  <a:schemeClr val="tx1"/>
+                </a:solidFill>
+                <a:latin typeface="Barlow Medium"/>
+                <a:ea typeface="Noto Sans JP Medium"/>
+              </a:rPr>
+              <a:t>ダミー説明</a:t>
+            </a:r>
+          </a:p>
+        </p:txBody>
+      </p:sp>
+    </p:spTree>
+  </p:cSld>
+  <p:clrMapOvr>
+    <a:masterClrMapping/>
+  </p:clrMapOvr>
+</p:sld>
+</file>
+
+<file path=ppt/slides/slide7.xml><?xml version="1.0" encoding="utf-8"?>
+<p:sld xmlns:a="http://schemas.openxmlformats.org/drawingml/2006/main" xmlns:p="http://schemas.openxmlformats.org/presentationml/2006/main" xmlns:r="http://schemas.openxmlformats.org/officeDocument/2006/relationships">
+  <p:cSld>
+    <p:spTree>
+      <p:nvGrpSpPr>
+        <p:cNvPr id="1" name=""/>
+        <p:cNvGrpSpPr/>
+        <p:nvPr/>
+      </p:nvGrpSpPr>
+      <p:grpSpPr/>
+      <p:sp>
+        <p:nvSpPr>
+          <p:cNvPr id="2" name="deco.tri-left"/>
+          <p:cNvSpPr/>
+          <p:nvPr/>
+        </p:nvSpPr>
+        <p:spPr>
+          <a:xfrm>
+            <a:off x="0" y="4014470"/>
+            <a:ext cx="1177290" cy="1176020"/>
+          </a:xfrm>
+          <a:custGeom>
+            <a:avLst/>
+            <a:gdLst/>
+            <a:ahLst/>
+            <a:cxnLst/>
+            <a:rect l="l" t="t" r="r" b="b"/>
+            <a:pathLst>
+              <a:path w="1177290" h="1176020">
+                <a:moveTo>
+                  <a:pt x="0" y="0"/>
+                </a:moveTo>
+                <a:lnTo>
+                  <a:pt x="1177290" y="0"/>
+                </a:lnTo>
+                <a:lnTo>
+                  <a:pt x="0" y="1176020"/>
+                </a:lnTo>
+                <a:close/>
+              </a:path>
+            </a:pathLst>
+          </a:custGeom>
+          <a:solidFill>
+            <a:schemeClr val="accent2"/>
+          </a:solidFill>
+          <a:ln>
+            <a:noFill/>
+          </a:ln>
+        </p:spPr>
+      </p:sp>
+      <p:sp>
+        <p:nvSpPr>
+          <p:cNvPr id="3" name="deco.tri-right"/>
+          <p:cNvSpPr/>
+          <p:nvPr/>
+        </p:nvSpPr>
+        <p:spPr>
+          <a:xfrm>
+            <a:off x="8135620" y="1460500"/>
+            <a:ext cx="4103370" cy="4103370"/>
+          </a:xfrm>
+          <a:custGeom>
+            <a:avLst/>
+            <a:gdLst/>
+            <a:ahLst/>
+            <a:cxnLst/>
+            <a:rect l="l" t="t" r="r" b="b"/>
+            <a:pathLst>
+              <a:path w="4103370" h="4103370">
+                <a:moveTo>
+                  <a:pt x="4103370" y="0"/>
+                </a:moveTo>
+                <a:lnTo>
+                  <a:pt x="4103370" y="4103370"/>
+                </a:lnTo>
+                <a:lnTo>
+                  <a:pt x="0" y="4103370"/>
+                </a:lnTo>
+                <a:close/>
+              </a:path>
+            </a:pathLst>
+          </a:custGeom>
+          <a:solidFill>
+            <a:schemeClr val="accent2"/>
+          </a:solidFill>
+          <a:ln>
+            <a:noFill/>
+          </a:ln>
+        </p:spPr>
+      </p:sp>
+      <p:sp>
+        <p:nvSpPr>
+          <p:cNvPr id="4" name="deco.plate"/>
+          <p:cNvSpPr/>
+          <p:nvPr/>
+        </p:nvSpPr>
+        <p:spPr>
+          <a:xfrm>
+            <a:off x="1083310" y="2186940"/>
+            <a:ext cx="9500870" cy="2772410"/>
+          </a:xfrm>
+          <a:custGeom>
+            <a:avLst/>
+            <a:gdLst/>
+            <a:ahLst/>
+            <a:cxnLst/>
+            <a:rect l="l" t="t" r="r" b="b"/>
+            <a:pathLst>
+              <a:path w="9500870" h="2772410">
+                <a:moveTo>
+                  <a:pt x="0" y="2760980"/>
+                </a:moveTo>
+                <a:lnTo>
+                  <a:pt x="2759710" y="0"/>
+                </a:lnTo>
+                <a:lnTo>
+                  <a:pt x="9500870" y="0"/>
+                </a:lnTo>
+                <a:lnTo>
+                  <a:pt x="6728460" y="2772410"/>
+                </a:lnTo>
+                <a:close/>
+              </a:path>
+            </a:pathLst>
+          </a:custGeom>
+          <a:solidFill>
+            <a:schemeClr val="accent1"/>
+          </a:solidFill>
+          <a:ln>
+            <a:noFill/>
+          </a:ln>
+        </p:spPr>
+      </p:sp>
+      <p:sp>
+        <p:nvSpPr>
+          <p:cNvPr id="5" name="deco.line"/>
+          <p:cNvSpPr/>
+          <p:nvPr/>
+        </p:nvSpPr>
+        <p:spPr>
+          <a:xfrm>
+            <a:off x="5046980" y="6168390"/>
+            <a:ext cx="1640840" cy="689610"/>
+          </a:xfrm>
+          <a:custGeom>
+            <a:avLst/>
+            <a:gdLst/>
+            <a:ahLst/>
+            <a:cxnLst/>
+            <a:rect l="l" t="t" r="r" b="b"/>
+            <a:pathLst>
+              <a:path w="1640840" h="689610">
+                <a:moveTo>
+                  <a:pt x="0" y="689610"/>
+                </a:moveTo>
+                <a:lnTo>
+                  <a:pt x="689610" y="0"/>
+                </a:lnTo>
+                <a:lnTo>
+                  <a:pt x="1640840" y="0"/>
+                </a:lnTo>
+                <a:lnTo>
+                  <a:pt x="951230" y="689610"/>
+                </a:lnTo>
+                <a:close/>
+              </a:path>
+            </a:pathLst>
+          </a:custGeom>
+          <a:solidFill>
+            <a:schemeClr val="accent1"/>
+          </a:solidFill>
+          <a:ln>
+            <a:noFill/>
+          </a:ln>
+        </p:spPr>
+      </p:sp>
+      <p:sp>
+        <p:nvSpPr>
+          <p:cNvPr id="6" name="txt.headline"/>
+          <p:cNvSpPr txBox="1"/>
+          <p:nvPr/>
+        </p:nvSpPr>
+        <p:spPr>
+          <a:xfrm>
+            <a:off x="3175000" y="3187700"/>
+            <a:ext cx="5588000" cy="762000"/>
+          </a:xfrm>
+          <a:prstGeom prst="rect">
+            <a:avLst/>
+          </a:prstGeom>
+          <a:noFill/>
+        </p:spPr>
+        <p:txBody>
+          <a:bodyPr wrap="square" lIns="0" tIns="0" rIns="0" bIns="0" anchor="ctr" rtlCol="0">
+            <a:noAutofit/>
+          </a:bodyPr>
+          <a:lstStyle/>
+          <a:p>
+            <a:pPr algn="ctr" eaLnBrk="1" hangingPunct="1" latinLnBrk="0">
+              <a:lnSpc>
+                <a:spcPts val="5000"/>
+              </a:lnSpc>
+            </a:pPr>
+            <a:r>
+              <a:rPr lang="ja-JP" altLang="en-US" sz="4000" b="1" dirty="0">
+                <a:solidFill>
+                  <a:schemeClr val="bg1"/>
+                </a:solidFill>
+                <a:latin typeface="Barlow"/>
+                <a:ea typeface="Noto Sans JP"/>
+              </a:rPr>
+              <a:t>ダミー中扉</a:t>
+            </a:r>
+          </a:p>
+        </p:txBody>
+      </p:sp>
+    </p:spTree>
+  </p:cSld>
+  <p:clrMapOvr>
+    <a:masterClrMapping/>
+  </p:clrMapOvr>
+</p:sld>
+</file>
+
+<file path=ppt/slides/slide8.xml><?xml version="1.0" encoding="utf-8"?>
+<p:sld xmlns:a="http://schemas.openxmlformats.org/drawingml/2006/main" xmlns:p="http://schemas.openxmlformats.org/presentationml/2006/main" xmlns:r="http://schemas.openxmlformats.org/officeDocument/2006/relationships">
+  <p:cSld>
+    <p:spTree>
+      <p:nvGrpSpPr>
+        <p:cNvPr id="1" name=""/>
+        <p:cNvGrpSpPr/>
+        <p:nvPr/>
+      </p:nvGrpSpPr>
+      <p:grpSpPr/>
+      <p:sp>
+        <p:nvSpPr>
+          <p:cNvPr id="2" name="deco.corner"/>
+          <p:cNvSpPr/>
+          <p:nvPr/>
+        </p:nvSpPr>
+        <p:spPr>
+          <a:xfrm>
+            <a:off x="0" y="0"/>
+            <a:ext cx="5469890" cy="5469890"/>
+          </a:xfrm>
+          <a:custGeom>
+            <a:avLst/>
+            <a:gdLst/>
+            <a:ahLst/>
+            <a:cxnLst/>
+            <a:rect l="l" t="t" r="r" b="b"/>
+            <a:pathLst>
+              <a:path w="5469890" h="5469890">
+                <a:moveTo>
+                  <a:pt x="0" y="0"/>
+                </a:moveTo>
+                <a:lnTo>
+                  <a:pt x="5469890" y="0"/>
+                </a:lnTo>
+                <a:lnTo>
+                  <a:pt x="0" y="5469890"/>
+                </a:lnTo>
+                <a:close/>
+              </a:path>
+            </a:pathLst>
+          </a:custGeom>
+          <a:solidFill>
+            <a:schemeClr val="accent1"/>
+          </a:solidFill>
+          <a:ln>
+            <a:noFill/>
+          </a:ln>
+        </p:spPr>
+      </p:sp>
+      <p:sp>
+        <p:nvSpPr>
+          <p:cNvPr id="3" name="deco.end-triangle"/>
+          <p:cNvSpPr/>
+          <p:nvPr/>
+        </p:nvSpPr>
+        <p:spPr>
+          <a:xfrm>
+            <a:off x="10995660" y="5704840"/>
+            <a:ext cx="933450" cy="933450"/>
+          </a:xfrm>
+          <a:custGeom>
+            <a:avLst/>
+            <a:gdLst/>
+            <a:ahLst/>
+            <a:cxnLst/>
+            <a:rect l="l" t="t" r="r" b="b"/>
+            <a:pathLst>
+              <a:path w="933450" h="933450">
+                <a:moveTo>
+                  <a:pt x="933450" y="0"/>
+                </a:moveTo>
+                <a:lnTo>
+                  <a:pt x="933450" y="933450"/>
+                </a:lnTo>
+                <a:lnTo>
+                  <a:pt x="0" y="933450"/>
+                </a:lnTo>
+                <a:close/>
+              </a:path>
+            </a:pathLst>
+          </a:custGeom>
+          <a:solidFill>
+            <a:schemeClr val="accent2"/>
+          </a:solidFill>
+          <a:ln>
+            <a:noFill/>
+          </a:ln>
+        </p:spPr>
+      </p:sp>
+      <p:sp>
+        <p:nvSpPr>
+          <p:cNvPr id="4" name="txt.eyebrow"/>
+          <p:cNvSpPr txBox="1"/>
+          <p:nvPr/>
+        </p:nvSpPr>
+        <p:spPr>
+          <a:xfrm rot="-2700000">
+            <a:off x="-431800" y="736600"/>
+            <a:ext cx="3048000" cy="711200"/>
+          </a:xfrm>
+          <a:prstGeom prst="rect">
+            <a:avLst/>
+          </a:prstGeom>
+          <a:noFill/>
+        </p:spPr>
+        <p:txBody>
+          <a:bodyPr wrap="none" lIns="0" tIns="0" rIns="0" bIns="0" anchor="ctr" rtlCol="0">
+            <a:noAutofit/>
+          </a:bodyPr>
+          <a:lstStyle/>
+          <a:p>
+            <a:pPr algn="ctr" eaLnBrk="1" hangingPunct="1" latinLnBrk="0">
+              <a:lnSpc>
+                <a:spcPts val="2600"/>
+              </a:lnSpc>
+            </a:pPr>
+            <a:r>
+              <a:rPr lang="ja-JP" altLang="en-US" sz="2050" b="0" dirty="0" spc="400">
+                <a:solidFill>
+                  <a:schemeClr val="bg1"/>
+                </a:solidFill>
+                <a:latin typeface="Barlow"/>
+                <a:ea typeface="Noto Sans JP Medium"/>
+              </a:rPr>
+              <a:t>Dummy Label</a:t>
+            </a:r>
+          </a:p>
+        </p:txBody>
+      </p:sp>
+      <p:sp>
+        <p:nvSpPr>
+          <p:cNvPr id="5" name="txt.headline"/>
+          <p:cNvSpPr txBox="1"/>
+          <p:nvPr/>
+        </p:nvSpPr>
+        <p:spPr>
+          <a:xfrm>
+            <a:off x="5740400" y="812800"/>
+            <a:ext cx="6096000" cy="711200"/>
+          </a:xfrm>
+          <a:prstGeom prst="rect">
+            <a:avLst/>
+          </a:prstGeom>
+          <a:noFill/>
+        </p:spPr>
+        <p:txBody>
+          <a:bodyPr wrap="square" lIns="0" tIns="0" rIns="0" bIns="0" anchor="ctr" rtlCol="0">
+            <a:noAutofit/>
+          </a:bodyPr>
+          <a:lstStyle/>
+          <a:p>
+            <a:pPr algn="l" eaLnBrk="1" hangingPunct="1" latinLnBrk="0">
+              <a:lnSpc>
+                <a:spcPts val="4000"/>
+              </a:lnSpc>
+            </a:pPr>
+            <a:r>
+              <a:rPr lang="ja-JP" altLang="en-US" sz="3250" b="0" dirty="0">
+                <a:solidFill>
+                  <a:schemeClr val="tx1"/>
+                </a:solidFill>
+                <a:latin typeface="Noto Serif JP"/>
+                <a:ea typeface="Noto Serif JP"/>
+              </a:rPr>
+              <a:t>ダミー見出し</a:t>
+            </a:r>
+          </a:p>
+        </p:txBody>
+      </p:sp>
+      <p:pic>
+        <p:nvPicPr>
+          <p:cNvPr id="6" name="img.item.1" descr="手順1の写真"/>
+          <p:cNvPicPr>
+            <a:picLocks noChangeAspect="1"/>
+          </p:cNvPicPr>
+          <p:nvPr/>
+        </p:nvPicPr>
+        <p:blipFill>
+          <a:blip r:embed="rId2"/>
+          <a:srcRect t="0" b="0"/>
+          <a:stretch>
+            <a:fillRect/>
+          </a:stretch>
+        </p:blipFill>
+        <p:spPr>
+          <a:xfrm>
+            <a:off x="2049780" y="1905000"/>
+            <a:ext cx="2540000" cy="2540000"/>
+          </a:xfrm>
+          <a:prstGeom prst="rect">
+            <a:avLst/>
+          </a:prstGeom>
+        </p:spPr>
+      </p:pic>
+      <p:sp>
+        <p:nvSpPr>
+          <p:cNvPr id="7" name="deco.item-1-rule"/>
+          <p:cNvSpPr/>
+          <p:nvPr/>
+        </p:nvSpPr>
+        <p:spPr>
+          <a:xfrm>
+            <a:off x="2049780" y="4546600"/>
+            <a:ext cx="355600" cy="38100"/>
+          </a:xfrm>
+          <a:custGeom>
+            <a:avLst/>
+            <a:gdLst/>
+            <a:ahLst/>
+            <a:cxnLst/>
+            <a:rect l="l" t="t" r="r" b="b"/>
+            <a:pathLst>
+              <a:path w="355600" h="38100">
+                <a:moveTo>
+                  <a:pt x="0" y="0"/>
+                </a:moveTo>
+                <a:lnTo>
+                  <a:pt x="355600" y="0"/>
+                </a:lnTo>
+                <a:lnTo>
+                  <a:pt x="355600" y="38100"/>
+                </a:lnTo>
+                <a:lnTo>
+                  <a:pt x="0" y="38100"/>
+                </a:lnTo>
+                <a:close/>
+              </a:path>
+            </a:pathLst>
+          </a:custGeom>
+          <a:solidFill>
+            <a:schemeClr val="accent1"/>
+          </a:solidFill>
+          <a:ln>
+            <a:noFill/>
+          </a:ln>
+        </p:spPr>
+      </p:sp>
+      <p:sp>
+        <p:nvSpPr>
+          <p:cNvPr id="8" name="txt.item.1.caption"/>
+          <p:cNvSpPr txBox="1"/>
+          <p:nvPr/>
+        </p:nvSpPr>
+        <p:spPr>
+          <a:xfrm>
+            <a:off x="2049780" y="4673600"/>
+            <a:ext cx="2540000" cy="558800"/>
+          </a:xfrm>
+          <a:prstGeom prst="rect">
+            <a:avLst/>
+          </a:prstGeom>
+          <a:noFill/>
+        </p:spPr>
+        <p:txBody>
+          <a:bodyPr wrap="square" lIns="0" tIns="0" rIns="0" bIns="0" anchor="t" rtlCol="0">
+            <a:noAutofit/>
+          </a:bodyPr>
+          <a:lstStyle/>
+          <a:p>
+            <a:pPr algn="l" eaLnBrk="1" hangingPunct="1" latinLnBrk="0">
+              <a:lnSpc>
+                <a:spcPts val="2100"/>
+              </a:lnSpc>
+            </a:pPr>
+            <a:r>
+              <a:rPr lang="ja-JP" altLang="en-US" sz="1500" b="1" dirty="0">
+                <a:solidFill>
+                  <a:schemeClr val="tx1"/>
+                </a:solidFill>
+                <a:latin typeface="Barlow"/>
+                <a:ea typeface="Noto Sans JP"/>
+              </a:rPr>
+              <a:t>ダミー説明</a:t>
+            </a:r>
+          </a:p>
+        </p:txBody>
+      </p:sp>
+      <p:pic>
+        <p:nvPicPr>
+          <p:cNvPr id="9" name="img.item.2" descr="手順2の写真"/>
+          <p:cNvPicPr>
+            <a:picLocks noChangeAspect="1"/>
+          </p:cNvPicPr>
+          <p:nvPr/>
+        </p:nvPicPr>
+        <p:blipFill>
+          <a:blip r:embed="rId3"/>
+          <a:srcRect t="0" b="0"/>
+          <a:stretch>
+            <a:fillRect/>
+          </a:stretch>
+        </p:blipFill>
+        <p:spPr>
+          <a:xfrm>
+            <a:off x="5396230" y="1905000"/>
+            <a:ext cx="2540000" cy="2540000"/>
+          </a:xfrm>
+          <a:prstGeom prst="rect">
+            <a:avLst/>
+          </a:prstGeom>
+        </p:spPr>
+      </p:pic>
+      <p:sp>
+        <p:nvSpPr>
+          <p:cNvPr id="10" name="deco.item-2-rule"/>
+          <p:cNvSpPr/>
+          <p:nvPr/>
+        </p:nvSpPr>
+        <p:spPr>
+          <a:xfrm>
+            <a:off x="5396230" y="4546600"/>
+            <a:ext cx="355600" cy="38100"/>
+          </a:xfrm>
+          <a:custGeom>
+            <a:avLst/>
+            <a:gdLst/>
+            <a:ahLst/>
+            <a:cxnLst/>
+            <a:rect l="l" t="t" r="r" b="b"/>
+            <a:pathLst>
+              <a:path w="355600" h="38100">
+                <a:moveTo>
+                  <a:pt x="0" y="0"/>
+                </a:moveTo>
+                <a:lnTo>
+                  <a:pt x="355600" y="0"/>
+                </a:lnTo>
+                <a:lnTo>
+                  <a:pt x="355600" y="38100"/>
+                </a:lnTo>
+                <a:lnTo>
+                  <a:pt x="0" y="38100"/>
+                </a:lnTo>
+                <a:close/>
+              </a:path>
+            </a:pathLst>
+          </a:custGeom>
+          <a:solidFill>
+            <a:schemeClr val="accent1"/>
+          </a:solidFill>
+          <a:ln>
+            <a:noFill/>
+          </a:ln>
+        </p:spPr>
+      </p:sp>
+      <p:sp>
+        <p:nvSpPr>
+          <p:cNvPr id="11" name="txt.item.2.caption"/>
+          <p:cNvSpPr txBox="1"/>
+          <p:nvPr/>
+        </p:nvSpPr>
+        <p:spPr>
+          <a:xfrm>
+            <a:off x="5396230" y="4673600"/>
+            <a:ext cx="2540000" cy="558800"/>
+          </a:xfrm>
+          <a:prstGeom prst="rect">
+            <a:avLst/>
+          </a:prstGeom>
+          <a:noFill/>
+        </p:spPr>
+        <p:txBody>
+          <a:bodyPr wrap="square" lIns="0" tIns="0" rIns="0" bIns="0" anchor="t" rtlCol="0">
+            <a:noAutofit/>
+          </a:bodyPr>
+          <a:lstStyle/>
+          <a:p>
+            <a:pPr algn="l" eaLnBrk="1" hangingPunct="1" latinLnBrk="0">
+              <a:lnSpc>
+                <a:spcPts val="2100"/>
+              </a:lnSpc>
+            </a:pPr>
+            <a:r>
+              <a:rPr lang="ja-JP" altLang="en-US" sz="1500" b="1" dirty="0">
+                <a:solidFill>
+                  <a:schemeClr val="tx1"/>
+                </a:solidFill>
+                <a:latin typeface="Barlow"/>
+                <a:ea typeface="Noto Sans JP"/>
+              </a:rPr>
+              <a:t>ダミー説明</a:t>
+            </a:r>
+          </a:p>
+        </p:txBody>
+      </p:sp>
+      <p:pic>
+        <p:nvPicPr>
+          <p:cNvPr id="12" name="img.item.3" descr="手順3の写真"/>
+          <p:cNvPicPr>
+            <a:picLocks noChangeAspect="1"/>
+          </p:cNvPicPr>
+          <p:nvPr/>
+        </p:nvPicPr>
+        <p:blipFill>
+          <a:blip r:embed="rId4"/>
+          <a:srcRect t="0" b="0"/>
+          <a:stretch>
+            <a:fillRect/>
+          </a:stretch>
+        </p:blipFill>
+        <p:spPr>
+          <a:xfrm>
+            <a:off x="8742680" y="1905000"/>
+            <a:ext cx="2540000" cy="2540000"/>
+          </a:xfrm>
+          <a:prstGeom prst="rect">
+            <a:avLst/>
+          </a:prstGeom>
+        </p:spPr>
+      </p:pic>
+      <p:sp>
+        <p:nvSpPr>
+          <p:cNvPr id="13" name="deco.item-3-rule"/>
+          <p:cNvSpPr/>
+          <p:nvPr/>
+        </p:nvSpPr>
+        <p:spPr>
+          <a:xfrm>
+            <a:off x="8742680" y="4546600"/>
+            <a:ext cx="355600" cy="38100"/>
+          </a:xfrm>
+          <a:custGeom>
+            <a:avLst/>
+            <a:gdLst/>
+            <a:ahLst/>
+            <a:cxnLst/>
+            <a:rect l="l" t="t" r="r" b="b"/>
+            <a:pathLst>
+              <a:path w="355600" h="38100">
+                <a:moveTo>
+                  <a:pt x="0" y="0"/>
+                </a:moveTo>
+                <a:lnTo>
+                  <a:pt x="355600" y="0"/>
+                </a:lnTo>
+                <a:lnTo>
+                  <a:pt x="355600" y="38100"/>
+                </a:lnTo>
+                <a:lnTo>
+                  <a:pt x="0" y="38100"/>
+                </a:lnTo>
+                <a:close/>
+              </a:path>
+            </a:pathLst>
+          </a:custGeom>
+          <a:solidFill>
+            <a:schemeClr val="accent1"/>
+          </a:solidFill>
+          <a:ln>
+            <a:noFill/>
+          </a:ln>
+        </p:spPr>
+      </p:sp>
+      <p:sp>
+        <p:nvSpPr>
+          <p:cNvPr id="14" name="txt.item.3.caption"/>
+          <p:cNvSpPr txBox="1"/>
+          <p:nvPr/>
+        </p:nvSpPr>
+        <p:spPr>
+          <a:xfrm>
+            <a:off x="8742680" y="4673600"/>
+            <a:ext cx="2540000" cy="558800"/>
+          </a:xfrm>
+          <a:prstGeom prst="rect">
+            <a:avLst/>
+          </a:prstGeom>
+          <a:noFill/>
+        </p:spPr>
+        <p:txBody>
+          <a:bodyPr wrap="square" lIns="0" tIns="0" rIns="0" bIns="0" anchor="t" rtlCol="0">
+            <a:noAutofit/>
+          </a:bodyPr>
+          <a:lstStyle/>
+          <a:p>
+            <a:pPr algn="l" eaLnBrk="1" hangingPunct="1" latinLnBrk="0">
+              <a:lnSpc>
+                <a:spcPts val="2100"/>
+              </a:lnSpc>
+            </a:pPr>
+            <a:r>
+              <a:rPr lang="ja-JP" altLang="en-US" sz="1500" b="1" dirty="0">
+                <a:solidFill>
+                  <a:schemeClr val="tx1"/>
+                </a:solidFill>
+                <a:latin typeface="Barlow"/>
+                <a:ea typeface="Noto Sans JP"/>
+              </a:rPr>
+              <a:t>ダミー説明</a:t>
+            </a:r>
+          </a:p>
+        </p:txBody>
+      </p:sp>
+    </p:spTree>
+  </p:cSld>
+  <p:clrMapOvr>
+    <a:masterClrMapping/>
+  </p:clrMapOvr>
+</p:sld>
+</file>
+
+<file path=ppt/slides/slide9.xml><?xml version="1.0" encoding="utf-8"?>
+<p:sld xmlns:a="http://schemas.openxmlformats.org/drawingml/2006/main" xmlns:p="http://schemas.openxmlformats.org/presentationml/2006/main" xmlns:r="http://schemas.openxmlformats.org/officeDocument/2006/relationships">
+  <p:cSld>
+    <p:spTree>
+      <p:nvGrpSpPr>
+        <p:cNvPr id="1" name=""/>
+        <p:cNvGrpSpPr/>
+        <p:nvPr/>
+      </p:nvGrpSpPr>
+      <p:grpSpPr/>
+      <p:sp>
+        <p:nvSpPr>
+          <p:cNvPr id="2" name="deco.corner"/>
+          <p:cNvSpPr/>
+          <p:nvPr/>
+        </p:nvSpPr>
+        <p:spPr>
+          <a:xfrm>
+            <a:off x="0" y="0"/>
+            <a:ext cx="5469890" cy="5469890"/>
+          </a:xfrm>
+          <a:custGeom>
+            <a:avLst/>
+            <a:gdLst/>
+            <a:ahLst/>
+            <a:cxnLst/>
+            <a:rect l="l" t="t" r="r" b="b"/>
+            <a:pathLst>
+              <a:path w="5469890" h="5469890">
+                <a:moveTo>
+                  <a:pt x="0" y="0"/>
+                </a:moveTo>
+                <a:lnTo>
+                  <a:pt x="5469890" y="0"/>
+                </a:lnTo>
+                <a:lnTo>
+                  <a:pt x="0" y="5469890"/>
+                </a:lnTo>
+                <a:close/>
+              </a:path>
+            </a:pathLst>
+          </a:custGeom>
+          <a:solidFill>
+            <a:schemeClr val="accent1"/>
+          </a:solidFill>
+          <a:ln>
+            <a:noFill/>
+          </a:ln>
+        </p:spPr>
+      </p:sp>
+      <p:sp>
+        <p:nvSpPr>
+          <p:cNvPr id="3" name="deco.end-triangle"/>
+          <p:cNvSpPr/>
+          <p:nvPr/>
+        </p:nvSpPr>
+        <p:spPr>
+          <a:xfrm>
+            <a:off x="10995660" y="5704840"/>
+            <a:ext cx="933450" cy="933450"/>
+          </a:xfrm>
+          <a:custGeom>
+            <a:avLst/>
+            <a:gdLst/>
+            <a:ahLst/>
+            <a:cxnLst/>
+            <a:rect l="l" t="t" r="r" b="b"/>
+            <a:pathLst>
+              <a:path w="933450" h="933450">
+                <a:moveTo>
+                  <a:pt x="933450" y="0"/>
+                </a:moveTo>
+                <a:lnTo>
+                  <a:pt x="933450" y="933450"/>
+                </a:lnTo>
+                <a:lnTo>
+                  <a:pt x="0" y="933450"/>
+                </a:lnTo>
+                <a:close/>
+              </a:path>
+            </a:pathLst>
+          </a:custGeom>
+          <a:solidFill>
+            <a:schemeClr val="accent2"/>
+          </a:solidFill>
+          <a:ln>
+            <a:noFill/>
+          </a:ln>
+        </p:spPr>
+      </p:sp>
+      <p:sp>
+        <p:nvSpPr>
+          <p:cNvPr id="4" name="txt.eyebrow"/>
+          <p:cNvSpPr txBox="1"/>
+          <p:nvPr/>
+        </p:nvSpPr>
+        <p:spPr>
+          <a:xfrm rot="-2700000">
+            <a:off x="-431800" y="736600"/>
+            <a:ext cx="3048000" cy="711200"/>
+          </a:xfrm>
+          <a:prstGeom prst="rect">
+            <a:avLst/>
+          </a:prstGeom>
+          <a:noFill/>
+        </p:spPr>
+        <p:txBody>
+          <a:bodyPr wrap="none" lIns="0" tIns="0" rIns="0" bIns="0" anchor="ctr" rtlCol="0">
+            <a:noAutofit/>
+          </a:bodyPr>
+          <a:lstStyle/>
+          <a:p>
+            <a:pPr algn="ctr" eaLnBrk="1" hangingPunct="1" latinLnBrk="0">
+              <a:lnSpc>
+                <a:spcPts val="2600"/>
+              </a:lnSpc>
+            </a:pPr>
+            <a:r>
+              <a:rPr lang="ja-JP" altLang="en-US" sz="2050" b="0" dirty="0" spc="400">
+                <a:solidFill>
+                  <a:schemeClr val="bg1"/>
+                </a:solidFill>
+                <a:latin typeface="Barlow"/>
+                <a:ea typeface="Noto Sans JP Medium"/>
+              </a:rPr>
+              <a:t>Dummy Label</a:t>
+            </a:r>
+          </a:p>
+        </p:txBody>
+      </p:sp>
+      <p:sp>
+        <p:nvSpPr>
+          <p:cNvPr id="5" name="txt.headline"/>
+          <p:cNvSpPr txBox="1"/>
+          <p:nvPr/>
+        </p:nvSpPr>
+        <p:spPr>
+          <a:xfrm>
+            <a:off x="5740400" y="812800"/>
+            <a:ext cx="6096000" cy="711200"/>
+          </a:xfrm>
+          <a:prstGeom prst="rect">
+            <a:avLst/>
+          </a:prstGeom>
+          <a:noFill/>
+        </p:spPr>
+        <p:txBody>
+          <a:bodyPr wrap="square" lIns="0" tIns="0" rIns="0" bIns="0" anchor="ctr" rtlCol="0">
+            <a:noAutofit/>
+          </a:bodyPr>
+          <a:lstStyle/>
+          <a:p>
+            <a:pPr algn="l" eaLnBrk="1" hangingPunct="1" latinLnBrk="0">
+              <a:lnSpc>
+                <a:spcPts val="4000"/>
+              </a:lnSpc>
+            </a:pPr>
+            <a:r>
+              <a:rPr lang="ja-JP" altLang="en-US" sz="3250" b="0" dirty="0">
+                <a:solidFill>
+                  <a:schemeClr val="tx1"/>
+                </a:solidFill>
+                <a:latin typeface="Noto Serif JP"/>
+                <a:ea typeface="Noto Serif JP"/>
+              </a:rPr>
+              <a:t>ダミー見出し</a:t>
+            </a:r>
+          </a:p>
+        </p:txBody>
+      </p:sp>
+      <p:pic>
+        <p:nvPicPr>
+          <p:cNvPr id="6" name="img.item.1" descr="手順1の写真"/>
+          <p:cNvPicPr>
+            <a:picLocks noChangeAspect="1"/>
+          </p:cNvPicPr>
+          <p:nvPr/>
+        </p:nvPicPr>
+        <p:blipFill>
+          <a:blip r:embed="rId2"/>
+          <a:srcRect t="0" b="0"/>
+          <a:stretch>
+            <a:fillRect/>
+          </a:stretch>
+        </p:blipFill>
+        <p:spPr>
+          <a:xfrm>
+            <a:off x="2049780" y="2137410"/>
+            <a:ext cx="2077720" cy="2077720"/>
+          </a:xfrm>
+          <a:prstGeom prst="rect">
+            <a:avLst/>
+          </a:prstGeom>
+        </p:spPr>
+      </p:pic>
+      <p:sp>
+        <p:nvSpPr>
+          <p:cNvPr id="7" name="deco.item-1-rule"/>
+          <p:cNvSpPr/>
+          <p:nvPr/>
+        </p:nvSpPr>
+        <p:spPr>
+          <a:xfrm>
+            <a:off x="2049780" y="4316730"/>
+            <a:ext cx="355600" cy="38100"/>
+          </a:xfrm>
+          <a:custGeom>
+            <a:avLst/>
+            <a:gdLst/>
+            <a:ahLst/>
+            <a:cxnLst/>
+            <a:rect l="l" t="t" r="r" b="b"/>
+            <a:pathLst>
+              <a:path w="355600" h="38100">
+                <a:moveTo>
+                  <a:pt x="0" y="0"/>
+                </a:moveTo>
+                <a:lnTo>
+                  <a:pt x="355600" y="0"/>
+                </a:lnTo>
+                <a:lnTo>
+                  <a:pt x="355600" y="38100"/>
+                </a:lnTo>
+                <a:lnTo>
+                  <a:pt x="0" y="38100"/>
+                </a:lnTo>
+                <a:close/>
+              </a:path>
+            </a:pathLst>
+          </a:custGeom>
+          <a:solidFill>
+            <a:schemeClr val="accent1"/>
+          </a:solidFill>
+          <a:ln>
+            <a:noFill/>
+          </a:ln>
+        </p:spPr>
+      </p:sp>
+      <p:sp>
+        <p:nvSpPr>
+          <p:cNvPr id="8" name="txt.item.1.caption"/>
+          <p:cNvSpPr txBox="1"/>
+          <p:nvPr/>
+        </p:nvSpPr>
+        <p:spPr>
+          <a:xfrm>
+            <a:off x="2049780" y="4443730"/>
+            <a:ext cx="2077720" cy="558800"/>
+          </a:xfrm>
+          <a:prstGeom prst="rect">
+            <a:avLst/>
+          </a:prstGeom>
+          <a:noFill/>
+        </p:spPr>
+        <p:txBody>
+          <a:bodyPr wrap="square" lIns="0" tIns="0" rIns="0" bIns="0" anchor="t" rtlCol="0">
+            <a:noAutofit/>
+          </a:bodyPr>
+          <a:lstStyle/>
+          <a:p>
+            <a:pPr algn="l" eaLnBrk="1" hangingPunct="1" latinLnBrk="0">
+              <a:lnSpc>
+                <a:spcPts val="2100"/>
+              </a:lnSpc>
+            </a:pPr>
+            <a:r>
+              <a:rPr lang="ja-JP" altLang="en-US" sz="1500" b="1" dirty="0">
+                <a:solidFill>
+                  <a:schemeClr val="tx1"/>
+                </a:solidFill>
+                <a:latin typeface="Barlow"/>
+                <a:ea typeface="Noto Sans JP"/>
+              </a:rPr>
+              <a:t>ダミー説明</a:t>
+            </a:r>
+          </a:p>
+        </p:txBody>
+      </p:sp>
+      <p:pic>
+        <p:nvPicPr>
+          <p:cNvPr id="9" name="img.item.2" descr="手順2の写真"/>
+          <p:cNvPicPr>
+            <a:picLocks noChangeAspect="1"/>
+          </p:cNvPicPr>
+          <p:nvPr/>
+        </p:nvPicPr>
+        <p:blipFill>
+          <a:blip r:embed="rId3"/>
+          <a:srcRect t="0" b="0"/>
+          <a:stretch>
+            <a:fillRect/>
+          </a:stretch>
+        </p:blipFill>
+        <p:spPr>
+          <a:xfrm>
+            <a:off x="4434840" y="2137410"/>
+            <a:ext cx="2077720" cy="2077720"/>
+          </a:xfrm>
+          <a:prstGeom prst="rect">
+            <a:avLst/>
+          </a:prstGeom>
+        </p:spPr>
+      </p:pic>
+      <p:sp>
+        <p:nvSpPr>
+          <p:cNvPr id="10" name="deco.item-2-rule"/>
+          <p:cNvSpPr/>
+          <p:nvPr/>
+        </p:nvSpPr>
+        <p:spPr>
+          <a:xfrm>
+            <a:off x="4434840" y="4316730"/>
+            <a:ext cx="355600" cy="38100"/>
+          </a:xfrm>
+          <a:custGeom>
+            <a:avLst/>
+            <a:gdLst/>
+            <a:ahLst/>
+            <a:cxnLst/>
+            <a:rect l="l" t="t" r="r" b="b"/>
+            <a:pathLst>
+              <a:path w="355600" h="38100">
+                <a:moveTo>
+                  <a:pt x="0" y="0"/>
+                </a:moveTo>
+                <a:lnTo>
+                  <a:pt x="355600" y="0"/>
+                </a:lnTo>
+                <a:lnTo>
+                  <a:pt x="355600" y="38100"/>
+                </a:lnTo>
+                <a:lnTo>
+                  <a:pt x="0" y="38100"/>
+                </a:lnTo>
+                <a:close/>
+              </a:path>
+            </a:pathLst>
+          </a:custGeom>
+          <a:solidFill>
+            <a:schemeClr val="accent1"/>
+          </a:solidFill>
+          <a:ln>
+            <a:noFill/>
+          </a:ln>
+        </p:spPr>
+      </p:sp>
+      <p:sp>
+        <p:nvSpPr>
+          <p:cNvPr id="11" name="txt.item.2.caption"/>
+          <p:cNvSpPr txBox="1"/>
+          <p:nvPr/>
+        </p:nvSpPr>
+        <p:spPr>
+          <a:xfrm>
+            <a:off x="4434840" y="4443730"/>
+            <a:ext cx="2077720" cy="558800"/>
+          </a:xfrm>
+          <a:prstGeom prst="rect">
+            <a:avLst/>
+          </a:prstGeom>
+          <a:noFill/>
+        </p:spPr>
+        <p:txBody>
+          <a:bodyPr wrap="square" lIns="0" tIns="0" rIns="0" bIns="0" anchor="t" rtlCol="0">
+            <a:noAutofit/>
+          </a:bodyPr>
+          <a:lstStyle/>
+          <a:p>
+            <a:pPr algn="l" eaLnBrk="1" hangingPunct="1" latinLnBrk="0">
+              <a:lnSpc>
+                <a:spcPts val="2100"/>
+              </a:lnSpc>
+            </a:pPr>
+            <a:r>
+              <a:rPr lang="ja-JP" altLang="en-US" sz="1500" b="1" dirty="0">
+                <a:solidFill>
+                  <a:schemeClr val="tx1"/>
+                </a:solidFill>
+                <a:latin typeface="Barlow"/>
+                <a:ea typeface="Noto Sans JP"/>
+              </a:rPr>
+              <a:t>ダミー説明</a:t>
+            </a:r>
+          </a:p>
+        </p:txBody>
+      </p:sp>
+      <p:pic>
+        <p:nvPicPr>
+          <p:cNvPr id="12" name="img.item.3" descr="手順3の写真"/>
+          <p:cNvPicPr>
+            <a:picLocks noChangeAspect="1"/>
+          </p:cNvPicPr>
+          <p:nvPr/>
+        </p:nvPicPr>
+        <p:blipFill>
+          <a:blip r:embed="rId4"/>
+          <a:srcRect t="0" b="0"/>
+          <a:stretch>
+            <a:fillRect/>
+          </a:stretch>
+        </p:blipFill>
+        <p:spPr>
+          <a:xfrm>
+            <a:off x="6819900" y="2137410"/>
+            <a:ext cx="2077720" cy="2077720"/>
+          </a:xfrm>
+          <a:prstGeom prst="rect">
+            <a:avLst/>
+          </a:prstGeom>
+        </p:spPr>
+      </p:pic>
+      <p:sp>
+        <p:nvSpPr>
+          <p:cNvPr id="13" name="deco.item-3-rule"/>
+          <p:cNvSpPr/>
+          <p:nvPr/>
+        </p:nvSpPr>
+        <p:spPr>
+          <a:xfrm>
+            <a:off x="6819900" y="4316730"/>
+            <a:ext cx="355600" cy="38100"/>
+          </a:xfrm>
+          <a:custGeom>
+            <a:avLst/>
+            <a:gdLst/>
+            <a:ahLst/>
+            <a:cxnLst/>
+            <a:rect l="l" t="t" r="r" b="b"/>
+            <a:pathLst>
+              <a:path w="355600" h="38100">
+                <a:moveTo>
+                  <a:pt x="0" y="0"/>
+                </a:moveTo>
+                <a:lnTo>
+                  <a:pt x="355600" y="0"/>
+                </a:lnTo>
+                <a:lnTo>
+                  <a:pt x="355600" y="38100"/>
+                </a:lnTo>
+                <a:lnTo>
+                  <a:pt x="0" y="38100"/>
+                </a:lnTo>
+                <a:close/>
+              </a:path>
+            </a:pathLst>
+          </a:custGeom>
+          <a:solidFill>
+            <a:schemeClr val="accent1"/>
+          </a:solidFill>
+          <a:ln>
+            <a:noFill/>
+          </a:ln>
+        </p:spPr>
+      </p:sp>
+      <p:sp>
+        <p:nvSpPr>
+          <p:cNvPr id="14" name="txt.item.3.caption"/>
+          <p:cNvSpPr txBox="1"/>
+          <p:nvPr/>
+        </p:nvSpPr>
+        <p:spPr>
+          <a:xfrm>
+            <a:off x="6819900" y="4443730"/>
+            <a:ext cx="2077720" cy="558800"/>
+          </a:xfrm>
+          <a:prstGeom prst="rect">
+            <a:avLst/>
+          </a:prstGeom>
+          <a:noFill/>
+        </p:spPr>
+        <p:txBody>
+          <a:bodyPr wrap="square" lIns="0" tIns="0" rIns="0" bIns="0" anchor="t" rtlCol="0">
+            <a:noAutofit/>
+          </a:bodyPr>
+          <a:lstStyle/>
+          <a:p>
+            <a:pPr algn="l" eaLnBrk="1" hangingPunct="1" latinLnBrk="0">
+              <a:lnSpc>
+                <a:spcPts val="2100"/>
+              </a:lnSpc>
+            </a:pPr>
+            <a:r>
+              <a:rPr lang="ja-JP" altLang="en-US" sz="1500" b="1" dirty="0">
+                <a:solidFill>
+                  <a:schemeClr val="tx1"/>
+                </a:solidFill>
+                <a:latin typeface="Barlow"/>
+                <a:ea typeface="Noto Sans JP"/>
+              </a:rPr>
+              <a:t>ダミー説明</a:t>
+            </a:r>
+          </a:p>
+        </p:txBody>
+      </p:sp>
+      <p:pic>
+        <p:nvPicPr>
+          <p:cNvPr id="15" name="img.item.4" descr="手順4の写真"/>
+          <p:cNvPicPr>
+            <a:picLocks noChangeAspect="1"/>
+          </p:cNvPicPr>
+          <p:nvPr/>
+        </p:nvPicPr>
+        <p:blipFill>
+          <a:blip r:embed="rId5"/>
+          <a:srcRect t="0" b="0"/>
+          <a:stretch>
+            <a:fillRect/>
+          </a:stretch>
+        </p:blipFill>
+        <p:spPr>
+          <a:xfrm>
+            <a:off x="9204960" y="2137410"/>
+            <a:ext cx="2077720" cy="2077720"/>
+          </a:xfrm>
+          <a:prstGeom prst="rect">
+            <a:avLst/>
+          </a:prstGeom>
+        </p:spPr>
+      </p:pic>
+      <p:sp>
+        <p:nvSpPr>
+          <p:cNvPr id="16" name="deco.item-4-rule"/>
+          <p:cNvSpPr/>
+          <p:nvPr/>
+        </p:nvSpPr>
+        <p:spPr>
+          <a:xfrm>
+            <a:off x="9204960" y="4316730"/>
+            <a:ext cx="355600" cy="38100"/>
+          </a:xfrm>
+          <a:custGeom>
+            <a:avLst/>
+            <a:gdLst/>
+            <a:ahLst/>
+            <a:cxnLst/>
+            <a:rect l="l" t="t" r="r" b="b"/>
+            <a:pathLst>
+              <a:path w="355600" h="38100">
+                <a:moveTo>
+                  <a:pt x="0" y="0"/>
+                </a:moveTo>
+                <a:lnTo>
+                  <a:pt x="355600" y="0"/>
+                </a:lnTo>
+                <a:lnTo>
+                  <a:pt x="355600" y="38100"/>
+                </a:lnTo>
+                <a:lnTo>
+                  <a:pt x="0" y="38100"/>
+                </a:lnTo>
+                <a:close/>
+              </a:path>
+            </a:pathLst>
+          </a:custGeom>
+          <a:solidFill>
+            <a:schemeClr val="accent1"/>
+          </a:solidFill>
+          <a:ln>
+            <a:noFill/>
+          </a:ln>
+        </p:spPr>
+      </p:sp>
+      <p:sp>
+        <p:nvSpPr>
+          <p:cNvPr id="17" name="txt.item.4.caption"/>
+          <p:cNvSpPr txBox="1"/>
+          <p:nvPr/>
+        </p:nvSpPr>
+        <p:spPr>
+          <a:xfrm>
+            <a:off x="9204960" y="4443730"/>
+            <a:ext cx="2077720" cy="558800"/>
+          </a:xfrm>
+          <a:prstGeom prst="rect">
+            <a:avLst/>
+          </a:prstGeom>
+          <a:noFill/>
+        </p:spPr>
+        <p:txBody>
+          <a:bodyPr wrap="square" lIns="0" tIns="0" rIns="0" bIns="0" anchor="t" rtlCol="0">
+            <a:noAutofit/>
+          </a:bodyPr>
+          <a:lstStyle/>
+          <a:p>
+            <a:pPr algn="l" eaLnBrk="1" hangingPunct="1" latinLnBrk="0">
+              <a:lnSpc>
+                <a:spcPts val="2100"/>
+              </a:lnSpc>
+            </a:pPr>
+            <a:r>
+              <a:rPr lang="ja-JP" altLang="en-US" sz="1500" b="1" dirty="0">
+                <a:solidFill>
+                  <a:schemeClr val="tx1"/>
+                </a:solidFill>
+                <a:latin typeface="Barlow"/>
+                <a:ea typeface="Noto Sans JP"/>
+              </a:rPr>
+              <a:t>ダミー説明</a:t>
             </a:r>
           </a:p>
         </p:txBody>

--- a/templates/provisional.pptx
+++ b/templates/provisional.pptx
@@ -8161,7 +8161,7 @@
         </p:nvSpPr>
         <p:spPr>
           <a:xfrm>
-            <a:off x="6604000" y="889000"/>
+            <a:off x="6604000" y="571500"/>
             <a:ext cx="5080000" cy="1016000"/>
           </a:xfrm>
           <a:prstGeom prst="rect">
@@ -8201,7 +8201,7 @@
         </p:nvSpPr>
         <p:spPr>
           <a:xfrm>
-            <a:off x="6604000" y="2108200"/>
+            <a:off x="6604000" y="1790700"/>
             <a:ext cx="762000" cy="50800"/>
           </a:xfrm>
           <a:custGeom>
@@ -8244,7 +8244,7 @@
         </p:nvSpPr>
         <p:spPr>
           <a:xfrm>
-            <a:off x="6604000" y="2489200"/>
+            <a:off x="6604000" y="2171700"/>
             <a:ext cx="5080000" cy="2311400"/>
           </a:xfrm>
           <a:prstGeom prst="rect">
@@ -8495,7 +8495,7 @@
         </p:nvSpPr>
         <p:spPr>
           <a:xfrm>
-            <a:off x="7061200" y="889000"/>
+            <a:off x="7061200" y="571500"/>
             <a:ext cx="4699000" cy="1016000"/>
           </a:xfrm>
           <a:prstGeom prst="rect">
@@ -8535,7 +8535,7 @@
         </p:nvSpPr>
         <p:spPr>
           <a:xfrm>
-            <a:off x="7061200" y="2603500"/>
+            <a:off x="7061200" y="2286000"/>
             <a:ext cx="152400" cy="152400"/>
           </a:xfrm>
           <a:custGeom>
@@ -8578,7 +8578,7 @@
         </p:nvSpPr>
         <p:spPr>
           <a:xfrm>
-            <a:off x="7366000" y="2540000"/>
+            <a:off x="7366000" y="2222500"/>
             <a:ext cx="4394200" cy="838200"/>
           </a:xfrm>
           <a:prstGeom prst="rect">
@@ -8618,7 +8618,7 @@
         </p:nvSpPr>
         <p:spPr>
           <a:xfrm>
-            <a:off x="7061200" y="3771900"/>
+            <a:off x="7061200" y="3454400"/>
             <a:ext cx="152400" cy="152400"/>
           </a:xfrm>
           <a:custGeom>
@@ -8661,7 +8661,7 @@
         </p:nvSpPr>
         <p:spPr>
           <a:xfrm>
-            <a:off x="7366000" y="3708400"/>
+            <a:off x="7366000" y="3390900"/>
             <a:ext cx="4394200" cy="838200"/>
           </a:xfrm>
           <a:prstGeom prst="rect">
@@ -8701,7 +8701,7 @@
         </p:nvSpPr>
         <p:spPr>
           <a:xfrm>
-            <a:off x="7061200" y="4940300"/>
+            <a:off x="7061200" y="4622800"/>
             <a:ext cx="152400" cy="152400"/>
           </a:xfrm>
           <a:custGeom>
@@ -8744,7 +8744,7 @@
         </p:nvSpPr>
         <p:spPr>
           <a:xfrm>
-            <a:off x="7366000" y="4876800"/>
+            <a:off x="7366000" y="4559300"/>
             <a:ext cx="4394200" cy="838200"/>
           </a:xfrm>
           <a:prstGeom prst="rect">
@@ -11488,7 +11488,7 @@
                   <a:pt x="1854200" y="95250"/>
                 </a:lnTo>
                 <a:lnTo>
-                  <a:pt x="1765300" y="0"/>
+                  <a:pt x="1758950" y="0"/>
                 </a:lnTo>
                 <a:lnTo>
                   <a:pt x="95250" y="0"/>
@@ -11691,7 +11691,7 @@
                   <a:pt x="1854200" y="95250"/>
                 </a:lnTo>
                 <a:lnTo>
-                  <a:pt x="1765300" y="0"/>
+                  <a:pt x="1758950" y="0"/>
                 </a:lnTo>
                 <a:lnTo>
                   <a:pt x="95250" y="0"/>
@@ -11894,7 +11894,7 @@
                   <a:pt x="1854200" y="95250"/>
                 </a:lnTo>
                 <a:lnTo>
-                  <a:pt x="1765300" y="0"/>
+                  <a:pt x="1758950" y="0"/>
                 </a:lnTo>
                 <a:lnTo>
                   <a:pt x="95250" y="0"/>

--- a/templates/provisional.pptx
+++ b/templates/provisional.pptx
@@ -20,6 +20,7 @@
     <p:sldId id="268" r:id="rId20"/>
     <p:sldId id="269" r:id="rId21"/>
     <p:sldId id="270" r:id="rId22"/>
+    <p:sldId id="271" r:id="rId23"/>
   </p:sldIdLst>
   <p:sldSz cx="12192000" cy="6858000" type="screen4x3"/>
   <p:notesSz cx="6858000" cy="9144000"/>
@@ -601,7 +602,7 @@
           </a:p>
           <a:p>
             <a:r>
-              <a:t>role: [closing]</a:t>
+              <a:t>role: [closing, cover]</a:t>
             </a:r>
           </a:p>
           <a:p>
@@ -1032,6 +1033,91 @@
           <a:p>
             <a:r>
               <a:t>label: 写真＋本文B（見出しと要点3つ）</a:t>
+            </a:r>
+          </a:p>
+        </p:txBody>
+      </p:sp>
+      <p:sp>
+        <p:nvSpPr>
+          <p:cNvPr id="4" name="Slide Number Placeholder 3"/>
+          <p:cNvSpPr>
+            <a:spLocks noGrp="1"/>
+          </p:cNvSpPr>
+          <p:nvPr>
+            <p:ph type="sldNum" idx="5" sz="quarter"/>
+          </p:nvPr>
+        </p:nvSpPr>
+        <p:spPr/>
+      </p:sp>
+    </p:spTree>
+  </p:cSld>
+  <p:clrMapOvr>
+    <a:masterClrMapping/>
+  </p:clrMapOvr>
+</p:notes>
+</file>
+
+<file path=ppt/notesSlides/notesSlide16.xml><?xml version="1.0" encoding="utf-8"?>
+<p:notes xmlns:a="http://schemas.openxmlformats.org/drawingml/2006/main" xmlns:p="http://schemas.openxmlformats.org/presentationml/2006/main" xmlns:r="http://schemas.openxmlformats.org/officeDocument/2006/relationships">
+  <p:cSld>
+    <p:spTree>
+      <p:nvGrpSpPr>
+        <p:cNvPr id="1" name=""/>
+        <p:cNvGrpSpPr/>
+        <p:nvPr/>
+      </p:nvGrpSpPr>
+      <p:grpSpPr>
+        <a:xfrm>
+          <a:off x="0" y="0"/>
+          <a:ext cx="0" cy="0"/>
+          <a:chOff x="0" y="0"/>
+          <a:chExt cx="0" cy="0"/>
+        </a:xfrm>
+      </p:grpSpPr>
+      <p:sp>
+        <p:nvSpPr>
+          <p:cNvPr id="2" name="Slide Image Placeholder 1"/>
+          <p:cNvSpPr>
+            <a:spLocks noGrp="1"/>
+          </p:cNvSpPr>
+          <p:nvPr>
+            <p:ph type="sldImg" idx="2"/>
+          </p:nvPr>
+        </p:nvSpPr>
+        <p:spPr/>
+      </p:sp>
+      <p:sp>
+        <p:nvSpPr>
+          <p:cNvPr id="3" name="Notes Placeholder 2"/>
+          <p:cNvSpPr>
+            <a:spLocks noGrp="1"/>
+          </p:cNvSpPr>
+          <p:nvPr>
+            <p:ph type="body" idx="3" sz="quarter"/>
+          </p:nvPr>
+        </p:nvSpPr>
+        <p:spPr/>
+        <p:txBody>
+          <a:bodyPr/>
+          <a:lstStyle/>
+          <a:p>
+            <a:r>
+              <a:t>type: cover</a:t>
+            </a:r>
+          </a:p>
+          <a:p>
+            <a:r>
+              <a:t>variant: "plain"</a:t>
+            </a:r>
+          </a:p>
+          <a:p>
+            <a:r>
+              <a:t>role: [cover]</a:t>
+            </a:r>
+          </a:p>
+          <a:p>
+            <a:r>
+              <a:t>label: 表紙（写真＋見出しだけ）</a:t>
             </a:r>
           </a:p>
         </p:txBody>
@@ -8772,6 +8858,358 @@
                 <a:ea typeface="Noto Sans JP Medium"/>
               </a:rPr>
               <a:t>ダミー要点</a:t>
+            </a:r>
+          </a:p>
+        </p:txBody>
+      </p:sp>
+    </p:spTree>
+  </p:cSld>
+  <p:clrMapOvr>
+    <a:masterClrMapping/>
+  </p:clrMapOvr>
+</p:sld>
+</file>
+
+<file path=ppt/slides/slide16.xml><?xml version="1.0" encoding="utf-8"?>
+<p:sld xmlns:a="http://schemas.openxmlformats.org/drawingml/2006/main" xmlns:p="http://schemas.openxmlformats.org/presentationml/2006/main" xmlns:r="http://schemas.openxmlformats.org/officeDocument/2006/relationships">
+  <p:cSld>
+    <p:spTree>
+      <p:nvGrpSpPr>
+        <p:cNvPr id="1" name=""/>
+        <p:cNvGrpSpPr/>
+        <p:nvPr/>
+      </p:nvGrpSpPr>
+      <p:grpSpPr/>
+      <p:pic>
+        <p:nvPicPr>
+          <p:cNvPr id="2" name="img.hero" descr="表紙の写真"/>
+          <p:cNvPicPr>
+            <a:picLocks noChangeAspect="1"/>
+          </p:cNvPicPr>
+          <p:nvPr/>
+        </p:nvPicPr>
+        <p:blipFill>
+          <a:blip r:embed="rId2"/>
+          <a:srcRect t="7812" b="7812"/>
+          <a:stretch>
+            <a:fillRect/>
+          </a:stretch>
+        </p:blipFill>
+        <p:spPr>
+          <a:xfrm>
+            <a:off x="0" y="0"/>
+            <a:ext cx="12192000" cy="6858000"/>
+          </a:xfrm>
+          <a:custGeom>
+            <a:avLst/>
+            <a:gdLst/>
+            <a:ahLst/>
+            <a:cxnLst/>
+            <a:rect l="l" t="t" r="r" b="b"/>
+            <a:pathLst>
+              <a:path w="12192000" h="6858000">
+                <a:moveTo>
+                  <a:pt x="4737100" y="0"/>
+                </a:moveTo>
+                <a:lnTo>
+                  <a:pt x="12192000" y="0"/>
+                </a:lnTo>
+                <a:lnTo>
+                  <a:pt x="12192000" y="6858000"/>
+                </a:lnTo>
+                <a:lnTo>
+                  <a:pt x="0" y="6858000"/>
+                </a:lnTo>
+                <a:lnTo>
+                  <a:pt x="0" y="4737100"/>
+                </a:lnTo>
+                <a:close/>
+              </a:path>
+            </a:pathLst>
+          </a:custGeom>
+        </p:spPr>
+      </p:pic>
+      <p:sp>
+        <p:nvSpPr>
+          <p:cNvPr id="3" name="deco.headline-band"/>
+          <p:cNvSpPr/>
+          <p:nvPr/>
+        </p:nvSpPr>
+        <p:spPr>
+          <a:xfrm>
+            <a:off x="-107950" y="1631950"/>
+            <a:ext cx="6623050" cy="1073150"/>
+          </a:xfrm>
+          <a:custGeom>
+            <a:avLst/>
+            <a:gdLst/>
+            <a:ahLst/>
+            <a:cxnLst/>
+            <a:rect l="l" t="t" r="r" b="b"/>
+            <a:pathLst>
+              <a:path w="6623050" h="1073150">
+                <a:moveTo>
+                  <a:pt x="0" y="0"/>
+                </a:moveTo>
+                <a:lnTo>
+                  <a:pt x="6623050" y="0"/>
+                </a:lnTo>
+                <a:lnTo>
+                  <a:pt x="5549900" y="1073150"/>
+                </a:lnTo>
+                <a:lnTo>
+                  <a:pt x="0" y="1073150"/>
+                </a:lnTo>
+                <a:close/>
+              </a:path>
+            </a:pathLst>
+          </a:custGeom>
+          <a:solidFill>
+            <a:schemeClr val="tx1">
+              <a:alpha val="85000"/>
+            </a:schemeClr>
+          </a:solidFill>
+          <a:ln>
+            <a:noFill/>
+          </a:ln>
+        </p:spPr>
+      </p:sp>
+      <p:sp>
+        <p:nvSpPr>
+          <p:cNvPr id="4" name="deco.subtitle-plate"/>
+          <p:cNvSpPr/>
+          <p:nvPr/>
+        </p:nvSpPr>
+        <p:spPr>
+          <a:xfrm>
+            <a:off x="5568950" y="1638300"/>
+            <a:ext cx="5505450" cy="1066800"/>
+          </a:xfrm>
+          <a:custGeom>
+            <a:avLst/>
+            <a:gdLst/>
+            <a:ahLst/>
+            <a:cxnLst/>
+            <a:rect l="l" t="t" r="r" b="b"/>
+            <a:pathLst>
+              <a:path w="5505450" h="1066800">
+                <a:moveTo>
+                  <a:pt x="0" y="1066800"/>
+                </a:moveTo>
+                <a:lnTo>
+                  <a:pt x="1073150" y="0"/>
+                </a:lnTo>
+                <a:lnTo>
+                  <a:pt x="5505450" y="0"/>
+                </a:lnTo>
+                <a:lnTo>
+                  <a:pt x="5505450" y="1066800"/>
+                </a:lnTo>
+                <a:close/>
+              </a:path>
+            </a:pathLst>
+          </a:custGeom>
+          <a:solidFill>
+            <a:schemeClr val="bg1"/>
+          </a:solidFill>
+          <a:ln>
+            <a:noFill/>
+          </a:ln>
+        </p:spPr>
+      </p:sp>
+      <p:sp>
+        <p:nvSpPr>
+          <p:cNvPr id="5" name="deco.line-1"/>
+          <p:cNvSpPr/>
+          <p:nvPr/>
+        </p:nvSpPr>
+        <p:spPr>
+          <a:xfrm>
+            <a:off x="2470150" y="527050"/>
+            <a:ext cx="1612900" cy="1479550"/>
+          </a:xfrm>
+          <a:custGeom>
+            <a:avLst/>
+            <a:gdLst/>
+            <a:ahLst/>
+            <a:cxnLst/>
+            <a:rect l="l" t="t" r="r" b="b"/>
+            <a:pathLst>
+              <a:path w="1612900" h="1479550">
+                <a:moveTo>
+                  <a:pt x="0" y="1479550"/>
+                </a:moveTo>
+                <a:lnTo>
+                  <a:pt x="133350" y="1479550"/>
+                </a:lnTo>
+                <a:lnTo>
+                  <a:pt x="1612900" y="0"/>
+                </a:lnTo>
+                <a:lnTo>
+                  <a:pt x="1479550" y="0"/>
+                </a:lnTo>
+                <a:close/>
+              </a:path>
+            </a:pathLst>
+          </a:custGeom>
+          <a:solidFill>
+            <a:schemeClr val="accent1"/>
+          </a:solidFill>
+          <a:ln>
+            <a:noFill/>
+          </a:ln>
+        </p:spPr>
+      </p:sp>
+      <p:sp>
+        <p:nvSpPr>
+          <p:cNvPr id="6" name="deco.end-triangle"/>
+          <p:cNvSpPr/>
+          <p:nvPr/>
+        </p:nvSpPr>
+        <p:spPr>
+          <a:xfrm>
+            <a:off x="10998200" y="5702300"/>
+            <a:ext cx="933450" cy="933450"/>
+          </a:xfrm>
+          <a:custGeom>
+            <a:avLst/>
+            <a:gdLst/>
+            <a:ahLst/>
+            <a:cxnLst/>
+            <a:rect l="l" t="t" r="r" b="b"/>
+            <a:pathLst>
+              <a:path w="933450" h="933450">
+                <a:moveTo>
+                  <a:pt x="933450" y="0"/>
+                </a:moveTo>
+                <a:lnTo>
+                  <a:pt x="933450" y="933450"/>
+                </a:lnTo>
+                <a:lnTo>
+                  <a:pt x="0" y="933450"/>
+                </a:lnTo>
+                <a:close/>
+              </a:path>
+            </a:pathLst>
+          </a:custGeom>
+          <a:solidFill>
+            <a:schemeClr val="accent2"/>
+          </a:solidFill>
+          <a:ln>
+            <a:noFill/>
+          </a:ln>
+        </p:spPr>
+      </p:sp>
+      <p:sp>
+        <p:nvSpPr>
+          <p:cNvPr id="7" name="txt.headline"/>
+          <p:cNvSpPr txBox="1"/>
+          <p:nvPr/>
+        </p:nvSpPr>
+        <p:spPr>
+          <a:xfrm>
+            <a:off x="1212850" y="1663700"/>
+            <a:ext cx="4381500" cy="1016000"/>
+          </a:xfrm>
+          <a:prstGeom prst="rect">
+            <a:avLst/>
+          </a:prstGeom>
+          <a:noFill/>
+        </p:spPr>
+        <p:txBody>
+          <a:bodyPr wrap="square" lIns="0" tIns="0" rIns="0" bIns="0" anchor="t" rtlCol="0">
+            <a:noAutofit/>
+          </a:bodyPr>
+          <a:lstStyle/>
+          <a:p>
+            <a:pPr algn="l" eaLnBrk="1" hangingPunct="1" latinLnBrk="0">
+              <a:lnSpc>
+                <a:spcPts val="4000"/>
+              </a:lnSpc>
+            </a:pPr>
+            <a:r>
+              <a:rPr lang="ja-JP" altLang="en-US" sz="3250" b="0" dirty="0">
+                <a:solidFill>
+                  <a:schemeClr val="bg1"/>
+                </a:solidFill>
+                <a:latin typeface="Noto Serif JP"/>
+                <a:ea typeface="Noto Serif JP"/>
+              </a:rPr>
+              <a:t>ダミー大見出し</a:t>
+            </a:r>
+          </a:p>
+          <a:p>
+            <a:pPr algn="l" eaLnBrk="1" hangingPunct="1" latinLnBrk="0">
+              <a:lnSpc>
+                <a:spcPts val="4000"/>
+              </a:lnSpc>
+            </a:pPr>
+            <a:r>
+              <a:rPr lang="ja-JP" altLang="en-US" sz="3250" b="0" dirty="0">
+                <a:solidFill>
+                  <a:schemeClr val="bg1"/>
+                </a:solidFill>
+                <a:latin typeface="Noto Serif JP"/>
+                <a:ea typeface="Noto Serif JP"/>
+              </a:rPr>
+              <a:t>ダミー大見出し</a:t>
+            </a:r>
+          </a:p>
+        </p:txBody>
+      </p:sp>
+      <p:sp>
+        <p:nvSpPr>
+          <p:cNvPr id="8" name="txt.subtitle"/>
+          <p:cNvSpPr txBox="1"/>
+          <p:nvPr/>
+        </p:nvSpPr>
+        <p:spPr>
+          <a:xfrm>
+            <a:off x="6673850" y="1905000"/>
+            <a:ext cx="5486400" cy="660400"/>
+          </a:xfrm>
+          <a:prstGeom prst="rect">
+            <a:avLst/>
+          </a:prstGeom>
+          <a:noFill/>
+        </p:spPr>
+        <p:txBody>
+          <a:bodyPr wrap="square" lIns="0" tIns="0" rIns="0" bIns="0" anchor="t" rtlCol="0">
+            <a:noAutofit/>
+          </a:bodyPr>
+          <a:lstStyle/>
+          <a:p>
+            <a:pPr algn="l" eaLnBrk="1" hangingPunct="1" latinLnBrk="0">
+              <a:lnSpc>
+                <a:spcPts val="2550"/>
+              </a:lnSpc>
+            </a:pPr>
+            <a:r>
+              <a:rPr lang="ja-JP" altLang="en-US" sz="1500" b="1" dirty="0">
+                <a:solidFill>
+                  <a:schemeClr val="tx1"/>
+                </a:solidFill>
+                <a:latin typeface="Barlow"/>
+                <a:ea typeface="Noto Sans JP"/>
+              </a:rPr>
+              <a:t>ダミー副題</a:t>
+            </a:r>
+          </a:p>
+          <a:p>
+            <a:pPr algn="l" eaLnBrk="1" hangingPunct="1" latinLnBrk="0">
+              <a:lnSpc>
+                <a:spcPts val="2550"/>
+              </a:lnSpc>
+            </a:pPr>
+            <a:r>
+              <a:rPr lang="ja-JP" altLang="en-US" sz="1500" b="1" dirty="0">
+                <a:solidFill>
+                  <a:schemeClr val="tx1"/>
+                </a:solidFill>
+                <a:latin typeface="Barlow"/>
+                <a:ea typeface="Noto Sans JP"/>
+              </a:rPr>
+              <a:t>ダミー副題</a:t>
             </a:r>
           </a:p>
         </p:txBody>

--- a/templates/provisional.pptx
+++ b/templates/provisional.pptx
@@ -8983,7 +8983,7 @@
         <p:spPr>
           <a:xfrm>
             <a:off x="5568950" y="1638300"/>
-            <a:ext cx="5505450" cy="1066800"/>
+            <a:ext cx="6724650" cy="1066800"/>
           </a:xfrm>
           <a:custGeom>
             <a:avLst/>
@@ -8992,7 +8992,7 @@
             <a:cxnLst/>
             <a:rect l="l" t="t" r="r" b="b"/>
             <a:pathLst>
-              <a:path w="5505450" h="1066800">
+              <a:path w="6724650" h="1066800">
                 <a:moveTo>
                   <a:pt x="0" y="1066800"/>
                 </a:moveTo>
@@ -9000,10 +9000,10 @@
                   <a:pt x="1073150" y="0"/>
                 </a:lnTo>
                 <a:lnTo>
-                  <a:pt x="5505450" y="0"/>
-                </a:lnTo>
-                <a:lnTo>
-                  <a:pt x="5505450" y="1066800"/>
+                  <a:pt x="6724650" y="0"/>
+                </a:lnTo>
+                <a:lnTo>
+                  <a:pt x="6724650" y="1066800"/>
                 </a:lnTo>
                 <a:close/>
               </a:path>
